--- a/in_class_slides/geog4300_L13 Hypotheses and one sample tests and normality.pptx
+++ b/in_class_slides/geog4300_L13 Hypotheses and one sample tests and normality.pptx
@@ -5,7 +5,7 @@
     <p:sldMasterId id="2147483732" r:id="rId1"/>
   </p:sldMasterIdLst>
   <p:notesMasterIdLst>
-    <p:notesMasterId r:id="rId24"/>
+    <p:notesMasterId r:id="rId29"/>
   </p:notesMasterIdLst>
   <p:sldIdLst>
     <p:sldId id="256" r:id="rId2"/>
@@ -15,21 +15,26 @@
     <p:sldId id="319" r:id="rId6"/>
     <p:sldId id="297" r:id="rId7"/>
     <p:sldId id="269" r:id="rId8"/>
-    <p:sldId id="320" r:id="rId9"/>
-    <p:sldId id="298" r:id="rId10"/>
-    <p:sldId id="321" r:id="rId11"/>
-    <p:sldId id="299" r:id="rId12"/>
-    <p:sldId id="304" r:id="rId13"/>
-    <p:sldId id="296" r:id="rId14"/>
-    <p:sldId id="322" r:id="rId15"/>
-    <p:sldId id="329" r:id="rId16"/>
-    <p:sldId id="317" r:id="rId17"/>
-    <p:sldId id="323" r:id="rId18"/>
-    <p:sldId id="307" r:id="rId19"/>
-    <p:sldId id="308" r:id="rId20"/>
-    <p:sldId id="324" r:id="rId21"/>
-    <p:sldId id="326" r:id="rId22"/>
-    <p:sldId id="262" r:id="rId23"/>
+    <p:sldId id="331" r:id="rId9"/>
+    <p:sldId id="333" r:id="rId10"/>
+    <p:sldId id="332" r:id="rId11"/>
+    <p:sldId id="330" r:id="rId12"/>
+    <p:sldId id="320" r:id="rId13"/>
+    <p:sldId id="298" r:id="rId14"/>
+    <p:sldId id="321" r:id="rId15"/>
+    <p:sldId id="299" r:id="rId16"/>
+    <p:sldId id="304" r:id="rId17"/>
+    <p:sldId id="296" r:id="rId18"/>
+    <p:sldId id="322" r:id="rId19"/>
+    <p:sldId id="329" r:id="rId20"/>
+    <p:sldId id="317" r:id="rId21"/>
+    <p:sldId id="323" r:id="rId22"/>
+    <p:sldId id="307" r:id="rId23"/>
+    <p:sldId id="308" r:id="rId24"/>
+    <p:sldId id="334" r:id="rId25"/>
+    <p:sldId id="324" r:id="rId26"/>
+    <p:sldId id="326" r:id="rId27"/>
+    <p:sldId id="262" r:id="rId28"/>
   </p:sldIdLst>
   <p:sldSz cx="12192000" cy="6858000"/>
   <p:notesSz cx="6858000" cy="9144000"/>
@@ -1392,7 +1397,7 @@
                 <a:cs typeface="Calibri"/>
                 <a:sym typeface="Calibri"/>
               </a:rPr>
-              <a:t>16</a:t>
+              <a:t>15</a:t>
             </a:fld>
             <a:endParaRPr lang="en-US" sz="1200">
               <a:solidFill>
@@ -1409,7 +1414,7 @@
     </p:spTree>
     <p:extLst>
       <p:ext uri="{BB962C8B-B14F-4D97-AF65-F5344CB8AC3E}">
-        <p14:creationId xmlns:p14="http://schemas.microsoft.com/office/powerpoint/2010/main" val="2476291105"/>
+        <p14:creationId xmlns:p14="http://schemas.microsoft.com/office/powerpoint/2010/main" val="1412984944"/>
       </p:ext>
     </p:extLst>
   </p:cSld>
@@ -1581,7 +1586,7 @@
                 <a:cs typeface="Calibri"/>
                 <a:sym typeface="Calibri"/>
               </a:rPr>
-              <a:t>18</a:t>
+              <a:t>16</a:t>
             </a:fld>
             <a:endParaRPr lang="en-US" sz="1200">
               <a:solidFill>
@@ -1598,7 +1603,7 @@
     </p:spTree>
     <p:extLst>
       <p:ext uri="{BB962C8B-B14F-4D97-AF65-F5344CB8AC3E}">
-        <p14:creationId xmlns:p14="http://schemas.microsoft.com/office/powerpoint/2010/main" val="1552006490"/>
+        <p14:creationId xmlns:p14="http://schemas.microsoft.com/office/powerpoint/2010/main" val="517691361"/>
       </p:ext>
     </p:extLst>
   </p:cSld>
@@ -1613,7 +1618,7 @@
   <p:cSld>
     <p:spTree>
       <p:nvGrpSpPr>
-        <p:cNvPr id="1" name="Shape 126"/>
+        <p:cNvPr id="1" name="Shape 96"/>
         <p:cNvGrpSpPr/>
         <p:nvPr/>
       </p:nvGrpSpPr>
@@ -1627,7 +1632,7 @@
       </p:grpSpPr>
       <p:sp>
         <p:nvSpPr>
-          <p:cNvPr id="127" name="Shape 127"/>
+          <p:cNvPr id="97" name="Shape 97"/>
           <p:cNvSpPr>
             <a:spLocks noGrp="1" noRot="1" noChangeAspect="1"/>
           </p:cNvSpPr>
@@ -1678,7 +1683,7 @@
       </p:sp>
       <p:sp>
         <p:nvSpPr>
-          <p:cNvPr id="128" name="Shape 128"/>
+          <p:cNvPr id="98" name="Shape 98"/>
           <p:cNvSpPr txBox="1">
             <a:spLocks noGrp="1"/>
           </p:cNvSpPr>
@@ -1689,7 +1694,7 @@
         <p:spPr>
           <a:xfrm>
             <a:off x="685800" y="4343400"/>
-            <a:ext cx="5486400" cy="4114800"/>
+            <a:ext cx="5486399" cy="4114800"/>
           </a:xfrm>
           <a:prstGeom prst="rect">
             <a:avLst/>
@@ -1712,21 +1717,24 @@
               <a:buSzPct val="25000"/>
               <a:buNone/>
             </a:pPr>
-            <a:endParaRPr sz="1200" b="0" i="0" u="none" strike="noStrike" cap="none">
-              <a:solidFill>
-                <a:schemeClr val="dk1"/>
-              </a:solidFill>
-              <a:latin typeface="Calibri"/>
-              <a:ea typeface="Calibri"/>
-              <a:cs typeface="Calibri"/>
-              <a:sym typeface="Calibri"/>
-            </a:endParaRPr>
-          </a:p>
-        </p:txBody>
-      </p:sp>
-      <p:sp>
-        <p:nvSpPr>
-          <p:cNvPr id="129" name="Shape 129"/>
+            <a:r>
+              <a:rPr lang="en-US" sz="1200" b="0" i="0" u="none" strike="noStrike" cap="none">
+                <a:solidFill>
+                  <a:schemeClr val="dk1"/>
+                </a:solidFill>
+                <a:latin typeface="Calibri"/>
+                <a:ea typeface="Calibri"/>
+                <a:cs typeface="Calibri"/>
+                <a:sym typeface="Calibri"/>
+              </a:rPr>
+              <a:t>Alternative hypothesis is usually what you’re trying to prove.</a:t>
+            </a:r>
+          </a:p>
+        </p:txBody>
+      </p:sp>
+      <p:sp>
+        <p:nvSpPr>
+          <p:cNvPr id="99" name="Shape 99"/>
           <p:cNvSpPr txBox="1">
             <a:spLocks noGrp="1"/>
           </p:cNvSpPr>
@@ -1737,7 +1745,7 @@
         <p:spPr>
           <a:xfrm>
             <a:off x="3884612" y="8685213"/>
-            <a:ext cx="2971800" cy="457200"/>
+            <a:ext cx="2971799" cy="457200"/>
           </a:xfrm>
           <a:prstGeom prst="rect">
             <a:avLst/>
@@ -1763,18 +1771,18 @@
             <a:fld id="{00000000-1234-1234-1234-123412341234}" type="slidenum">
               <a:rPr lang="en-US" sz="1200">
                 <a:solidFill>
-                  <a:srgbClr val="000000"/>
+                  <a:schemeClr val="dk1"/>
                 </a:solidFill>
                 <a:latin typeface="Calibri"/>
                 <a:ea typeface="Calibri"/>
                 <a:cs typeface="Calibri"/>
                 <a:sym typeface="Calibri"/>
               </a:rPr>
-              <a:t>19</a:t>
+              <a:t>17</a:t>
             </a:fld>
             <a:endParaRPr lang="en-US" sz="1200">
               <a:solidFill>
-                <a:srgbClr val="000000"/>
+                <a:schemeClr val="dk1"/>
               </a:solidFill>
               <a:latin typeface="Calibri"/>
               <a:ea typeface="Calibri"/>
@@ -1787,7 +1795,7 @@
     </p:spTree>
     <p:extLst>
       <p:ext uri="{BB962C8B-B14F-4D97-AF65-F5344CB8AC3E}">
-        <p14:creationId xmlns:p14="http://schemas.microsoft.com/office/powerpoint/2010/main" val="854833795"/>
+        <p14:creationId xmlns:p14="http://schemas.microsoft.com/office/powerpoint/2010/main" val="220382363"/>
       </p:ext>
     </p:extLst>
   </p:cSld>
@@ -1802,7 +1810,7 @@
   <p:cSld>
     <p:spTree>
       <p:nvGrpSpPr>
-        <p:cNvPr id="1" name="Shape 96"/>
+        <p:cNvPr id="1" name="Shape 126"/>
         <p:cNvGrpSpPr/>
         <p:nvPr/>
       </p:nvGrpSpPr>
@@ -1816,7 +1824,7 @@
       </p:grpSpPr>
       <p:sp>
         <p:nvSpPr>
-          <p:cNvPr id="97" name="Shape 97"/>
+          <p:cNvPr id="127" name="Shape 127"/>
           <p:cNvSpPr>
             <a:spLocks noGrp="1" noRot="1" noChangeAspect="1"/>
           </p:cNvSpPr>
@@ -1867,7 +1875,7 @@
       </p:sp>
       <p:sp>
         <p:nvSpPr>
-          <p:cNvPr id="98" name="Shape 98"/>
+          <p:cNvPr id="128" name="Shape 128"/>
           <p:cNvSpPr txBox="1">
             <a:spLocks noGrp="1"/>
           </p:cNvSpPr>
@@ -1878,7 +1886,7 @@
         <p:spPr>
           <a:xfrm>
             <a:off x="685800" y="4343400"/>
-            <a:ext cx="5486399" cy="4114800"/>
+            <a:ext cx="5486400" cy="4114800"/>
           </a:xfrm>
           <a:prstGeom prst="rect">
             <a:avLst/>
@@ -1901,24 +1909,21 @@
               <a:buSzPct val="25000"/>
               <a:buNone/>
             </a:pPr>
-            <a:r>
-              <a:rPr lang="en-US" sz="1200" b="0" i="0" u="none" strike="noStrike" cap="none">
-                <a:solidFill>
-                  <a:schemeClr val="dk1"/>
-                </a:solidFill>
-                <a:latin typeface="Calibri"/>
-                <a:ea typeface="Calibri"/>
-                <a:cs typeface="Calibri"/>
-                <a:sym typeface="Calibri"/>
-              </a:rPr>
-              <a:t>Alternative hypothesis is usually what you’re trying to prove.</a:t>
-            </a:r>
-          </a:p>
-        </p:txBody>
-      </p:sp>
-      <p:sp>
-        <p:nvSpPr>
-          <p:cNvPr id="99" name="Shape 99"/>
+            <a:endParaRPr sz="1200" b="0" i="0" u="none" strike="noStrike" cap="none">
+              <a:solidFill>
+                <a:schemeClr val="dk1"/>
+              </a:solidFill>
+              <a:latin typeface="Calibri"/>
+              <a:ea typeface="Calibri"/>
+              <a:cs typeface="Calibri"/>
+              <a:sym typeface="Calibri"/>
+            </a:endParaRPr>
+          </a:p>
+        </p:txBody>
+      </p:sp>
+      <p:sp>
+        <p:nvSpPr>
+          <p:cNvPr id="129" name="Shape 129"/>
           <p:cNvSpPr txBox="1">
             <a:spLocks noGrp="1"/>
           </p:cNvSpPr>
@@ -1929,7 +1934,7 @@
         <p:spPr>
           <a:xfrm>
             <a:off x="3884612" y="8685213"/>
-            <a:ext cx="2971799" cy="457200"/>
+            <a:ext cx="2971800" cy="457200"/>
           </a:xfrm>
           <a:prstGeom prst="rect">
             <a:avLst/>
@@ -1955,18 +1960,18 @@
             <a:fld id="{00000000-1234-1234-1234-123412341234}" type="slidenum">
               <a:rPr lang="en-US" sz="1200">
                 <a:solidFill>
-                  <a:schemeClr val="dk1"/>
+                  <a:srgbClr val="000000"/>
                 </a:solidFill>
                 <a:latin typeface="Calibri"/>
                 <a:ea typeface="Calibri"/>
                 <a:cs typeface="Calibri"/>
                 <a:sym typeface="Calibri"/>
               </a:rPr>
-              <a:t>20</a:t>
+              <a:t>19</a:t>
             </a:fld>
             <a:endParaRPr lang="en-US" sz="1200">
               <a:solidFill>
-                <a:schemeClr val="dk1"/>
+                <a:srgbClr val="000000"/>
               </a:solidFill>
               <a:latin typeface="Calibri"/>
               <a:ea typeface="Calibri"/>
@@ -1979,7 +1984,7 @@
     </p:spTree>
     <p:extLst>
       <p:ext uri="{BB962C8B-B14F-4D97-AF65-F5344CB8AC3E}">
-        <p14:creationId xmlns:p14="http://schemas.microsoft.com/office/powerpoint/2010/main" val="2811724521"/>
+        <p14:creationId xmlns:p14="http://schemas.microsoft.com/office/powerpoint/2010/main" val="3658355740"/>
       </p:ext>
     </p:extLst>
   </p:cSld>
@@ -1994,7 +1999,7 @@
   <p:cSld>
     <p:spTree>
       <p:nvGrpSpPr>
-        <p:cNvPr id="1" name="Shape 96"/>
+        <p:cNvPr id="1" name="Shape 126"/>
         <p:cNvGrpSpPr/>
         <p:nvPr/>
       </p:nvGrpSpPr>
@@ -2008,7 +2013,7 @@
       </p:grpSpPr>
       <p:sp>
         <p:nvSpPr>
-          <p:cNvPr id="97" name="Shape 97"/>
+          <p:cNvPr id="127" name="Shape 127"/>
           <p:cNvSpPr>
             <a:spLocks noGrp="1" noRot="1" noChangeAspect="1"/>
           </p:cNvSpPr>
@@ -2059,7 +2064,7 @@
       </p:sp>
       <p:sp>
         <p:nvSpPr>
-          <p:cNvPr id="98" name="Shape 98"/>
+          <p:cNvPr id="128" name="Shape 128"/>
           <p:cNvSpPr txBox="1">
             <a:spLocks noGrp="1"/>
           </p:cNvSpPr>
@@ -2070,7 +2075,7 @@
         <p:spPr>
           <a:xfrm>
             <a:off x="685800" y="4343400"/>
-            <a:ext cx="5486399" cy="4114800"/>
+            <a:ext cx="5486400" cy="4114800"/>
           </a:xfrm>
           <a:prstGeom prst="rect">
             <a:avLst/>
@@ -2093,24 +2098,21 @@
               <a:buSzPct val="25000"/>
               <a:buNone/>
             </a:pPr>
-            <a:r>
-              <a:rPr lang="en-US" sz="1200" b="0" i="0" u="none" strike="noStrike" cap="none">
-                <a:solidFill>
-                  <a:schemeClr val="dk1"/>
-                </a:solidFill>
-                <a:latin typeface="Calibri"/>
-                <a:ea typeface="Calibri"/>
-                <a:cs typeface="Calibri"/>
-                <a:sym typeface="Calibri"/>
-              </a:rPr>
-              <a:t>Alternative hypothesis is usually what you’re trying to prove.</a:t>
-            </a:r>
-          </a:p>
-        </p:txBody>
-      </p:sp>
-      <p:sp>
-        <p:nvSpPr>
-          <p:cNvPr id="99" name="Shape 99"/>
+            <a:endParaRPr sz="1200" b="0" i="0" u="none" strike="noStrike" cap="none">
+              <a:solidFill>
+                <a:schemeClr val="dk1"/>
+              </a:solidFill>
+              <a:latin typeface="Calibri"/>
+              <a:ea typeface="Calibri"/>
+              <a:cs typeface="Calibri"/>
+              <a:sym typeface="Calibri"/>
+            </a:endParaRPr>
+          </a:p>
+        </p:txBody>
+      </p:sp>
+      <p:sp>
+        <p:nvSpPr>
+          <p:cNvPr id="129" name="Shape 129"/>
           <p:cNvSpPr txBox="1">
             <a:spLocks noGrp="1"/>
           </p:cNvSpPr>
@@ -2121,7 +2123,7 @@
         <p:spPr>
           <a:xfrm>
             <a:off x="3884612" y="8685213"/>
-            <a:ext cx="2971799" cy="457200"/>
+            <a:ext cx="2971800" cy="457200"/>
           </a:xfrm>
           <a:prstGeom prst="rect">
             <a:avLst/>
@@ -2147,18 +2149,18 @@
             <a:fld id="{00000000-1234-1234-1234-123412341234}" type="slidenum">
               <a:rPr lang="en-US" sz="1200">
                 <a:solidFill>
-                  <a:schemeClr val="dk1"/>
+                  <a:srgbClr val="000000"/>
                 </a:solidFill>
                 <a:latin typeface="Calibri"/>
                 <a:ea typeface="Calibri"/>
                 <a:cs typeface="Calibri"/>
                 <a:sym typeface="Calibri"/>
               </a:rPr>
-              <a:t>21</a:t>
+              <a:t>20</a:t>
             </a:fld>
             <a:endParaRPr lang="en-US" sz="1200">
               <a:solidFill>
-                <a:schemeClr val="dk1"/>
+                <a:srgbClr val="000000"/>
               </a:solidFill>
               <a:latin typeface="Calibri"/>
               <a:ea typeface="Calibri"/>
@@ -2171,7 +2173,7 @@
     </p:spTree>
     <p:extLst>
       <p:ext uri="{BB962C8B-B14F-4D97-AF65-F5344CB8AC3E}">
-        <p14:creationId xmlns:p14="http://schemas.microsoft.com/office/powerpoint/2010/main" val="1003794918"/>
+        <p14:creationId xmlns:p14="http://schemas.microsoft.com/office/powerpoint/2010/main" val="2476291105"/>
       </p:ext>
     </p:extLst>
   </p:cSld>
@@ -2186,7 +2188,7 @@
   <p:cSld>
     <p:spTree>
       <p:nvGrpSpPr>
-        <p:cNvPr id="1" name="Shape 134"/>
+        <p:cNvPr id="1" name="Shape 126"/>
         <p:cNvGrpSpPr/>
         <p:nvPr/>
       </p:nvGrpSpPr>
@@ -2200,7 +2202,7 @@
       </p:grpSpPr>
       <p:sp>
         <p:nvSpPr>
-          <p:cNvPr id="135" name="Shape 135"/>
+          <p:cNvPr id="127" name="Shape 127"/>
           <p:cNvSpPr>
             <a:spLocks noGrp="1" noRot="1" noChangeAspect="1"/>
           </p:cNvSpPr>
@@ -2251,7 +2253,7 @@
       </p:sp>
       <p:sp>
         <p:nvSpPr>
-          <p:cNvPr id="136" name="Shape 136"/>
+          <p:cNvPr id="128" name="Shape 128"/>
           <p:cNvSpPr txBox="1">
             <a:spLocks noGrp="1"/>
           </p:cNvSpPr>
@@ -2262,7 +2264,7 @@
         <p:spPr>
           <a:xfrm>
             <a:off x="685800" y="4343400"/>
-            <a:ext cx="5486399" cy="4114800"/>
+            <a:ext cx="5486400" cy="4114800"/>
           </a:xfrm>
           <a:prstGeom prst="rect">
             <a:avLst/>
@@ -2299,7 +2301,7 @@
       </p:sp>
       <p:sp>
         <p:nvSpPr>
-          <p:cNvPr id="137" name="Shape 137"/>
+          <p:cNvPr id="129" name="Shape 129"/>
           <p:cNvSpPr txBox="1">
             <a:spLocks noGrp="1"/>
           </p:cNvSpPr>
@@ -2310,7 +2312,7 @@
         <p:spPr>
           <a:xfrm>
             <a:off x="3884612" y="8685213"/>
-            <a:ext cx="2971799" cy="457200"/>
+            <a:ext cx="2971800" cy="457200"/>
           </a:xfrm>
           <a:prstGeom prst="rect">
             <a:avLst/>
@@ -2336,7 +2338,7 @@
             <a:fld id="{00000000-1234-1234-1234-123412341234}" type="slidenum">
               <a:rPr lang="en-US" sz="1200">
                 <a:solidFill>
-                  <a:schemeClr val="dk1"/>
+                  <a:srgbClr val="000000"/>
                 </a:solidFill>
                 <a:latin typeface="Calibri"/>
                 <a:ea typeface="Calibri"/>
@@ -2347,7 +2349,7 @@
             </a:fld>
             <a:endParaRPr lang="en-US" sz="1200">
               <a:solidFill>
-                <a:schemeClr val="dk1"/>
+                <a:srgbClr val="000000"/>
               </a:solidFill>
               <a:latin typeface="Calibri"/>
               <a:ea typeface="Calibri"/>
@@ -2358,6 +2360,11 @@
         </p:txBody>
       </p:sp>
     </p:spTree>
+    <p:extLst>
+      <p:ext uri="{BB962C8B-B14F-4D97-AF65-F5344CB8AC3E}">
+        <p14:creationId xmlns:p14="http://schemas.microsoft.com/office/powerpoint/2010/main" val="1552006490"/>
+      </p:ext>
+    </p:extLst>
   </p:cSld>
   <p:clrMapOvr>
     <a:masterClrMapping/>
@@ -2365,12 +2372,12 @@
 </p:notes>
 </file>
 
-<file path=ppt/notesSlides/notesSlide2.xml><?xml version="1.0" encoding="utf-8"?>
+<file path=ppt/notesSlides/notesSlide16.xml><?xml version="1.0" encoding="utf-8"?>
 <p:notes xmlns:a="http://schemas.openxmlformats.org/drawingml/2006/main" xmlns:r="http://schemas.openxmlformats.org/officeDocument/2006/relationships" xmlns:p="http://schemas.openxmlformats.org/presentationml/2006/main" showMasterSp="0" showMasterPhAnim="0">
   <p:cSld>
     <p:spTree>
       <p:nvGrpSpPr>
-        <p:cNvPr id="1" name="Shape 96"/>
+        <p:cNvPr id="1" name="Shape 126"/>
         <p:cNvGrpSpPr/>
         <p:nvPr/>
       </p:nvGrpSpPr>
@@ -2384,7 +2391,7 @@
       </p:grpSpPr>
       <p:sp>
         <p:nvSpPr>
-          <p:cNvPr id="97" name="Shape 97"/>
+          <p:cNvPr id="127" name="Shape 127"/>
           <p:cNvSpPr>
             <a:spLocks noGrp="1" noRot="1" noChangeAspect="1"/>
           </p:cNvSpPr>
@@ -2435,7 +2442,7 @@
       </p:sp>
       <p:sp>
         <p:nvSpPr>
-          <p:cNvPr id="98" name="Shape 98"/>
+          <p:cNvPr id="128" name="Shape 128"/>
           <p:cNvSpPr txBox="1">
             <a:spLocks noGrp="1"/>
           </p:cNvSpPr>
@@ -2446,7 +2453,7 @@
         <p:spPr>
           <a:xfrm>
             <a:off x="685800" y="4343400"/>
-            <a:ext cx="5486399" cy="4114800"/>
+            <a:ext cx="5486400" cy="4114800"/>
           </a:xfrm>
           <a:prstGeom prst="rect">
             <a:avLst/>
@@ -2469,24 +2476,21 @@
               <a:buSzPct val="25000"/>
               <a:buNone/>
             </a:pPr>
-            <a:r>
-              <a:rPr lang="en-US" sz="1200" b="0" i="0" u="none" strike="noStrike" cap="none">
-                <a:solidFill>
-                  <a:schemeClr val="dk1"/>
-                </a:solidFill>
-                <a:latin typeface="Calibri"/>
-                <a:ea typeface="Calibri"/>
-                <a:cs typeface="Calibri"/>
-                <a:sym typeface="Calibri"/>
-              </a:rPr>
-              <a:t>Alternative hypothesis is usually what you’re trying to prove.</a:t>
-            </a:r>
-          </a:p>
-        </p:txBody>
-      </p:sp>
-      <p:sp>
-        <p:nvSpPr>
-          <p:cNvPr id="99" name="Shape 99"/>
+            <a:endParaRPr sz="1200" b="0" i="0" u="none" strike="noStrike" cap="none">
+              <a:solidFill>
+                <a:schemeClr val="dk1"/>
+              </a:solidFill>
+              <a:latin typeface="Calibri"/>
+              <a:ea typeface="Calibri"/>
+              <a:cs typeface="Calibri"/>
+              <a:sym typeface="Calibri"/>
+            </a:endParaRPr>
+          </a:p>
+        </p:txBody>
+      </p:sp>
+      <p:sp>
+        <p:nvSpPr>
+          <p:cNvPr id="129" name="Shape 129"/>
           <p:cNvSpPr txBox="1">
             <a:spLocks noGrp="1"/>
           </p:cNvSpPr>
@@ -2497,7 +2501,7 @@
         <p:spPr>
           <a:xfrm>
             <a:off x="3884612" y="8685213"/>
-            <a:ext cx="2971799" cy="457200"/>
+            <a:ext cx="2971800" cy="457200"/>
           </a:xfrm>
           <a:prstGeom prst="rect">
             <a:avLst/>
@@ -2523,18 +2527,18 @@
             <a:fld id="{00000000-1234-1234-1234-123412341234}" type="slidenum">
               <a:rPr lang="en-US" sz="1200">
                 <a:solidFill>
-                  <a:schemeClr val="dk1"/>
+                  <a:srgbClr val="000000"/>
                 </a:solidFill>
                 <a:latin typeface="Calibri"/>
                 <a:ea typeface="Calibri"/>
                 <a:cs typeface="Calibri"/>
                 <a:sym typeface="Calibri"/>
               </a:rPr>
-              <a:t>4</a:t>
+              <a:t>23</a:t>
             </a:fld>
             <a:endParaRPr lang="en-US" sz="1200">
               <a:solidFill>
-                <a:schemeClr val="dk1"/>
+                <a:srgbClr val="000000"/>
               </a:solidFill>
               <a:latin typeface="Calibri"/>
               <a:ea typeface="Calibri"/>
@@ -2547,7 +2551,7 @@
     </p:spTree>
     <p:extLst>
       <p:ext uri="{BB962C8B-B14F-4D97-AF65-F5344CB8AC3E}">
-        <p14:creationId xmlns:p14="http://schemas.microsoft.com/office/powerpoint/2010/main" val="249885131"/>
+        <p14:creationId xmlns:p14="http://schemas.microsoft.com/office/powerpoint/2010/main" val="854833795"/>
       </p:ext>
     </p:extLst>
   </p:cSld>
@@ -2557,7 +2561,7 @@
 </p:notes>
 </file>
 
-<file path=ppt/notesSlides/notesSlide3.xml><?xml version="1.0" encoding="utf-8"?>
+<file path=ppt/notesSlides/notesSlide17.xml><?xml version="1.0" encoding="utf-8"?>
 <p:notes xmlns:a="http://schemas.openxmlformats.org/drawingml/2006/main" xmlns:r="http://schemas.openxmlformats.org/officeDocument/2006/relationships" xmlns:p="http://schemas.openxmlformats.org/presentationml/2006/main" showMasterSp="0" showMasterPhAnim="0">
   <p:cSld>
     <p:spTree>
@@ -2719,7 +2723,7 @@
                 <a:cs typeface="Calibri"/>
                 <a:sym typeface="Calibri"/>
               </a:rPr>
-              <a:t>6</a:t>
+              <a:t>24</a:t>
             </a:fld>
             <a:endParaRPr lang="en-US" sz="1200">
               <a:solidFill>
@@ -2736,7 +2740,7 @@
     </p:spTree>
     <p:extLst>
       <p:ext uri="{BB962C8B-B14F-4D97-AF65-F5344CB8AC3E}">
-        <p14:creationId xmlns:p14="http://schemas.microsoft.com/office/powerpoint/2010/main" val="1463331857"/>
+        <p14:creationId xmlns:p14="http://schemas.microsoft.com/office/powerpoint/2010/main" val="1488962832"/>
       </p:ext>
     </p:extLst>
   </p:cSld>
@@ -2746,12 +2750,12 @@
 </p:notes>
 </file>
 
-<file path=ppt/notesSlides/notesSlide4.xml><?xml version="1.0" encoding="utf-8"?>
+<file path=ppt/notesSlides/notesSlide18.xml><?xml version="1.0" encoding="utf-8"?>
 <p:notes xmlns:a="http://schemas.openxmlformats.org/drawingml/2006/main" xmlns:r="http://schemas.openxmlformats.org/officeDocument/2006/relationships" xmlns:p="http://schemas.openxmlformats.org/presentationml/2006/main" showMasterSp="0" showMasterPhAnim="0">
   <p:cSld>
     <p:spTree>
       <p:nvGrpSpPr>
-        <p:cNvPr id="1" name="Shape 126"/>
+        <p:cNvPr id="1" name="Shape 96"/>
         <p:cNvGrpSpPr/>
         <p:nvPr/>
       </p:nvGrpSpPr>
@@ -2765,7 +2769,7 @@
       </p:grpSpPr>
       <p:sp>
         <p:nvSpPr>
-          <p:cNvPr id="127" name="Shape 127"/>
+          <p:cNvPr id="97" name="Shape 97"/>
           <p:cNvSpPr>
             <a:spLocks noGrp="1" noRot="1" noChangeAspect="1"/>
           </p:cNvSpPr>
@@ -2816,7 +2820,7 @@
       </p:sp>
       <p:sp>
         <p:nvSpPr>
-          <p:cNvPr id="128" name="Shape 128"/>
+          <p:cNvPr id="98" name="Shape 98"/>
           <p:cNvSpPr txBox="1">
             <a:spLocks noGrp="1"/>
           </p:cNvSpPr>
@@ -2827,7 +2831,7 @@
         <p:spPr>
           <a:xfrm>
             <a:off x="685800" y="4343400"/>
-            <a:ext cx="5486400" cy="4114800"/>
+            <a:ext cx="5486399" cy="4114800"/>
           </a:xfrm>
           <a:prstGeom prst="rect">
             <a:avLst/>
@@ -2850,21 +2854,24 @@
               <a:buSzPct val="25000"/>
               <a:buNone/>
             </a:pPr>
-            <a:endParaRPr sz="1200" b="0" i="0" u="none" strike="noStrike" cap="none">
-              <a:solidFill>
-                <a:schemeClr val="dk1"/>
-              </a:solidFill>
-              <a:latin typeface="Calibri"/>
-              <a:ea typeface="Calibri"/>
-              <a:cs typeface="Calibri"/>
-              <a:sym typeface="Calibri"/>
-            </a:endParaRPr>
-          </a:p>
-        </p:txBody>
-      </p:sp>
-      <p:sp>
-        <p:nvSpPr>
-          <p:cNvPr id="129" name="Shape 129"/>
+            <a:r>
+              <a:rPr lang="en-US" sz="1200" b="0" i="0" u="none" strike="noStrike" cap="none">
+                <a:solidFill>
+                  <a:schemeClr val="dk1"/>
+                </a:solidFill>
+                <a:latin typeface="Calibri"/>
+                <a:ea typeface="Calibri"/>
+                <a:cs typeface="Calibri"/>
+                <a:sym typeface="Calibri"/>
+              </a:rPr>
+              <a:t>Alternative hypothesis is usually what you’re trying to prove.</a:t>
+            </a:r>
+          </a:p>
+        </p:txBody>
+      </p:sp>
+      <p:sp>
+        <p:nvSpPr>
+          <p:cNvPr id="99" name="Shape 99"/>
           <p:cNvSpPr txBox="1">
             <a:spLocks noGrp="1"/>
           </p:cNvSpPr>
@@ -2875,7 +2882,7 @@
         <p:spPr>
           <a:xfrm>
             <a:off x="3884612" y="8685213"/>
-            <a:ext cx="2971800" cy="457200"/>
+            <a:ext cx="2971799" cy="457200"/>
           </a:xfrm>
           <a:prstGeom prst="rect">
             <a:avLst/>
@@ -2901,18 +2908,18 @@
             <a:fld id="{00000000-1234-1234-1234-123412341234}" type="slidenum">
               <a:rPr lang="en-US" sz="1200">
                 <a:solidFill>
-                  <a:srgbClr val="000000"/>
+                  <a:schemeClr val="dk1"/>
                 </a:solidFill>
                 <a:latin typeface="Calibri"/>
                 <a:ea typeface="Calibri"/>
                 <a:cs typeface="Calibri"/>
                 <a:sym typeface="Calibri"/>
               </a:rPr>
-              <a:t>7</a:t>
+              <a:t>25</a:t>
             </a:fld>
             <a:endParaRPr lang="en-US" sz="1200">
               <a:solidFill>
-                <a:srgbClr val="000000"/>
+                <a:schemeClr val="dk1"/>
               </a:solidFill>
               <a:latin typeface="Calibri"/>
               <a:ea typeface="Calibri"/>
@@ -2923,6 +2930,11 @@
         </p:txBody>
       </p:sp>
     </p:spTree>
+    <p:extLst>
+      <p:ext uri="{BB962C8B-B14F-4D97-AF65-F5344CB8AC3E}">
+        <p14:creationId xmlns:p14="http://schemas.microsoft.com/office/powerpoint/2010/main" val="2811724521"/>
+      </p:ext>
+    </p:extLst>
   </p:cSld>
   <p:clrMapOvr>
     <a:masterClrMapping/>
@@ -2930,12 +2942,12 @@
 </p:notes>
 </file>
 
-<file path=ppt/notesSlides/notesSlide5.xml><?xml version="1.0" encoding="utf-8"?>
+<file path=ppt/notesSlides/notesSlide19.xml><?xml version="1.0" encoding="utf-8"?>
 <p:notes xmlns:a="http://schemas.openxmlformats.org/drawingml/2006/main" xmlns:r="http://schemas.openxmlformats.org/officeDocument/2006/relationships" xmlns:p="http://schemas.openxmlformats.org/presentationml/2006/main" showMasterSp="0" showMasterPhAnim="0">
   <p:cSld>
     <p:spTree>
       <p:nvGrpSpPr>
-        <p:cNvPr id="1" name="Shape 126"/>
+        <p:cNvPr id="1" name="Shape 96"/>
         <p:cNvGrpSpPr/>
         <p:nvPr/>
       </p:nvGrpSpPr>
@@ -2949,7 +2961,7 @@
       </p:grpSpPr>
       <p:sp>
         <p:nvSpPr>
-          <p:cNvPr id="127" name="Shape 127"/>
+          <p:cNvPr id="97" name="Shape 97"/>
           <p:cNvSpPr>
             <a:spLocks noGrp="1" noRot="1" noChangeAspect="1"/>
           </p:cNvSpPr>
@@ -3000,7 +3012,7 @@
       </p:sp>
       <p:sp>
         <p:nvSpPr>
-          <p:cNvPr id="128" name="Shape 128"/>
+          <p:cNvPr id="98" name="Shape 98"/>
           <p:cNvSpPr txBox="1">
             <a:spLocks noGrp="1"/>
           </p:cNvSpPr>
@@ -3011,7 +3023,7 @@
         <p:spPr>
           <a:xfrm>
             <a:off x="685800" y="4343400"/>
-            <a:ext cx="5486400" cy="4114800"/>
+            <a:ext cx="5486399" cy="4114800"/>
           </a:xfrm>
           <a:prstGeom prst="rect">
             <a:avLst/>
@@ -3034,21 +3046,24 @@
               <a:buSzPct val="25000"/>
               <a:buNone/>
             </a:pPr>
-            <a:endParaRPr sz="1200" b="0" i="0" u="none" strike="noStrike" cap="none">
-              <a:solidFill>
-                <a:schemeClr val="dk1"/>
-              </a:solidFill>
-              <a:latin typeface="Calibri"/>
-              <a:ea typeface="Calibri"/>
-              <a:cs typeface="Calibri"/>
-              <a:sym typeface="Calibri"/>
-            </a:endParaRPr>
-          </a:p>
-        </p:txBody>
-      </p:sp>
-      <p:sp>
-        <p:nvSpPr>
-          <p:cNvPr id="129" name="Shape 129"/>
+            <a:r>
+              <a:rPr lang="en-US" sz="1200" b="0" i="0" u="none" strike="noStrike" cap="none">
+                <a:solidFill>
+                  <a:schemeClr val="dk1"/>
+                </a:solidFill>
+                <a:latin typeface="Calibri"/>
+                <a:ea typeface="Calibri"/>
+                <a:cs typeface="Calibri"/>
+                <a:sym typeface="Calibri"/>
+              </a:rPr>
+              <a:t>Alternative hypothesis is usually what you’re trying to prove.</a:t>
+            </a:r>
+          </a:p>
+        </p:txBody>
+      </p:sp>
+      <p:sp>
+        <p:nvSpPr>
+          <p:cNvPr id="99" name="Shape 99"/>
           <p:cNvSpPr txBox="1">
             <a:spLocks noGrp="1"/>
           </p:cNvSpPr>
@@ -3059,7 +3074,7 @@
         <p:spPr>
           <a:xfrm>
             <a:off x="3884612" y="8685213"/>
-            <a:ext cx="2971800" cy="457200"/>
+            <a:ext cx="2971799" cy="457200"/>
           </a:xfrm>
           <a:prstGeom prst="rect">
             <a:avLst/>
@@ -3085,18 +3100,18 @@
             <a:fld id="{00000000-1234-1234-1234-123412341234}" type="slidenum">
               <a:rPr lang="en-US" sz="1200">
                 <a:solidFill>
-                  <a:srgbClr val="000000"/>
+                  <a:schemeClr val="dk1"/>
                 </a:solidFill>
                 <a:latin typeface="Calibri"/>
                 <a:ea typeface="Calibri"/>
                 <a:cs typeface="Calibri"/>
                 <a:sym typeface="Calibri"/>
               </a:rPr>
-              <a:t>9</a:t>
+              <a:t>26</a:t>
             </a:fld>
             <a:endParaRPr lang="en-US" sz="1200">
               <a:solidFill>
-                <a:srgbClr val="000000"/>
+                <a:schemeClr val="dk1"/>
               </a:solidFill>
               <a:latin typeface="Calibri"/>
               <a:ea typeface="Calibri"/>
@@ -3109,7 +3124,7 @@
     </p:spTree>
     <p:extLst>
       <p:ext uri="{BB962C8B-B14F-4D97-AF65-F5344CB8AC3E}">
-        <p14:creationId xmlns:p14="http://schemas.microsoft.com/office/powerpoint/2010/main" val="3212492397"/>
+        <p14:creationId xmlns:p14="http://schemas.microsoft.com/office/powerpoint/2010/main" val="1003794918"/>
       </p:ext>
     </p:extLst>
   </p:cSld>
@@ -3119,12 +3134,12 @@
 </p:notes>
 </file>
 
-<file path=ppt/notesSlides/notesSlide6.xml><?xml version="1.0" encoding="utf-8"?>
+<file path=ppt/notesSlides/notesSlide2.xml><?xml version="1.0" encoding="utf-8"?>
 <p:notes xmlns:a="http://schemas.openxmlformats.org/drawingml/2006/main" xmlns:r="http://schemas.openxmlformats.org/officeDocument/2006/relationships" xmlns:p="http://schemas.openxmlformats.org/presentationml/2006/main" showMasterSp="0" showMasterPhAnim="0">
   <p:cSld>
     <p:spTree>
       <p:nvGrpSpPr>
-        <p:cNvPr id="1" name="Shape 126"/>
+        <p:cNvPr id="1" name="Shape 96"/>
         <p:cNvGrpSpPr/>
         <p:nvPr/>
       </p:nvGrpSpPr>
@@ -3138,7 +3153,7 @@
       </p:grpSpPr>
       <p:sp>
         <p:nvSpPr>
-          <p:cNvPr id="127" name="Shape 127"/>
+          <p:cNvPr id="97" name="Shape 97"/>
           <p:cNvSpPr>
             <a:spLocks noGrp="1" noRot="1" noChangeAspect="1"/>
           </p:cNvSpPr>
@@ -3189,7 +3204,7 @@
       </p:sp>
       <p:sp>
         <p:nvSpPr>
-          <p:cNvPr id="128" name="Shape 128"/>
+          <p:cNvPr id="98" name="Shape 98"/>
           <p:cNvSpPr txBox="1">
             <a:spLocks noGrp="1"/>
           </p:cNvSpPr>
@@ -3200,7 +3215,7 @@
         <p:spPr>
           <a:xfrm>
             <a:off x="685800" y="4343400"/>
-            <a:ext cx="5486400" cy="4114800"/>
+            <a:ext cx="5486399" cy="4114800"/>
           </a:xfrm>
           <a:prstGeom prst="rect">
             <a:avLst/>
@@ -3223,21 +3238,24 @@
               <a:buSzPct val="25000"/>
               <a:buNone/>
             </a:pPr>
-            <a:endParaRPr sz="1200" b="0" i="0" u="none" strike="noStrike" cap="none">
-              <a:solidFill>
-                <a:schemeClr val="dk1"/>
-              </a:solidFill>
-              <a:latin typeface="Calibri"/>
-              <a:ea typeface="Calibri"/>
-              <a:cs typeface="Calibri"/>
-              <a:sym typeface="Calibri"/>
-            </a:endParaRPr>
-          </a:p>
-        </p:txBody>
-      </p:sp>
-      <p:sp>
-        <p:nvSpPr>
-          <p:cNvPr id="129" name="Shape 129"/>
+            <a:r>
+              <a:rPr lang="en-US" sz="1200" b="0" i="0" u="none" strike="noStrike" cap="none">
+                <a:solidFill>
+                  <a:schemeClr val="dk1"/>
+                </a:solidFill>
+                <a:latin typeface="Calibri"/>
+                <a:ea typeface="Calibri"/>
+                <a:cs typeface="Calibri"/>
+                <a:sym typeface="Calibri"/>
+              </a:rPr>
+              <a:t>Alternative hypothesis is usually what you’re trying to prove.</a:t>
+            </a:r>
+          </a:p>
+        </p:txBody>
+      </p:sp>
+      <p:sp>
+        <p:nvSpPr>
+          <p:cNvPr id="99" name="Shape 99"/>
           <p:cNvSpPr txBox="1">
             <a:spLocks noGrp="1"/>
           </p:cNvSpPr>
@@ -3248,7 +3266,7 @@
         <p:spPr>
           <a:xfrm>
             <a:off x="3884612" y="8685213"/>
-            <a:ext cx="2971800" cy="457200"/>
+            <a:ext cx="2971799" cy="457200"/>
           </a:xfrm>
           <a:prstGeom prst="rect">
             <a:avLst/>
@@ -3274,18 +3292,18 @@
             <a:fld id="{00000000-1234-1234-1234-123412341234}" type="slidenum">
               <a:rPr lang="en-US" sz="1200">
                 <a:solidFill>
-                  <a:srgbClr val="000000"/>
+                  <a:schemeClr val="dk1"/>
                 </a:solidFill>
                 <a:latin typeface="Calibri"/>
                 <a:ea typeface="Calibri"/>
                 <a:cs typeface="Calibri"/>
                 <a:sym typeface="Calibri"/>
               </a:rPr>
-              <a:t>11</a:t>
+              <a:t>4</a:t>
             </a:fld>
             <a:endParaRPr lang="en-US" sz="1200">
               <a:solidFill>
-                <a:srgbClr val="000000"/>
+                <a:schemeClr val="dk1"/>
               </a:solidFill>
               <a:latin typeface="Calibri"/>
               <a:ea typeface="Calibri"/>
@@ -3298,7 +3316,7 @@
     </p:spTree>
     <p:extLst>
       <p:ext uri="{BB962C8B-B14F-4D97-AF65-F5344CB8AC3E}">
-        <p14:creationId xmlns:p14="http://schemas.microsoft.com/office/powerpoint/2010/main" val="1412984944"/>
+        <p14:creationId xmlns:p14="http://schemas.microsoft.com/office/powerpoint/2010/main" val="249885131"/>
       </p:ext>
     </p:extLst>
   </p:cSld>
@@ -3308,12 +3326,12 @@
 </p:notes>
 </file>
 
-<file path=ppt/notesSlides/notesSlide7.xml><?xml version="1.0" encoding="utf-8"?>
+<file path=ppt/notesSlides/notesSlide20.xml><?xml version="1.0" encoding="utf-8"?>
 <p:notes xmlns:a="http://schemas.openxmlformats.org/drawingml/2006/main" xmlns:r="http://schemas.openxmlformats.org/officeDocument/2006/relationships" xmlns:p="http://schemas.openxmlformats.org/presentationml/2006/main" showMasterSp="0" showMasterPhAnim="0">
   <p:cSld>
     <p:spTree>
       <p:nvGrpSpPr>
-        <p:cNvPr id="1" name="Shape 126"/>
+        <p:cNvPr id="1" name="Shape 134"/>
         <p:cNvGrpSpPr/>
         <p:nvPr/>
       </p:nvGrpSpPr>
@@ -3327,7 +3345,7 @@
       </p:grpSpPr>
       <p:sp>
         <p:nvSpPr>
-          <p:cNvPr id="127" name="Shape 127"/>
+          <p:cNvPr id="135" name="Shape 135"/>
           <p:cNvSpPr>
             <a:spLocks noGrp="1" noRot="1" noChangeAspect="1"/>
           </p:cNvSpPr>
@@ -3378,7 +3396,7 @@
       </p:sp>
       <p:sp>
         <p:nvSpPr>
-          <p:cNvPr id="128" name="Shape 128"/>
+          <p:cNvPr id="136" name="Shape 136"/>
           <p:cNvSpPr txBox="1">
             <a:spLocks noGrp="1"/>
           </p:cNvSpPr>
@@ -3389,7 +3407,7 @@
         <p:spPr>
           <a:xfrm>
             <a:off x="685800" y="4343400"/>
-            <a:ext cx="5486400" cy="4114800"/>
+            <a:ext cx="5486399" cy="4114800"/>
           </a:xfrm>
           <a:prstGeom prst="rect">
             <a:avLst/>
@@ -3426,7 +3444,7 @@
       </p:sp>
       <p:sp>
         <p:nvSpPr>
-          <p:cNvPr id="129" name="Shape 129"/>
+          <p:cNvPr id="137" name="Shape 137"/>
           <p:cNvSpPr txBox="1">
             <a:spLocks noGrp="1"/>
           </p:cNvSpPr>
@@ -3437,7 +3455,7 @@
         <p:spPr>
           <a:xfrm>
             <a:off x="3884612" y="8685213"/>
-            <a:ext cx="2971800" cy="457200"/>
+            <a:ext cx="2971799" cy="457200"/>
           </a:xfrm>
           <a:prstGeom prst="rect">
             <a:avLst/>
@@ -3463,18 +3481,18 @@
             <a:fld id="{00000000-1234-1234-1234-123412341234}" type="slidenum">
               <a:rPr lang="en-US" sz="1200">
                 <a:solidFill>
-                  <a:srgbClr val="000000"/>
+                  <a:schemeClr val="dk1"/>
                 </a:solidFill>
                 <a:latin typeface="Calibri"/>
                 <a:ea typeface="Calibri"/>
                 <a:cs typeface="Calibri"/>
                 <a:sym typeface="Calibri"/>
               </a:rPr>
-              <a:t>12</a:t>
+              <a:t>27</a:t>
             </a:fld>
             <a:endParaRPr lang="en-US" sz="1200">
               <a:solidFill>
-                <a:srgbClr val="000000"/>
+                <a:schemeClr val="dk1"/>
               </a:solidFill>
               <a:latin typeface="Calibri"/>
               <a:ea typeface="Calibri"/>
@@ -3485,11 +3503,6 @@
         </p:txBody>
       </p:sp>
     </p:spTree>
-    <p:extLst>
-      <p:ext uri="{BB962C8B-B14F-4D97-AF65-F5344CB8AC3E}">
-        <p14:creationId xmlns:p14="http://schemas.microsoft.com/office/powerpoint/2010/main" val="517691361"/>
-      </p:ext>
-    </p:extLst>
   </p:cSld>
   <p:clrMapOvr>
     <a:masterClrMapping/>
@@ -3497,12 +3510,12 @@
 </p:notes>
 </file>
 
-<file path=ppt/notesSlides/notesSlide8.xml><?xml version="1.0" encoding="utf-8"?>
+<file path=ppt/notesSlides/notesSlide3.xml><?xml version="1.0" encoding="utf-8"?>
 <p:notes xmlns:a="http://schemas.openxmlformats.org/drawingml/2006/main" xmlns:r="http://schemas.openxmlformats.org/officeDocument/2006/relationships" xmlns:p="http://schemas.openxmlformats.org/presentationml/2006/main" showMasterSp="0" showMasterPhAnim="0">
   <p:cSld>
     <p:spTree>
       <p:nvGrpSpPr>
-        <p:cNvPr id="1" name="Shape 96"/>
+        <p:cNvPr id="1" name="Shape 126"/>
         <p:cNvGrpSpPr/>
         <p:nvPr/>
       </p:nvGrpSpPr>
@@ -3516,7 +3529,7 @@
       </p:grpSpPr>
       <p:sp>
         <p:nvSpPr>
-          <p:cNvPr id="97" name="Shape 97"/>
+          <p:cNvPr id="127" name="Shape 127"/>
           <p:cNvSpPr>
             <a:spLocks noGrp="1" noRot="1" noChangeAspect="1"/>
           </p:cNvSpPr>
@@ -3567,7 +3580,7 @@
       </p:sp>
       <p:sp>
         <p:nvSpPr>
-          <p:cNvPr id="98" name="Shape 98"/>
+          <p:cNvPr id="128" name="Shape 128"/>
           <p:cNvSpPr txBox="1">
             <a:spLocks noGrp="1"/>
           </p:cNvSpPr>
@@ -3578,7 +3591,7 @@
         <p:spPr>
           <a:xfrm>
             <a:off x="685800" y="4343400"/>
-            <a:ext cx="5486399" cy="4114800"/>
+            <a:ext cx="5486400" cy="4114800"/>
           </a:xfrm>
           <a:prstGeom prst="rect">
             <a:avLst/>
@@ -3601,24 +3614,21 @@
               <a:buSzPct val="25000"/>
               <a:buNone/>
             </a:pPr>
-            <a:r>
-              <a:rPr lang="en-US" sz="1200" b="0" i="0" u="none" strike="noStrike" cap="none">
-                <a:solidFill>
-                  <a:schemeClr val="dk1"/>
-                </a:solidFill>
-                <a:latin typeface="Calibri"/>
-                <a:ea typeface="Calibri"/>
-                <a:cs typeface="Calibri"/>
-                <a:sym typeface="Calibri"/>
-              </a:rPr>
-              <a:t>Alternative hypothesis is usually what you’re trying to prove.</a:t>
-            </a:r>
-          </a:p>
-        </p:txBody>
-      </p:sp>
-      <p:sp>
-        <p:nvSpPr>
-          <p:cNvPr id="99" name="Shape 99"/>
+            <a:endParaRPr sz="1200" b="0" i="0" u="none" strike="noStrike" cap="none">
+              <a:solidFill>
+                <a:schemeClr val="dk1"/>
+              </a:solidFill>
+              <a:latin typeface="Calibri"/>
+              <a:ea typeface="Calibri"/>
+              <a:cs typeface="Calibri"/>
+              <a:sym typeface="Calibri"/>
+            </a:endParaRPr>
+          </a:p>
+        </p:txBody>
+      </p:sp>
+      <p:sp>
+        <p:nvSpPr>
+          <p:cNvPr id="129" name="Shape 129"/>
           <p:cNvSpPr txBox="1">
             <a:spLocks noGrp="1"/>
           </p:cNvSpPr>
@@ -3629,7 +3639,7 @@
         <p:spPr>
           <a:xfrm>
             <a:off x="3884612" y="8685213"/>
-            <a:ext cx="2971799" cy="457200"/>
+            <a:ext cx="2971800" cy="457200"/>
           </a:xfrm>
           <a:prstGeom prst="rect">
             <a:avLst/>
@@ -3655,18 +3665,18 @@
             <a:fld id="{00000000-1234-1234-1234-123412341234}" type="slidenum">
               <a:rPr lang="en-US" sz="1200">
                 <a:solidFill>
-                  <a:schemeClr val="dk1"/>
+                  <a:srgbClr val="000000"/>
                 </a:solidFill>
                 <a:latin typeface="Calibri"/>
                 <a:ea typeface="Calibri"/>
                 <a:cs typeface="Calibri"/>
                 <a:sym typeface="Calibri"/>
               </a:rPr>
-              <a:t>13</a:t>
+              <a:t>6</a:t>
             </a:fld>
             <a:endParaRPr lang="en-US" sz="1200">
               <a:solidFill>
-                <a:schemeClr val="dk1"/>
+                <a:srgbClr val="000000"/>
               </a:solidFill>
               <a:latin typeface="Calibri"/>
               <a:ea typeface="Calibri"/>
@@ -3679,7 +3689,7 @@
     </p:spTree>
     <p:extLst>
       <p:ext uri="{BB962C8B-B14F-4D97-AF65-F5344CB8AC3E}">
-        <p14:creationId xmlns:p14="http://schemas.microsoft.com/office/powerpoint/2010/main" val="220382363"/>
+        <p14:creationId xmlns:p14="http://schemas.microsoft.com/office/powerpoint/2010/main" val="1463331857"/>
       </p:ext>
     </p:extLst>
   </p:cSld>
@@ -3689,7 +3699,7 @@
 </p:notes>
 </file>
 
-<file path=ppt/notesSlides/notesSlide9.xml><?xml version="1.0" encoding="utf-8"?>
+<file path=ppt/notesSlides/notesSlide4.xml><?xml version="1.0" encoding="utf-8"?>
 <p:notes xmlns:a="http://schemas.openxmlformats.org/drawingml/2006/main" xmlns:r="http://schemas.openxmlformats.org/officeDocument/2006/relationships" xmlns:p="http://schemas.openxmlformats.org/presentationml/2006/main" showMasterSp="0" showMasterPhAnim="0">
   <p:cSld>
     <p:spTree>
@@ -3851,7 +3861,7 @@
                 <a:cs typeface="Calibri"/>
                 <a:sym typeface="Calibri"/>
               </a:rPr>
-              <a:t>15</a:t>
+              <a:t>7</a:t>
             </a:fld>
             <a:endParaRPr lang="en-US" sz="1200">
               <a:solidFill>
@@ -3866,9 +3876,949 @@
         </p:txBody>
       </p:sp>
     </p:spTree>
+  </p:cSld>
+  <p:clrMapOvr>
+    <a:masterClrMapping/>
+  </p:clrMapOvr>
+</p:notes>
+</file>
+
+<file path=ppt/notesSlides/notesSlide5.xml><?xml version="1.0" encoding="utf-8"?>
+<p:notes xmlns:a="http://schemas.openxmlformats.org/drawingml/2006/main" xmlns:r="http://schemas.openxmlformats.org/officeDocument/2006/relationships" xmlns:p="http://schemas.openxmlformats.org/presentationml/2006/main" showMasterSp="0" showMasterPhAnim="0">
+  <p:cSld>
+    <p:spTree>
+      <p:nvGrpSpPr>
+        <p:cNvPr id="1" name="Shape 126"/>
+        <p:cNvGrpSpPr/>
+        <p:nvPr/>
+      </p:nvGrpSpPr>
+      <p:grpSpPr>
+        <a:xfrm>
+          <a:off x="0" y="0"/>
+          <a:ext cx="0" cy="0"/>
+          <a:chOff x="0" y="0"/>
+          <a:chExt cx="0" cy="0"/>
+        </a:xfrm>
+      </p:grpSpPr>
+      <p:sp>
+        <p:nvSpPr>
+          <p:cNvPr id="127" name="Shape 127"/>
+          <p:cNvSpPr>
+            <a:spLocks noGrp="1" noRot="1" noChangeAspect="1"/>
+          </p:cNvSpPr>
+          <p:nvPr>
+            <p:ph type="sldImg" idx="2"/>
+          </p:nvPr>
+        </p:nvSpPr>
+        <p:spPr>
+          <a:xfrm>
+            <a:off x="381000" y="685800"/>
+            <a:ext cx="6096000" cy="3429000"/>
+          </a:xfrm>
+          <a:custGeom>
+            <a:avLst/>
+            <a:gdLst/>
+            <a:ahLst/>
+            <a:cxnLst/>
+            <a:rect l="0" t="0" r="0" b="0"/>
+            <a:pathLst>
+              <a:path w="120000" h="120000" extrusionOk="0">
+                <a:moveTo>
+                  <a:pt x="0" y="0"/>
+                </a:moveTo>
+                <a:lnTo>
+                  <a:pt x="120000" y="0"/>
+                </a:lnTo>
+                <a:lnTo>
+                  <a:pt x="120000" y="120000"/>
+                </a:lnTo>
+                <a:lnTo>
+                  <a:pt x="0" y="120000"/>
+                </a:lnTo>
+                <a:close/>
+              </a:path>
+            </a:pathLst>
+          </a:custGeom>
+          <a:noFill/>
+          <a:ln w="12700" cap="flat" cmpd="sng">
+            <a:solidFill>
+              <a:srgbClr val="000000"/>
+            </a:solidFill>
+            <a:prstDash val="solid"/>
+            <a:round/>
+            <a:headEnd type="none" w="med" len="med"/>
+            <a:tailEnd type="none" w="med" len="med"/>
+          </a:ln>
+        </p:spPr>
+      </p:sp>
+      <p:sp>
+        <p:nvSpPr>
+          <p:cNvPr id="128" name="Shape 128"/>
+          <p:cNvSpPr txBox="1">
+            <a:spLocks noGrp="1"/>
+          </p:cNvSpPr>
+          <p:nvPr>
+            <p:ph type="body" idx="1"/>
+          </p:nvPr>
+        </p:nvSpPr>
+        <p:spPr>
+          <a:xfrm>
+            <a:off x="685800" y="4343400"/>
+            <a:ext cx="5486400" cy="4114800"/>
+          </a:xfrm>
+          <a:prstGeom prst="rect">
+            <a:avLst/>
+          </a:prstGeom>
+          <a:noFill/>
+          <a:ln>
+            <a:noFill/>
+          </a:ln>
+        </p:spPr>
+        <p:txBody>
+          <a:bodyPr lIns="91425" tIns="45700" rIns="91425" bIns="45700" anchor="t" anchorCtr="0">
+            <a:noAutofit/>
+          </a:bodyPr>
+          <a:lstStyle/>
+          <a:p>
+            <a:pPr marL="0" marR="0" lvl="0" indent="0" algn="l" rtl="0">
+              <a:spcBef>
+                <a:spcPts val="0"/>
+              </a:spcBef>
+              <a:buSzPct val="25000"/>
+              <a:buNone/>
+            </a:pPr>
+            <a:endParaRPr sz="1200" b="0" i="0" u="none" strike="noStrike" cap="none">
+              <a:solidFill>
+                <a:schemeClr val="dk1"/>
+              </a:solidFill>
+              <a:latin typeface="Calibri"/>
+              <a:ea typeface="Calibri"/>
+              <a:cs typeface="Calibri"/>
+              <a:sym typeface="Calibri"/>
+            </a:endParaRPr>
+          </a:p>
+        </p:txBody>
+      </p:sp>
+      <p:sp>
+        <p:nvSpPr>
+          <p:cNvPr id="129" name="Shape 129"/>
+          <p:cNvSpPr txBox="1">
+            <a:spLocks noGrp="1"/>
+          </p:cNvSpPr>
+          <p:nvPr>
+            <p:ph type="sldNum" idx="12"/>
+          </p:nvPr>
+        </p:nvSpPr>
+        <p:spPr>
+          <a:xfrm>
+            <a:off x="3884612" y="8685213"/>
+            <a:ext cx="2971800" cy="457200"/>
+          </a:xfrm>
+          <a:prstGeom prst="rect">
+            <a:avLst/>
+          </a:prstGeom>
+          <a:noFill/>
+          <a:ln>
+            <a:noFill/>
+          </a:ln>
+        </p:spPr>
+        <p:txBody>
+          <a:bodyPr lIns="91425" tIns="45700" rIns="91425" bIns="45700" anchor="b" anchorCtr="0">
+            <a:noAutofit/>
+          </a:bodyPr>
+          <a:lstStyle/>
+          <a:p>
+            <a:pPr marL="0" marR="0" lvl="0" indent="0" algn="r" rtl="0">
+              <a:spcBef>
+                <a:spcPts val="0"/>
+              </a:spcBef>
+              <a:buSzPct val="25000"/>
+              <a:buNone/>
+            </a:pPr>
+            <a:fld id="{00000000-1234-1234-1234-123412341234}" type="slidenum">
+              <a:rPr lang="en-US" sz="1200">
+                <a:solidFill>
+                  <a:srgbClr val="000000"/>
+                </a:solidFill>
+                <a:latin typeface="Calibri"/>
+                <a:ea typeface="Calibri"/>
+                <a:cs typeface="Calibri"/>
+                <a:sym typeface="Calibri"/>
+              </a:rPr>
+              <a:t>8</a:t>
+            </a:fld>
+            <a:endParaRPr lang="en-US" sz="1200">
+              <a:solidFill>
+                <a:srgbClr val="000000"/>
+              </a:solidFill>
+              <a:latin typeface="Calibri"/>
+              <a:ea typeface="Calibri"/>
+              <a:cs typeface="Calibri"/>
+              <a:sym typeface="Calibri"/>
+            </a:endParaRPr>
+          </a:p>
+        </p:txBody>
+      </p:sp>
+    </p:spTree>
     <p:extLst>
       <p:ext uri="{BB962C8B-B14F-4D97-AF65-F5344CB8AC3E}">
-        <p14:creationId xmlns:p14="http://schemas.microsoft.com/office/powerpoint/2010/main" val="3658355740"/>
+        <p14:creationId xmlns:p14="http://schemas.microsoft.com/office/powerpoint/2010/main" val="4218613508"/>
+      </p:ext>
+    </p:extLst>
+  </p:cSld>
+  <p:clrMapOvr>
+    <a:masterClrMapping/>
+  </p:clrMapOvr>
+</p:notes>
+</file>
+
+<file path=ppt/notesSlides/notesSlide6.xml><?xml version="1.0" encoding="utf-8"?>
+<p:notes xmlns:a="http://schemas.openxmlformats.org/drawingml/2006/main" xmlns:r="http://schemas.openxmlformats.org/officeDocument/2006/relationships" xmlns:p="http://schemas.openxmlformats.org/presentationml/2006/main" showMasterSp="0" showMasterPhAnim="0">
+  <p:cSld>
+    <p:spTree>
+      <p:nvGrpSpPr>
+        <p:cNvPr id="1" name="Shape 126"/>
+        <p:cNvGrpSpPr/>
+        <p:nvPr/>
+      </p:nvGrpSpPr>
+      <p:grpSpPr>
+        <a:xfrm>
+          <a:off x="0" y="0"/>
+          <a:ext cx="0" cy="0"/>
+          <a:chOff x="0" y="0"/>
+          <a:chExt cx="0" cy="0"/>
+        </a:xfrm>
+      </p:grpSpPr>
+      <p:sp>
+        <p:nvSpPr>
+          <p:cNvPr id="127" name="Shape 127"/>
+          <p:cNvSpPr>
+            <a:spLocks noGrp="1" noRot="1" noChangeAspect="1"/>
+          </p:cNvSpPr>
+          <p:nvPr>
+            <p:ph type="sldImg" idx="2"/>
+          </p:nvPr>
+        </p:nvSpPr>
+        <p:spPr>
+          <a:xfrm>
+            <a:off x="381000" y="685800"/>
+            <a:ext cx="6096000" cy="3429000"/>
+          </a:xfrm>
+          <a:custGeom>
+            <a:avLst/>
+            <a:gdLst/>
+            <a:ahLst/>
+            <a:cxnLst/>
+            <a:rect l="0" t="0" r="0" b="0"/>
+            <a:pathLst>
+              <a:path w="120000" h="120000" extrusionOk="0">
+                <a:moveTo>
+                  <a:pt x="0" y="0"/>
+                </a:moveTo>
+                <a:lnTo>
+                  <a:pt x="120000" y="0"/>
+                </a:lnTo>
+                <a:lnTo>
+                  <a:pt x="120000" y="120000"/>
+                </a:lnTo>
+                <a:lnTo>
+                  <a:pt x="0" y="120000"/>
+                </a:lnTo>
+                <a:close/>
+              </a:path>
+            </a:pathLst>
+          </a:custGeom>
+          <a:noFill/>
+          <a:ln w="12700" cap="flat" cmpd="sng">
+            <a:solidFill>
+              <a:srgbClr val="000000"/>
+            </a:solidFill>
+            <a:prstDash val="solid"/>
+            <a:round/>
+            <a:headEnd type="none" w="med" len="med"/>
+            <a:tailEnd type="none" w="med" len="med"/>
+          </a:ln>
+        </p:spPr>
+      </p:sp>
+      <p:sp>
+        <p:nvSpPr>
+          <p:cNvPr id="128" name="Shape 128"/>
+          <p:cNvSpPr txBox="1">
+            <a:spLocks noGrp="1"/>
+          </p:cNvSpPr>
+          <p:nvPr>
+            <p:ph type="body" idx="1"/>
+          </p:nvPr>
+        </p:nvSpPr>
+        <p:spPr>
+          <a:xfrm>
+            <a:off x="685800" y="4343400"/>
+            <a:ext cx="5486400" cy="4114800"/>
+          </a:xfrm>
+          <a:prstGeom prst="rect">
+            <a:avLst/>
+          </a:prstGeom>
+          <a:noFill/>
+          <a:ln>
+            <a:noFill/>
+          </a:ln>
+        </p:spPr>
+        <p:txBody>
+          <a:bodyPr lIns="91425" tIns="45700" rIns="91425" bIns="45700" anchor="t" anchorCtr="0">
+            <a:noAutofit/>
+          </a:bodyPr>
+          <a:lstStyle/>
+          <a:p>
+            <a:pPr marL="0" marR="0" lvl="0" indent="0" algn="l" rtl="0">
+              <a:spcBef>
+                <a:spcPts val="0"/>
+              </a:spcBef>
+              <a:buSzPct val="25000"/>
+              <a:buNone/>
+            </a:pPr>
+            <a:endParaRPr sz="1200" b="0" i="0" u="none" strike="noStrike" cap="none">
+              <a:solidFill>
+                <a:schemeClr val="dk1"/>
+              </a:solidFill>
+              <a:latin typeface="Calibri"/>
+              <a:ea typeface="Calibri"/>
+              <a:cs typeface="Calibri"/>
+              <a:sym typeface="Calibri"/>
+            </a:endParaRPr>
+          </a:p>
+        </p:txBody>
+      </p:sp>
+      <p:sp>
+        <p:nvSpPr>
+          <p:cNvPr id="129" name="Shape 129"/>
+          <p:cNvSpPr txBox="1">
+            <a:spLocks noGrp="1"/>
+          </p:cNvSpPr>
+          <p:nvPr>
+            <p:ph type="sldNum" idx="12"/>
+          </p:nvPr>
+        </p:nvSpPr>
+        <p:spPr>
+          <a:xfrm>
+            <a:off x="3884612" y="8685213"/>
+            <a:ext cx="2971800" cy="457200"/>
+          </a:xfrm>
+          <a:prstGeom prst="rect">
+            <a:avLst/>
+          </a:prstGeom>
+          <a:noFill/>
+          <a:ln>
+            <a:noFill/>
+          </a:ln>
+        </p:spPr>
+        <p:txBody>
+          <a:bodyPr lIns="91425" tIns="45700" rIns="91425" bIns="45700" anchor="b" anchorCtr="0">
+            <a:noAutofit/>
+          </a:bodyPr>
+          <a:lstStyle/>
+          <a:p>
+            <a:pPr marL="0" marR="0" lvl="0" indent="0" algn="r" rtl="0">
+              <a:spcBef>
+                <a:spcPts val="0"/>
+              </a:spcBef>
+              <a:buSzPct val="25000"/>
+              <a:buNone/>
+            </a:pPr>
+            <a:fld id="{00000000-1234-1234-1234-123412341234}" type="slidenum">
+              <a:rPr lang="en-US" sz="1200">
+                <a:solidFill>
+                  <a:srgbClr val="000000"/>
+                </a:solidFill>
+                <a:latin typeface="Calibri"/>
+                <a:ea typeface="Calibri"/>
+                <a:cs typeface="Calibri"/>
+                <a:sym typeface="Calibri"/>
+              </a:rPr>
+              <a:t>9</a:t>
+            </a:fld>
+            <a:endParaRPr lang="en-US" sz="1200">
+              <a:solidFill>
+                <a:srgbClr val="000000"/>
+              </a:solidFill>
+              <a:latin typeface="Calibri"/>
+              <a:ea typeface="Calibri"/>
+              <a:cs typeface="Calibri"/>
+              <a:sym typeface="Calibri"/>
+            </a:endParaRPr>
+          </a:p>
+        </p:txBody>
+      </p:sp>
+    </p:spTree>
+    <p:extLst>
+      <p:ext uri="{BB962C8B-B14F-4D97-AF65-F5344CB8AC3E}">
+        <p14:creationId xmlns:p14="http://schemas.microsoft.com/office/powerpoint/2010/main" val="2029531574"/>
+      </p:ext>
+    </p:extLst>
+  </p:cSld>
+  <p:clrMapOvr>
+    <a:masterClrMapping/>
+  </p:clrMapOvr>
+</p:notes>
+</file>
+
+<file path=ppt/notesSlides/notesSlide7.xml><?xml version="1.0" encoding="utf-8"?>
+<p:notes xmlns:a="http://schemas.openxmlformats.org/drawingml/2006/main" xmlns:r="http://schemas.openxmlformats.org/officeDocument/2006/relationships" xmlns:p="http://schemas.openxmlformats.org/presentationml/2006/main" showMasterSp="0" showMasterPhAnim="0">
+  <p:cSld>
+    <p:spTree>
+      <p:nvGrpSpPr>
+        <p:cNvPr id="1" name="Shape 126"/>
+        <p:cNvGrpSpPr/>
+        <p:nvPr/>
+      </p:nvGrpSpPr>
+      <p:grpSpPr>
+        <a:xfrm>
+          <a:off x="0" y="0"/>
+          <a:ext cx="0" cy="0"/>
+          <a:chOff x="0" y="0"/>
+          <a:chExt cx="0" cy="0"/>
+        </a:xfrm>
+      </p:grpSpPr>
+      <p:sp>
+        <p:nvSpPr>
+          <p:cNvPr id="127" name="Shape 127"/>
+          <p:cNvSpPr>
+            <a:spLocks noGrp="1" noRot="1" noChangeAspect="1"/>
+          </p:cNvSpPr>
+          <p:nvPr>
+            <p:ph type="sldImg" idx="2"/>
+          </p:nvPr>
+        </p:nvSpPr>
+        <p:spPr>
+          <a:xfrm>
+            <a:off x="381000" y="685800"/>
+            <a:ext cx="6096000" cy="3429000"/>
+          </a:xfrm>
+          <a:custGeom>
+            <a:avLst/>
+            <a:gdLst/>
+            <a:ahLst/>
+            <a:cxnLst/>
+            <a:rect l="0" t="0" r="0" b="0"/>
+            <a:pathLst>
+              <a:path w="120000" h="120000" extrusionOk="0">
+                <a:moveTo>
+                  <a:pt x="0" y="0"/>
+                </a:moveTo>
+                <a:lnTo>
+                  <a:pt x="120000" y="0"/>
+                </a:lnTo>
+                <a:lnTo>
+                  <a:pt x="120000" y="120000"/>
+                </a:lnTo>
+                <a:lnTo>
+                  <a:pt x="0" y="120000"/>
+                </a:lnTo>
+                <a:close/>
+              </a:path>
+            </a:pathLst>
+          </a:custGeom>
+          <a:noFill/>
+          <a:ln w="12700" cap="flat" cmpd="sng">
+            <a:solidFill>
+              <a:srgbClr val="000000"/>
+            </a:solidFill>
+            <a:prstDash val="solid"/>
+            <a:round/>
+            <a:headEnd type="none" w="med" len="med"/>
+            <a:tailEnd type="none" w="med" len="med"/>
+          </a:ln>
+        </p:spPr>
+      </p:sp>
+      <p:sp>
+        <p:nvSpPr>
+          <p:cNvPr id="128" name="Shape 128"/>
+          <p:cNvSpPr txBox="1">
+            <a:spLocks noGrp="1"/>
+          </p:cNvSpPr>
+          <p:nvPr>
+            <p:ph type="body" idx="1"/>
+          </p:nvPr>
+        </p:nvSpPr>
+        <p:spPr>
+          <a:xfrm>
+            <a:off x="685800" y="4343400"/>
+            <a:ext cx="5486400" cy="4114800"/>
+          </a:xfrm>
+          <a:prstGeom prst="rect">
+            <a:avLst/>
+          </a:prstGeom>
+          <a:noFill/>
+          <a:ln>
+            <a:noFill/>
+          </a:ln>
+        </p:spPr>
+        <p:txBody>
+          <a:bodyPr lIns="91425" tIns="45700" rIns="91425" bIns="45700" anchor="t" anchorCtr="0">
+            <a:noAutofit/>
+          </a:bodyPr>
+          <a:lstStyle/>
+          <a:p>
+            <a:pPr marL="0" marR="0" lvl="0" indent="0" algn="l" rtl="0">
+              <a:spcBef>
+                <a:spcPts val="0"/>
+              </a:spcBef>
+              <a:buSzPct val="25000"/>
+              <a:buNone/>
+            </a:pPr>
+            <a:endParaRPr sz="1200" b="0" i="0" u="none" strike="noStrike" cap="none">
+              <a:solidFill>
+                <a:schemeClr val="dk1"/>
+              </a:solidFill>
+              <a:latin typeface="Calibri"/>
+              <a:ea typeface="Calibri"/>
+              <a:cs typeface="Calibri"/>
+              <a:sym typeface="Calibri"/>
+            </a:endParaRPr>
+          </a:p>
+        </p:txBody>
+      </p:sp>
+      <p:sp>
+        <p:nvSpPr>
+          <p:cNvPr id="129" name="Shape 129"/>
+          <p:cNvSpPr txBox="1">
+            <a:spLocks noGrp="1"/>
+          </p:cNvSpPr>
+          <p:nvPr>
+            <p:ph type="sldNum" idx="12"/>
+          </p:nvPr>
+        </p:nvSpPr>
+        <p:spPr>
+          <a:xfrm>
+            <a:off x="3884612" y="8685213"/>
+            <a:ext cx="2971800" cy="457200"/>
+          </a:xfrm>
+          <a:prstGeom prst="rect">
+            <a:avLst/>
+          </a:prstGeom>
+          <a:noFill/>
+          <a:ln>
+            <a:noFill/>
+          </a:ln>
+        </p:spPr>
+        <p:txBody>
+          <a:bodyPr lIns="91425" tIns="45700" rIns="91425" bIns="45700" anchor="b" anchorCtr="0">
+            <a:noAutofit/>
+          </a:bodyPr>
+          <a:lstStyle/>
+          <a:p>
+            <a:pPr marL="0" marR="0" lvl="0" indent="0" algn="r" rtl="0">
+              <a:spcBef>
+                <a:spcPts val="0"/>
+              </a:spcBef>
+              <a:buSzPct val="25000"/>
+              <a:buNone/>
+            </a:pPr>
+            <a:fld id="{00000000-1234-1234-1234-123412341234}" type="slidenum">
+              <a:rPr lang="en-US" sz="1200">
+                <a:solidFill>
+                  <a:srgbClr val="000000"/>
+                </a:solidFill>
+                <a:latin typeface="Calibri"/>
+                <a:ea typeface="Calibri"/>
+                <a:cs typeface="Calibri"/>
+                <a:sym typeface="Calibri"/>
+              </a:rPr>
+              <a:t>10</a:t>
+            </a:fld>
+            <a:endParaRPr lang="en-US" sz="1200">
+              <a:solidFill>
+                <a:srgbClr val="000000"/>
+              </a:solidFill>
+              <a:latin typeface="Calibri"/>
+              <a:ea typeface="Calibri"/>
+              <a:cs typeface="Calibri"/>
+              <a:sym typeface="Calibri"/>
+            </a:endParaRPr>
+          </a:p>
+        </p:txBody>
+      </p:sp>
+    </p:spTree>
+    <p:extLst>
+      <p:ext uri="{BB962C8B-B14F-4D97-AF65-F5344CB8AC3E}">
+        <p14:creationId xmlns:p14="http://schemas.microsoft.com/office/powerpoint/2010/main" val="2312335269"/>
+      </p:ext>
+    </p:extLst>
+  </p:cSld>
+  <p:clrMapOvr>
+    <a:masterClrMapping/>
+  </p:clrMapOvr>
+</p:notes>
+</file>
+
+<file path=ppt/notesSlides/notesSlide8.xml><?xml version="1.0" encoding="utf-8"?>
+<p:notes xmlns:a="http://schemas.openxmlformats.org/drawingml/2006/main" xmlns:r="http://schemas.openxmlformats.org/officeDocument/2006/relationships" xmlns:p="http://schemas.openxmlformats.org/presentationml/2006/main" showMasterSp="0" showMasterPhAnim="0">
+  <p:cSld>
+    <p:spTree>
+      <p:nvGrpSpPr>
+        <p:cNvPr id="1" name="Shape 126"/>
+        <p:cNvGrpSpPr/>
+        <p:nvPr/>
+      </p:nvGrpSpPr>
+      <p:grpSpPr>
+        <a:xfrm>
+          <a:off x="0" y="0"/>
+          <a:ext cx="0" cy="0"/>
+          <a:chOff x="0" y="0"/>
+          <a:chExt cx="0" cy="0"/>
+        </a:xfrm>
+      </p:grpSpPr>
+      <p:sp>
+        <p:nvSpPr>
+          <p:cNvPr id="127" name="Shape 127"/>
+          <p:cNvSpPr>
+            <a:spLocks noGrp="1" noRot="1" noChangeAspect="1"/>
+          </p:cNvSpPr>
+          <p:nvPr>
+            <p:ph type="sldImg" idx="2"/>
+          </p:nvPr>
+        </p:nvSpPr>
+        <p:spPr>
+          <a:xfrm>
+            <a:off x="381000" y="685800"/>
+            <a:ext cx="6096000" cy="3429000"/>
+          </a:xfrm>
+          <a:custGeom>
+            <a:avLst/>
+            <a:gdLst/>
+            <a:ahLst/>
+            <a:cxnLst/>
+            <a:rect l="0" t="0" r="0" b="0"/>
+            <a:pathLst>
+              <a:path w="120000" h="120000" extrusionOk="0">
+                <a:moveTo>
+                  <a:pt x="0" y="0"/>
+                </a:moveTo>
+                <a:lnTo>
+                  <a:pt x="120000" y="0"/>
+                </a:lnTo>
+                <a:lnTo>
+                  <a:pt x="120000" y="120000"/>
+                </a:lnTo>
+                <a:lnTo>
+                  <a:pt x="0" y="120000"/>
+                </a:lnTo>
+                <a:close/>
+              </a:path>
+            </a:pathLst>
+          </a:custGeom>
+          <a:noFill/>
+          <a:ln w="12700" cap="flat" cmpd="sng">
+            <a:solidFill>
+              <a:srgbClr val="000000"/>
+            </a:solidFill>
+            <a:prstDash val="solid"/>
+            <a:round/>
+            <a:headEnd type="none" w="med" len="med"/>
+            <a:tailEnd type="none" w="med" len="med"/>
+          </a:ln>
+        </p:spPr>
+      </p:sp>
+      <p:sp>
+        <p:nvSpPr>
+          <p:cNvPr id="128" name="Shape 128"/>
+          <p:cNvSpPr txBox="1">
+            <a:spLocks noGrp="1"/>
+          </p:cNvSpPr>
+          <p:nvPr>
+            <p:ph type="body" idx="1"/>
+          </p:nvPr>
+        </p:nvSpPr>
+        <p:spPr>
+          <a:xfrm>
+            <a:off x="685800" y="4343400"/>
+            <a:ext cx="5486400" cy="4114800"/>
+          </a:xfrm>
+          <a:prstGeom prst="rect">
+            <a:avLst/>
+          </a:prstGeom>
+          <a:noFill/>
+          <a:ln>
+            <a:noFill/>
+          </a:ln>
+        </p:spPr>
+        <p:txBody>
+          <a:bodyPr lIns="91425" tIns="45700" rIns="91425" bIns="45700" anchor="t" anchorCtr="0">
+            <a:noAutofit/>
+          </a:bodyPr>
+          <a:lstStyle/>
+          <a:p>
+            <a:pPr marL="0" marR="0" lvl="0" indent="0" algn="l" rtl="0">
+              <a:spcBef>
+                <a:spcPts val="0"/>
+              </a:spcBef>
+              <a:buSzPct val="25000"/>
+              <a:buNone/>
+            </a:pPr>
+            <a:endParaRPr sz="1200" b="0" i="0" u="none" strike="noStrike" cap="none">
+              <a:solidFill>
+                <a:schemeClr val="dk1"/>
+              </a:solidFill>
+              <a:latin typeface="Calibri"/>
+              <a:ea typeface="Calibri"/>
+              <a:cs typeface="Calibri"/>
+              <a:sym typeface="Calibri"/>
+            </a:endParaRPr>
+          </a:p>
+        </p:txBody>
+      </p:sp>
+      <p:sp>
+        <p:nvSpPr>
+          <p:cNvPr id="129" name="Shape 129"/>
+          <p:cNvSpPr txBox="1">
+            <a:spLocks noGrp="1"/>
+          </p:cNvSpPr>
+          <p:nvPr>
+            <p:ph type="sldNum" idx="12"/>
+          </p:nvPr>
+        </p:nvSpPr>
+        <p:spPr>
+          <a:xfrm>
+            <a:off x="3884612" y="8685213"/>
+            <a:ext cx="2971800" cy="457200"/>
+          </a:xfrm>
+          <a:prstGeom prst="rect">
+            <a:avLst/>
+          </a:prstGeom>
+          <a:noFill/>
+          <a:ln>
+            <a:noFill/>
+          </a:ln>
+        </p:spPr>
+        <p:txBody>
+          <a:bodyPr lIns="91425" tIns="45700" rIns="91425" bIns="45700" anchor="b" anchorCtr="0">
+            <a:noAutofit/>
+          </a:bodyPr>
+          <a:lstStyle/>
+          <a:p>
+            <a:pPr marL="0" marR="0" lvl="0" indent="0" algn="r" rtl="0">
+              <a:spcBef>
+                <a:spcPts val="0"/>
+              </a:spcBef>
+              <a:buSzPct val="25000"/>
+              <a:buNone/>
+            </a:pPr>
+            <a:fld id="{00000000-1234-1234-1234-123412341234}" type="slidenum">
+              <a:rPr lang="en-US" sz="1200">
+                <a:solidFill>
+                  <a:srgbClr val="000000"/>
+                </a:solidFill>
+                <a:latin typeface="Calibri"/>
+                <a:ea typeface="Calibri"/>
+                <a:cs typeface="Calibri"/>
+                <a:sym typeface="Calibri"/>
+              </a:rPr>
+              <a:t>11</a:t>
+            </a:fld>
+            <a:endParaRPr lang="en-US" sz="1200">
+              <a:solidFill>
+                <a:srgbClr val="000000"/>
+              </a:solidFill>
+              <a:latin typeface="Calibri"/>
+              <a:ea typeface="Calibri"/>
+              <a:cs typeface="Calibri"/>
+              <a:sym typeface="Calibri"/>
+            </a:endParaRPr>
+          </a:p>
+        </p:txBody>
+      </p:sp>
+    </p:spTree>
+    <p:extLst>
+      <p:ext uri="{BB962C8B-B14F-4D97-AF65-F5344CB8AC3E}">
+        <p14:creationId xmlns:p14="http://schemas.microsoft.com/office/powerpoint/2010/main" val="3327025589"/>
+      </p:ext>
+    </p:extLst>
+  </p:cSld>
+  <p:clrMapOvr>
+    <a:masterClrMapping/>
+  </p:clrMapOvr>
+</p:notes>
+</file>
+
+<file path=ppt/notesSlides/notesSlide9.xml><?xml version="1.0" encoding="utf-8"?>
+<p:notes xmlns:a="http://schemas.openxmlformats.org/drawingml/2006/main" xmlns:r="http://schemas.openxmlformats.org/officeDocument/2006/relationships" xmlns:p="http://schemas.openxmlformats.org/presentationml/2006/main" showMasterSp="0" showMasterPhAnim="0">
+  <p:cSld>
+    <p:spTree>
+      <p:nvGrpSpPr>
+        <p:cNvPr id="1" name="Shape 126"/>
+        <p:cNvGrpSpPr/>
+        <p:nvPr/>
+      </p:nvGrpSpPr>
+      <p:grpSpPr>
+        <a:xfrm>
+          <a:off x="0" y="0"/>
+          <a:ext cx="0" cy="0"/>
+          <a:chOff x="0" y="0"/>
+          <a:chExt cx="0" cy="0"/>
+        </a:xfrm>
+      </p:grpSpPr>
+      <p:sp>
+        <p:nvSpPr>
+          <p:cNvPr id="127" name="Shape 127"/>
+          <p:cNvSpPr>
+            <a:spLocks noGrp="1" noRot="1" noChangeAspect="1"/>
+          </p:cNvSpPr>
+          <p:nvPr>
+            <p:ph type="sldImg" idx="2"/>
+          </p:nvPr>
+        </p:nvSpPr>
+        <p:spPr>
+          <a:xfrm>
+            <a:off x="381000" y="685800"/>
+            <a:ext cx="6096000" cy="3429000"/>
+          </a:xfrm>
+          <a:custGeom>
+            <a:avLst/>
+            <a:gdLst/>
+            <a:ahLst/>
+            <a:cxnLst/>
+            <a:rect l="0" t="0" r="0" b="0"/>
+            <a:pathLst>
+              <a:path w="120000" h="120000" extrusionOk="0">
+                <a:moveTo>
+                  <a:pt x="0" y="0"/>
+                </a:moveTo>
+                <a:lnTo>
+                  <a:pt x="120000" y="0"/>
+                </a:lnTo>
+                <a:lnTo>
+                  <a:pt x="120000" y="120000"/>
+                </a:lnTo>
+                <a:lnTo>
+                  <a:pt x="0" y="120000"/>
+                </a:lnTo>
+                <a:close/>
+              </a:path>
+            </a:pathLst>
+          </a:custGeom>
+          <a:noFill/>
+          <a:ln w="12700" cap="flat" cmpd="sng">
+            <a:solidFill>
+              <a:srgbClr val="000000"/>
+            </a:solidFill>
+            <a:prstDash val="solid"/>
+            <a:round/>
+            <a:headEnd type="none" w="med" len="med"/>
+            <a:tailEnd type="none" w="med" len="med"/>
+          </a:ln>
+        </p:spPr>
+      </p:sp>
+      <p:sp>
+        <p:nvSpPr>
+          <p:cNvPr id="128" name="Shape 128"/>
+          <p:cNvSpPr txBox="1">
+            <a:spLocks noGrp="1"/>
+          </p:cNvSpPr>
+          <p:nvPr>
+            <p:ph type="body" idx="1"/>
+          </p:nvPr>
+        </p:nvSpPr>
+        <p:spPr>
+          <a:xfrm>
+            <a:off x="685800" y="4343400"/>
+            <a:ext cx="5486400" cy="4114800"/>
+          </a:xfrm>
+          <a:prstGeom prst="rect">
+            <a:avLst/>
+          </a:prstGeom>
+          <a:noFill/>
+          <a:ln>
+            <a:noFill/>
+          </a:ln>
+        </p:spPr>
+        <p:txBody>
+          <a:bodyPr lIns="91425" tIns="45700" rIns="91425" bIns="45700" anchor="t" anchorCtr="0">
+            <a:noAutofit/>
+          </a:bodyPr>
+          <a:lstStyle/>
+          <a:p>
+            <a:pPr marL="0" marR="0" lvl="0" indent="0" algn="l" rtl="0">
+              <a:spcBef>
+                <a:spcPts val="0"/>
+              </a:spcBef>
+              <a:buSzPct val="25000"/>
+              <a:buNone/>
+            </a:pPr>
+            <a:endParaRPr sz="1200" b="0" i="0" u="none" strike="noStrike" cap="none">
+              <a:solidFill>
+                <a:schemeClr val="dk1"/>
+              </a:solidFill>
+              <a:latin typeface="Calibri"/>
+              <a:ea typeface="Calibri"/>
+              <a:cs typeface="Calibri"/>
+              <a:sym typeface="Calibri"/>
+            </a:endParaRPr>
+          </a:p>
+        </p:txBody>
+      </p:sp>
+      <p:sp>
+        <p:nvSpPr>
+          <p:cNvPr id="129" name="Shape 129"/>
+          <p:cNvSpPr txBox="1">
+            <a:spLocks noGrp="1"/>
+          </p:cNvSpPr>
+          <p:nvPr>
+            <p:ph type="sldNum" idx="12"/>
+          </p:nvPr>
+        </p:nvSpPr>
+        <p:spPr>
+          <a:xfrm>
+            <a:off x="3884612" y="8685213"/>
+            <a:ext cx="2971800" cy="457200"/>
+          </a:xfrm>
+          <a:prstGeom prst="rect">
+            <a:avLst/>
+          </a:prstGeom>
+          <a:noFill/>
+          <a:ln>
+            <a:noFill/>
+          </a:ln>
+        </p:spPr>
+        <p:txBody>
+          <a:bodyPr lIns="91425" tIns="45700" rIns="91425" bIns="45700" anchor="b" anchorCtr="0">
+            <a:noAutofit/>
+          </a:bodyPr>
+          <a:lstStyle/>
+          <a:p>
+            <a:pPr marL="0" marR="0" lvl="0" indent="0" algn="r" rtl="0">
+              <a:spcBef>
+                <a:spcPts val="0"/>
+              </a:spcBef>
+              <a:buSzPct val="25000"/>
+              <a:buNone/>
+            </a:pPr>
+            <a:fld id="{00000000-1234-1234-1234-123412341234}" type="slidenum">
+              <a:rPr lang="en-US" sz="1200">
+                <a:solidFill>
+                  <a:srgbClr val="000000"/>
+                </a:solidFill>
+                <a:latin typeface="Calibri"/>
+                <a:ea typeface="Calibri"/>
+                <a:cs typeface="Calibri"/>
+                <a:sym typeface="Calibri"/>
+              </a:rPr>
+              <a:t>13</a:t>
+            </a:fld>
+            <a:endParaRPr lang="en-US" sz="1200">
+              <a:solidFill>
+                <a:srgbClr val="000000"/>
+              </a:solidFill>
+              <a:latin typeface="Calibri"/>
+              <a:ea typeface="Calibri"/>
+              <a:cs typeface="Calibri"/>
+              <a:sym typeface="Calibri"/>
+            </a:endParaRPr>
+          </a:p>
+        </p:txBody>
+      </p:sp>
+    </p:spTree>
+    <p:extLst>
+      <p:ext uri="{BB962C8B-B14F-4D97-AF65-F5344CB8AC3E}">
+        <p14:creationId xmlns:p14="http://schemas.microsoft.com/office/powerpoint/2010/main" val="3212492397"/>
       </p:ext>
     </p:extLst>
   </p:cSld>
@@ -7993,13 +8943,7 @@
   <p:cSld>
     <p:spTree>
       <p:nvGrpSpPr>
-        <p:cNvPr id="1" name="">
-          <a:extLst>
-            <a:ext uri="{FF2B5EF4-FFF2-40B4-BE49-F238E27FC236}">
-              <a16:creationId xmlns:a16="http://schemas.microsoft.com/office/drawing/2014/main" id="{9D968891-6880-885C-080F-2388AEA1DAB2}"/>
-            </a:ext>
-          </a:extLst>
-        </p:cNvPr>
+        <p:cNvPr id="1" name="Shape 130"/>
         <p:cNvGrpSpPr/>
         <p:nvPr/>
       </p:nvGrpSpPr>
@@ -8011,12 +8955,45 @@
           <a:chExt cx="0" cy="0"/>
         </a:xfrm>
       </p:grpSpPr>
-      <p:sp>
-        <p:nvSpPr>
-          <p:cNvPr id="2" name="Title 1">
+      <p:pic>
+        <p:nvPicPr>
+          <p:cNvPr id="3" name="Online Media 2" title="Why We Might Not Have Statistics Without Guinness Brewery – A History of the t-Test (10-0)">
+            <a:hlinkClick r:id="" action="ppaction://media"/>
             <a:extLst>
               <a:ext uri="{FF2B5EF4-FFF2-40B4-BE49-F238E27FC236}">
-                <a16:creationId xmlns:a16="http://schemas.microsoft.com/office/drawing/2014/main" id="{EF536766-EC03-7A13-656F-CB8C6FCDE63B}"/>
+                <a16:creationId xmlns:a16="http://schemas.microsoft.com/office/drawing/2014/main" id="{CB63DBB8-5303-C185-8100-7204BEAD1C80}"/>
+              </a:ext>
+            </a:extLst>
+          </p:cNvPr>
+          <p:cNvPicPr>
+            <a:picLocks noRot="1" noChangeAspect="1"/>
+          </p:cNvPicPr>
+          <p:nvPr>
+            <a:videoFile r:link="rId1"/>
+          </p:nvPr>
+        </p:nvPicPr>
+        <p:blipFill>
+          <a:blip r:embed="rId4"/>
+          <a:stretch>
+            <a:fillRect/>
+          </a:stretch>
+        </p:blipFill>
+        <p:spPr>
+          <a:xfrm>
+            <a:off x="4292659" y="1410164"/>
+            <a:ext cx="7769895" cy="4390001"/>
+          </a:xfrm>
+          <a:prstGeom prst="rect">
+            <a:avLst/>
+          </a:prstGeom>
+        </p:spPr>
+      </p:pic>
+      <p:sp>
+        <p:nvSpPr>
+          <p:cNvPr id="4" name="Title 3">
+            <a:extLst>
+              <a:ext uri="{FF2B5EF4-FFF2-40B4-BE49-F238E27FC236}">
+                <a16:creationId xmlns:a16="http://schemas.microsoft.com/office/drawing/2014/main" id="{C1BE99EB-F4A8-3C0E-3160-7D99301911B4}"/>
               </a:ext>
             </a:extLst>
           </p:cNvPr>
@@ -8034,17 +9011,17 @@
           <a:p>
             <a:r>
               <a:rPr lang="en-US" dirty="0"/>
-              <a:t>Steps in hypothesis testing</a:t>
-            </a:r>
-          </a:p>
-        </p:txBody>
-      </p:sp>
-      <p:sp>
-        <p:nvSpPr>
-          <p:cNvPr id="3" name="Content Placeholder 2">
+              <a:t>The key role of beer!</a:t>
+            </a:r>
+          </a:p>
+        </p:txBody>
+      </p:sp>
+      <p:sp>
+        <p:nvSpPr>
+          <p:cNvPr id="8" name="Text Placeholder 7">
             <a:extLst>
               <a:ext uri="{FF2B5EF4-FFF2-40B4-BE49-F238E27FC236}">
-                <a16:creationId xmlns:a16="http://schemas.microsoft.com/office/drawing/2014/main" id="{C54A7800-9B92-C341-EB7C-1E82A00414CE}"/>
+                <a16:creationId xmlns:a16="http://schemas.microsoft.com/office/drawing/2014/main" id="{E8EE6D8C-F5B2-E471-AF23-7AEF34EB900D}"/>
               </a:ext>
             </a:extLst>
           </p:cNvPr>
@@ -8052,7 +9029,7 @@
             <a:spLocks noGrp="1"/>
           </p:cNvSpPr>
           <p:nvPr>
-            <p:ph idx="1"/>
+            <p:ph type="body" sz="half" idx="2"/>
           </p:nvPr>
         </p:nvSpPr>
         <p:spPr/>
@@ -8060,64 +9037,155 @@
           <a:bodyPr/>
           <a:lstStyle/>
           <a:p>
-            <a:pPr marL="494100" indent="-457200">
-              <a:buFont typeface="+mj-lt"/>
-              <a:buAutoNum type="arabicPeriod"/>
-            </a:pPr>
-            <a:r>
-              <a:rPr lang="en-US" dirty="0"/>
-              <a:t>State the null and alternate hypothesis</a:t>
-            </a:r>
-          </a:p>
-          <a:p>
-            <a:pPr marL="494100" indent="-457200">
-              <a:buFont typeface="+mj-lt"/>
-              <a:buAutoNum type="arabicPeriod"/>
-            </a:pPr>
-            <a:r>
-              <a:rPr lang="en-US" dirty="0"/>
-              <a:t>Select the appropriate test</a:t>
-            </a:r>
-          </a:p>
-          <a:p>
-            <a:pPr marL="494100" indent="-457200">
-              <a:buFont typeface="+mj-lt"/>
-              <a:buAutoNum type="arabicPeriod"/>
-            </a:pPr>
-            <a:r>
-              <a:rPr lang="en-US" dirty="0"/>
-              <a:t>Select the level of significance</a:t>
-            </a:r>
-          </a:p>
-          <a:p>
-            <a:pPr marL="494100" indent="-457200">
-              <a:buFont typeface="+mj-lt"/>
-              <a:buAutoNum type="arabicPeriod"/>
-            </a:pPr>
-            <a:r>
-              <a:rPr lang="en-US" dirty="0"/>
-              <a:t>Delineate regions of rejection and non-rejection of the null hypothesis</a:t>
-            </a:r>
-          </a:p>
-          <a:p>
-            <a:pPr marL="494100" indent="-457200">
-              <a:buFont typeface="+mj-lt"/>
-              <a:buAutoNum type="arabicPeriod"/>
-            </a:pPr>
-            <a:endParaRPr lang="en-US" dirty="0"/>
+            <a:endParaRPr lang="en-US"/>
           </a:p>
         </p:txBody>
       </p:sp>
     </p:spTree>
     <p:extLst>
       <p:ext uri="{BB962C8B-B14F-4D97-AF65-F5344CB8AC3E}">
-        <p14:creationId xmlns:p14="http://schemas.microsoft.com/office/powerpoint/2010/main" val="2547420996"/>
+        <p14:creationId xmlns:p14="http://schemas.microsoft.com/office/powerpoint/2010/main" val="2667356268"/>
       </p:ext>
     </p:extLst>
   </p:cSld>
   <p:clrMapOvr>
     <a:masterClrMapping/>
   </p:clrMapOvr>
+  <p:timing>
+    <p:tnLst>
+      <p:par>
+        <p:cTn id="1" dur="indefinite" restart="never" nodeType="tmRoot">
+          <p:childTnLst>
+            <p:seq concurrent="1" nextAc="seek">
+              <p:cTn id="2" dur="indefinite" nodeType="mainSeq">
+                <p:childTnLst>
+                  <p:par>
+                    <p:cTn id="3" fill="hold">
+                      <p:stCondLst>
+                        <p:cond delay="indefinite"/>
+                      </p:stCondLst>
+                      <p:childTnLst>
+                        <p:par>
+                          <p:cTn id="4" fill="hold">
+                            <p:stCondLst>
+                              <p:cond delay="0"/>
+                            </p:stCondLst>
+                            <p:childTnLst>
+                              <p:par>
+                                <p:cTn id="5" presetID="1" presetClass="mediacall" presetSubtype="0" fill="hold" nodeType="clickEffect">
+                                  <p:stCondLst>
+                                    <p:cond delay="0"/>
+                                  </p:stCondLst>
+                                  <p:childTnLst>
+                                    <p:cmd type="call" cmd="playFrom(0.0)">
+                                      <p:cBhvr>
+                                        <p:cTn id="6" dur="1" fill="hold"/>
+                                        <p:tgtEl>
+                                          <p:spTgt spid="3"/>
+                                        </p:tgtEl>
+                                      </p:cBhvr>
+                                    </p:cmd>
+                                  </p:childTnLst>
+                                </p:cTn>
+                              </p:par>
+                            </p:childTnLst>
+                          </p:cTn>
+                        </p:par>
+                      </p:childTnLst>
+                    </p:cTn>
+                  </p:par>
+                </p:childTnLst>
+              </p:cTn>
+              <p:prevCondLst>
+                <p:cond evt="onPrev" delay="0">
+                  <p:tgtEl>
+                    <p:sldTgt/>
+                  </p:tgtEl>
+                </p:cond>
+              </p:prevCondLst>
+              <p:nextCondLst>
+                <p:cond evt="onNext" delay="0">
+                  <p:tgtEl>
+                    <p:sldTgt/>
+                  </p:tgtEl>
+                </p:cond>
+              </p:nextCondLst>
+            </p:seq>
+            <p:video>
+              <p:cMediaNode vol="80000">
+                <p:cTn id="7" fill="hold" display="0">
+                  <p:stCondLst>
+                    <p:cond delay="indefinite"/>
+                  </p:stCondLst>
+                </p:cTn>
+                <p:tgtEl>
+                  <p:spTgt spid="3"/>
+                </p:tgtEl>
+              </p:cMediaNode>
+            </p:video>
+            <p:seq concurrent="1" nextAc="seek">
+              <p:cTn id="8" restart="whenNotActive" fill="hold" evtFilter="cancelBubble" nodeType="interactiveSeq">
+                <p:stCondLst>
+                  <p:cond evt="onClick" delay="0">
+                    <p:tgtEl>
+                      <p:spTgt spid="3"/>
+                    </p:tgtEl>
+                  </p:cond>
+                </p:stCondLst>
+                <p:endSync evt="end" delay="0">
+                  <p:rtn val="all"/>
+                </p:endSync>
+                <p:childTnLst>
+                  <p:par>
+                    <p:cTn id="9" fill="hold">
+                      <p:stCondLst>
+                        <p:cond delay="0"/>
+                      </p:stCondLst>
+                      <p:childTnLst>
+                        <p:par>
+                          <p:cTn id="10" fill="hold">
+                            <p:stCondLst>
+                              <p:cond delay="0"/>
+                            </p:stCondLst>
+                            <p:childTnLst>
+                              <p:par>
+                                <p:cTn id="11" presetID="2" presetClass="mediacall" presetSubtype="0" fill="hold" nodeType="clickEffect">
+                                  <p:stCondLst>
+                                    <p:cond delay="0"/>
+                                  </p:stCondLst>
+                                  <p:childTnLst>
+                                    <p:cmd type="call" cmd="togglePause">
+                                      <p:cBhvr>
+                                        <p:cTn id="12" dur="1" fill="hold"/>
+                                        <p:tgtEl>
+                                          <p:spTgt spid="3"/>
+                                        </p:tgtEl>
+                                      </p:cBhvr>
+                                    </p:cmd>
+                                  </p:childTnLst>
+                                </p:cTn>
+                              </p:par>
+                            </p:childTnLst>
+                          </p:cTn>
+                        </p:par>
+                      </p:childTnLst>
+                    </p:cTn>
+                  </p:par>
+                </p:childTnLst>
+              </p:cTn>
+              <p:nextCondLst>
+                <p:cond evt="onClick" delay="0">
+                  <p:tgtEl>
+                    <p:spTgt spid="3"/>
+                  </p:tgtEl>
+                </p:cond>
+              </p:nextCondLst>
+            </p:seq>
+          </p:childTnLst>
+        </p:cTn>
+      </p:par>
+    </p:tnLst>
+  </p:timing>
 </p:sld>
 </file>
 
@@ -8140,6 +9208,601 @@
       </p:grpSpPr>
       <p:sp>
         <p:nvSpPr>
+          <p:cNvPr id="132" name="Shape 132"/>
+          <p:cNvSpPr txBox="1"/>
+          <p:nvPr/>
+        </p:nvSpPr>
+        <p:spPr>
+          <a:xfrm>
+            <a:off x="1137472" y="792875"/>
+            <a:ext cx="9387271" cy="853046"/>
+          </a:xfrm>
+          <a:prstGeom prst="rect">
+            <a:avLst/>
+          </a:prstGeom>
+          <a:noFill/>
+          <a:ln>
+            <a:noFill/>
+          </a:ln>
+        </p:spPr>
+        <p:txBody>
+          <a:bodyPr lIns="91425" tIns="45700" rIns="91425" bIns="45700" anchor="t" anchorCtr="0">
+            <a:noAutofit/>
+          </a:bodyPr>
+          <a:lstStyle/>
+          <a:p>
+            <a:pPr>
+              <a:spcBef>
+                <a:spcPts val="560"/>
+              </a:spcBef>
+              <a:buClr>
+                <a:srgbClr val="FFFF66"/>
+              </a:buClr>
+              <a:buSzPct val="25000"/>
+            </a:pPr>
+            <a:r>
+              <a:rPr lang="en-US" sz="4000" b="1" dirty="0">
+                <a:ea typeface="Gill Sans MT"/>
+                <a:cs typeface="Gill Sans MT"/>
+                <a:sym typeface="Gill Sans MT"/>
+              </a:rPr>
+              <a:t>Tests of difference</a:t>
+            </a:r>
+            <a:endParaRPr lang="en-US" sz="4000" b="1" dirty="0">
+              <a:effectLst/>
+              <a:ea typeface="Gill Sans MT"/>
+              <a:cs typeface="Gill Sans MT"/>
+              <a:sym typeface="Gill Sans MT"/>
+            </a:endParaRPr>
+          </a:p>
+        </p:txBody>
+      </p:sp>
+      <p:sp>
+        <p:nvSpPr>
+          <p:cNvPr id="2" name="Rectangle 1">
+            <a:extLst>
+              <a:ext uri="{FF2B5EF4-FFF2-40B4-BE49-F238E27FC236}">
+                <a16:creationId xmlns:a16="http://schemas.microsoft.com/office/drawing/2014/main" id="{89E8621C-82F3-42A2-89F9-F4AEFEBF5767}"/>
+              </a:ext>
+            </a:extLst>
+          </p:cNvPr>
+          <p:cNvSpPr/>
+          <p:nvPr/>
+        </p:nvSpPr>
+        <p:spPr>
+          <a:xfrm>
+            <a:off x="1137473" y="1965258"/>
+            <a:ext cx="10164169" cy="3970318"/>
+          </a:xfrm>
+          <a:prstGeom prst="rect">
+            <a:avLst/>
+          </a:prstGeom>
+        </p:spPr>
+        <p:txBody>
+          <a:bodyPr wrap="square">
+            <a:spAutoFit/>
+          </a:bodyPr>
+          <a:lstStyle/>
+          <a:p>
+            <a:r>
+              <a:rPr lang="en-US" sz="2800" dirty="0"/>
+              <a:t>What is the specific purpose of this test? </a:t>
+            </a:r>
+          </a:p>
+          <a:p>
+            <a:r>
+              <a:rPr lang="en-US" sz="2800" dirty="0"/>
+              <a:t>Can you come up with a research question that would require it?</a:t>
+            </a:r>
+          </a:p>
+          <a:p>
+            <a:endParaRPr lang="en-US" sz="2800" dirty="0"/>
+          </a:p>
+          <a:p>
+            <a:pPr marL="457200" indent="-457200">
+              <a:buFont typeface="Arial" panose="020B0604020202020204" pitchFamily="34" charset="0"/>
+              <a:buChar char="•"/>
+            </a:pPr>
+            <a:r>
+              <a:rPr lang="en-US" sz="2800" dirty="0"/>
+              <a:t>One sample t-test</a:t>
+            </a:r>
+          </a:p>
+          <a:p>
+            <a:pPr marL="457200" indent="-457200">
+              <a:buFont typeface="Arial" panose="020B0604020202020204" pitchFamily="34" charset="0"/>
+              <a:buChar char="•"/>
+            </a:pPr>
+            <a:r>
+              <a:rPr lang="en-US" sz="2800" dirty="0"/>
+              <a:t>Two sample t-test </a:t>
+            </a:r>
+          </a:p>
+          <a:p>
+            <a:pPr marL="457200" indent="-457200">
+              <a:buFont typeface="Arial" panose="020B0604020202020204" pitchFamily="34" charset="0"/>
+              <a:buChar char="•"/>
+            </a:pPr>
+            <a:r>
+              <a:rPr lang="en-US" sz="2800" dirty="0"/>
+              <a:t>Two sample </a:t>
+            </a:r>
+            <a:r>
+              <a:rPr lang="en-US" sz="2800" u="sng" dirty="0"/>
+              <a:t>paired</a:t>
+            </a:r>
+            <a:r>
+              <a:rPr lang="en-US" sz="2800" dirty="0"/>
+              <a:t> t-test</a:t>
+            </a:r>
+          </a:p>
+          <a:p>
+            <a:pPr marL="457200" indent="-457200">
+              <a:buFont typeface="Arial" panose="020B0604020202020204" pitchFamily="34" charset="0"/>
+              <a:buChar char="•"/>
+            </a:pPr>
+            <a:r>
+              <a:rPr lang="en-US" sz="2800" dirty="0"/>
+              <a:t>Non-parametric (Wilcoxon) t-test</a:t>
+            </a:r>
+          </a:p>
+          <a:p>
+            <a:pPr marL="457200" indent="-457200">
+              <a:buFont typeface="Arial" panose="020B0604020202020204" pitchFamily="34" charset="0"/>
+              <a:buChar char="•"/>
+            </a:pPr>
+            <a:r>
+              <a:rPr lang="en-US" sz="2800" dirty="0"/>
+              <a:t>Difference test between two proportions</a:t>
+            </a:r>
+          </a:p>
+        </p:txBody>
+      </p:sp>
+    </p:spTree>
+    <p:extLst>
+      <p:ext uri="{BB962C8B-B14F-4D97-AF65-F5344CB8AC3E}">
+        <p14:creationId xmlns:p14="http://schemas.microsoft.com/office/powerpoint/2010/main" val="2421695127"/>
+      </p:ext>
+    </p:extLst>
+  </p:cSld>
+  <p:clrMapOvr>
+    <a:masterClrMapping/>
+  </p:clrMapOvr>
+</p:sld>
+</file>
+
+<file path=ppt/slides/slide12.xml><?xml version="1.0" encoding="utf-8"?>
+<p:sld xmlns:a="http://schemas.openxmlformats.org/drawingml/2006/main" xmlns:r="http://schemas.openxmlformats.org/officeDocument/2006/relationships" xmlns:p="http://schemas.openxmlformats.org/presentationml/2006/main">
+  <p:cSld>
+    <p:spTree>
+      <p:nvGrpSpPr>
+        <p:cNvPr id="1" name="">
+          <a:extLst>
+            <a:ext uri="{FF2B5EF4-FFF2-40B4-BE49-F238E27FC236}">
+              <a16:creationId xmlns:a16="http://schemas.microsoft.com/office/drawing/2014/main" id="{D033A504-F633-0EEC-99D2-3F96255680A1}"/>
+            </a:ext>
+          </a:extLst>
+        </p:cNvPr>
+        <p:cNvGrpSpPr/>
+        <p:nvPr/>
+      </p:nvGrpSpPr>
+      <p:grpSpPr>
+        <a:xfrm>
+          <a:off x="0" y="0"/>
+          <a:ext cx="0" cy="0"/>
+          <a:chOff x="0" y="0"/>
+          <a:chExt cx="0" cy="0"/>
+        </a:xfrm>
+      </p:grpSpPr>
+      <p:sp>
+        <p:nvSpPr>
+          <p:cNvPr id="2" name="Title 1">
+            <a:extLst>
+              <a:ext uri="{FF2B5EF4-FFF2-40B4-BE49-F238E27FC236}">
+                <a16:creationId xmlns:a16="http://schemas.microsoft.com/office/drawing/2014/main" id="{639BAC83-330D-113E-4C64-9277E3B4A7D4}"/>
+              </a:ext>
+            </a:extLst>
+          </p:cNvPr>
+          <p:cNvSpPr>
+            <a:spLocks noGrp="1"/>
+          </p:cNvSpPr>
+          <p:nvPr>
+            <p:ph type="title"/>
+          </p:nvPr>
+        </p:nvSpPr>
+        <p:spPr/>
+        <p:txBody>
+          <a:bodyPr/>
+          <a:lstStyle/>
+          <a:p>
+            <a:r>
+              <a:rPr lang="en-US" dirty="0"/>
+              <a:t>Steps in hypothesis testing</a:t>
+            </a:r>
+          </a:p>
+        </p:txBody>
+      </p:sp>
+      <p:sp>
+        <p:nvSpPr>
+          <p:cNvPr id="3" name="Content Placeholder 2">
+            <a:extLst>
+              <a:ext uri="{FF2B5EF4-FFF2-40B4-BE49-F238E27FC236}">
+                <a16:creationId xmlns:a16="http://schemas.microsoft.com/office/drawing/2014/main" id="{4DEE7EC3-37C4-B133-CC88-8105E859475E}"/>
+              </a:ext>
+            </a:extLst>
+          </p:cNvPr>
+          <p:cNvSpPr>
+            <a:spLocks noGrp="1"/>
+          </p:cNvSpPr>
+          <p:nvPr>
+            <p:ph idx="1"/>
+          </p:nvPr>
+        </p:nvSpPr>
+        <p:spPr/>
+        <p:txBody>
+          <a:bodyPr/>
+          <a:lstStyle/>
+          <a:p>
+            <a:pPr marL="494100" indent="-457200">
+              <a:buFont typeface="+mj-lt"/>
+              <a:buAutoNum type="arabicPeriod"/>
+            </a:pPr>
+            <a:r>
+              <a:rPr lang="en-US" dirty="0"/>
+              <a:t>State the null and alternate hypothesis</a:t>
+            </a:r>
+          </a:p>
+          <a:p>
+            <a:pPr marL="494100" indent="-457200">
+              <a:buFont typeface="+mj-lt"/>
+              <a:buAutoNum type="arabicPeriod"/>
+            </a:pPr>
+            <a:r>
+              <a:rPr lang="en-US" dirty="0"/>
+              <a:t>Select the appropriate test</a:t>
+            </a:r>
+          </a:p>
+          <a:p>
+            <a:pPr marL="494100" indent="-457200">
+              <a:buFont typeface="+mj-lt"/>
+              <a:buAutoNum type="arabicPeriod"/>
+            </a:pPr>
+            <a:r>
+              <a:rPr lang="en-US" dirty="0"/>
+              <a:t>Select the level of significance</a:t>
+            </a:r>
+          </a:p>
+          <a:p>
+            <a:pPr marL="494100" indent="-457200">
+              <a:buFont typeface="+mj-lt"/>
+              <a:buAutoNum type="arabicPeriod"/>
+            </a:pPr>
+            <a:endParaRPr lang="en-US" dirty="0"/>
+          </a:p>
+        </p:txBody>
+      </p:sp>
+    </p:spTree>
+    <p:extLst>
+      <p:ext uri="{BB962C8B-B14F-4D97-AF65-F5344CB8AC3E}">
+        <p14:creationId xmlns:p14="http://schemas.microsoft.com/office/powerpoint/2010/main" val="3595243208"/>
+      </p:ext>
+    </p:extLst>
+  </p:cSld>
+  <p:clrMapOvr>
+    <a:masterClrMapping/>
+  </p:clrMapOvr>
+</p:sld>
+</file>
+
+<file path=ppt/slides/slide13.xml><?xml version="1.0" encoding="utf-8"?>
+<p:sld xmlns:a="http://schemas.openxmlformats.org/drawingml/2006/main" xmlns:r="http://schemas.openxmlformats.org/officeDocument/2006/relationships" xmlns:p="http://schemas.openxmlformats.org/presentationml/2006/main">
+  <p:cSld>
+    <p:spTree>
+      <p:nvGrpSpPr>
+        <p:cNvPr id="1" name="Shape 130"/>
+        <p:cNvGrpSpPr/>
+        <p:nvPr/>
+      </p:nvGrpSpPr>
+      <p:grpSpPr>
+        <a:xfrm>
+          <a:off x="0" y="0"/>
+          <a:ext cx="0" cy="0"/>
+          <a:chOff x="0" y="0"/>
+          <a:chExt cx="0" cy="0"/>
+        </a:xfrm>
+      </p:grpSpPr>
+      <p:sp>
+        <p:nvSpPr>
+          <p:cNvPr id="132" name="Shape 132"/>
+          <p:cNvSpPr txBox="1"/>
+          <p:nvPr/>
+        </p:nvSpPr>
+        <p:spPr>
+          <a:xfrm>
+            <a:off x="1101109" y="854421"/>
+            <a:ext cx="6567738" cy="937803"/>
+          </a:xfrm>
+          <a:prstGeom prst="rect">
+            <a:avLst/>
+          </a:prstGeom>
+          <a:noFill/>
+          <a:ln>
+            <a:noFill/>
+          </a:ln>
+        </p:spPr>
+        <p:txBody>
+          <a:bodyPr lIns="91425" tIns="45700" rIns="91425" bIns="45700" anchor="t" anchorCtr="0">
+            <a:noAutofit/>
+          </a:bodyPr>
+          <a:lstStyle/>
+          <a:p>
+            <a:pPr>
+              <a:spcBef>
+                <a:spcPts val="560"/>
+              </a:spcBef>
+              <a:buClr>
+                <a:srgbClr val="FFFF66"/>
+              </a:buClr>
+              <a:buSzPct val="25000"/>
+            </a:pPr>
+            <a:r>
+              <a:rPr lang="en-US" sz="4000" b="1" dirty="0">
+                <a:ea typeface="Gill Sans MT"/>
+                <a:cs typeface="Gill Sans MT"/>
+                <a:sym typeface="Gill Sans MT"/>
+              </a:rPr>
+              <a:t>Select level of significance</a:t>
+            </a:r>
+            <a:endParaRPr lang="en-US" sz="4000" b="1" dirty="0">
+              <a:effectLst/>
+              <a:ea typeface="Gill Sans MT"/>
+              <a:cs typeface="Gill Sans MT"/>
+              <a:sym typeface="Gill Sans MT"/>
+            </a:endParaRPr>
+          </a:p>
+        </p:txBody>
+      </p:sp>
+      <p:pic>
+        <p:nvPicPr>
+          <p:cNvPr id="4" name="Shape 153" descr="http://www.biochemia-medica.com/sites/default/files/Marusteri_M._Statistical_test_selection_when_comparing_groups_Fig._3.jpg">
+            <a:extLst>
+              <a:ext uri="{FF2B5EF4-FFF2-40B4-BE49-F238E27FC236}">
+                <a16:creationId xmlns:a16="http://schemas.microsoft.com/office/drawing/2014/main" id="{F77A2C1E-7756-44BD-9939-354C5123333D}"/>
+              </a:ext>
+            </a:extLst>
+          </p:cNvPr>
+          <p:cNvPicPr preferRelativeResize="0"/>
+          <p:nvPr/>
+        </p:nvPicPr>
+        <p:blipFill rotWithShape="1">
+          <a:blip r:embed="rId3">
+            <a:alphaModFix/>
+          </a:blip>
+          <a:srcRect/>
+          <a:stretch/>
+        </p:blipFill>
+        <p:spPr>
+          <a:xfrm>
+            <a:off x="6309360" y="2122185"/>
+            <a:ext cx="5302740" cy="3653571"/>
+          </a:xfrm>
+          <a:prstGeom prst="rect">
+            <a:avLst/>
+          </a:prstGeom>
+          <a:noFill/>
+          <a:ln>
+            <a:noFill/>
+          </a:ln>
+        </p:spPr>
+      </p:pic>
+      <p:sp>
+        <p:nvSpPr>
+          <p:cNvPr id="5" name="Rectangle 4">
+            <a:extLst>
+              <a:ext uri="{FF2B5EF4-FFF2-40B4-BE49-F238E27FC236}">
+                <a16:creationId xmlns:a16="http://schemas.microsoft.com/office/drawing/2014/main" id="{4C7441C5-4496-43B4-8C0B-7E4EF33586AA}"/>
+              </a:ext>
+            </a:extLst>
+          </p:cNvPr>
+          <p:cNvSpPr/>
+          <p:nvPr/>
+        </p:nvSpPr>
+        <p:spPr>
+          <a:xfrm>
+            <a:off x="1212746" y="2122185"/>
+            <a:ext cx="4426261" cy="3108543"/>
+          </a:xfrm>
+          <a:prstGeom prst="rect">
+            <a:avLst/>
+          </a:prstGeom>
+        </p:spPr>
+        <p:txBody>
+          <a:bodyPr wrap="square">
+            <a:spAutoFit/>
+          </a:bodyPr>
+          <a:lstStyle/>
+          <a:p>
+            <a:r>
+              <a:rPr lang="en-US" sz="2800" dirty="0"/>
+              <a:t>P &lt; 0.05:</a:t>
+            </a:r>
+          </a:p>
+          <a:p>
+            <a:endParaRPr lang="en-US" sz="2800" dirty="0"/>
+          </a:p>
+          <a:p>
+            <a:r>
+              <a:rPr lang="en-US" sz="2800" dirty="0"/>
+              <a:t>The probability that this sample comes from a population in which the two means are equal is less than 5%</a:t>
+            </a:r>
+          </a:p>
+        </p:txBody>
+      </p:sp>
+    </p:spTree>
+    <p:extLst>
+      <p:ext uri="{BB962C8B-B14F-4D97-AF65-F5344CB8AC3E}">
+        <p14:creationId xmlns:p14="http://schemas.microsoft.com/office/powerpoint/2010/main" val="789215728"/>
+      </p:ext>
+    </p:extLst>
+  </p:cSld>
+  <p:clrMapOvr>
+    <a:masterClrMapping/>
+  </p:clrMapOvr>
+</p:sld>
+</file>
+
+<file path=ppt/slides/slide14.xml><?xml version="1.0" encoding="utf-8"?>
+<p:sld xmlns:a="http://schemas.openxmlformats.org/drawingml/2006/main" xmlns:r="http://schemas.openxmlformats.org/officeDocument/2006/relationships" xmlns:p="http://schemas.openxmlformats.org/presentationml/2006/main">
+  <p:cSld>
+    <p:spTree>
+      <p:nvGrpSpPr>
+        <p:cNvPr id="1" name="">
+          <a:extLst>
+            <a:ext uri="{FF2B5EF4-FFF2-40B4-BE49-F238E27FC236}">
+              <a16:creationId xmlns:a16="http://schemas.microsoft.com/office/drawing/2014/main" id="{9D968891-6880-885C-080F-2388AEA1DAB2}"/>
+            </a:ext>
+          </a:extLst>
+        </p:cNvPr>
+        <p:cNvGrpSpPr/>
+        <p:nvPr/>
+      </p:nvGrpSpPr>
+      <p:grpSpPr>
+        <a:xfrm>
+          <a:off x="0" y="0"/>
+          <a:ext cx="0" cy="0"/>
+          <a:chOff x="0" y="0"/>
+          <a:chExt cx="0" cy="0"/>
+        </a:xfrm>
+      </p:grpSpPr>
+      <p:sp>
+        <p:nvSpPr>
+          <p:cNvPr id="2" name="Title 1">
+            <a:extLst>
+              <a:ext uri="{FF2B5EF4-FFF2-40B4-BE49-F238E27FC236}">
+                <a16:creationId xmlns:a16="http://schemas.microsoft.com/office/drawing/2014/main" id="{EF536766-EC03-7A13-656F-CB8C6FCDE63B}"/>
+              </a:ext>
+            </a:extLst>
+          </p:cNvPr>
+          <p:cNvSpPr>
+            <a:spLocks noGrp="1"/>
+          </p:cNvSpPr>
+          <p:nvPr>
+            <p:ph type="title"/>
+          </p:nvPr>
+        </p:nvSpPr>
+        <p:spPr/>
+        <p:txBody>
+          <a:bodyPr/>
+          <a:lstStyle/>
+          <a:p>
+            <a:r>
+              <a:rPr lang="en-US" dirty="0"/>
+              <a:t>Steps in hypothesis testing</a:t>
+            </a:r>
+          </a:p>
+        </p:txBody>
+      </p:sp>
+      <p:sp>
+        <p:nvSpPr>
+          <p:cNvPr id="3" name="Content Placeholder 2">
+            <a:extLst>
+              <a:ext uri="{FF2B5EF4-FFF2-40B4-BE49-F238E27FC236}">
+                <a16:creationId xmlns:a16="http://schemas.microsoft.com/office/drawing/2014/main" id="{C54A7800-9B92-C341-EB7C-1E82A00414CE}"/>
+              </a:ext>
+            </a:extLst>
+          </p:cNvPr>
+          <p:cNvSpPr>
+            <a:spLocks noGrp="1"/>
+          </p:cNvSpPr>
+          <p:nvPr>
+            <p:ph idx="1"/>
+          </p:nvPr>
+        </p:nvSpPr>
+        <p:spPr/>
+        <p:txBody>
+          <a:bodyPr/>
+          <a:lstStyle/>
+          <a:p>
+            <a:pPr marL="494100" indent="-457200">
+              <a:buFont typeface="+mj-lt"/>
+              <a:buAutoNum type="arabicPeriod"/>
+            </a:pPr>
+            <a:r>
+              <a:rPr lang="en-US" dirty="0"/>
+              <a:t>State the null and alternate hypothesis</a:t>
+            </a:r>
+          </a:p>
+          <a:p>
+            <a:pPr marL="494100" indent="-457200">
+              <a:buFont typeface="+mj-lt"/>
+              <a:buAutoNum type="arabicPeriod"/>
+            </a:pPr>
+            <a:r>
+              <a:rPr lang="en-US" dirty="0"/>
+              <a:t>Select the appropriate test</a:t>
+            </a:r>
+          </a:p>
+          <a:p>
+            <a:pPr marL="494100" indent="-457200">
+              <a:buFont typeface="+mj-lt"/>
+              <a:buAutoNum type="arabicPeriod"/>
+            </a:pPr>
+            <a:r>
+              <a:rPr lang="en-US" dirty="0"/>
+              <a:t>Select the level of significance</a:t>
+            </a:r>
+          </a:p>
+          <a:p>
+            <a:pPr marL="494100" indent="-457200">
+              <a:buFont typeface="+mj-lt"/>
+              <a:buAutoNum type="arabicPeriod"/>
+            </a:pPr>
+            <a:r>
+              <a:rPr lang="en-US" dirty="0"/>
+              <a:t>Delineate regions of rejection and non-rejection of the null hypothesis</a:t>
+            </a:r>
+          </a:p>
+          <a:p>
+            <a:pPr marL="494100" indent="-457200">
+              <a:buFont typeface="+mj-lt"/>
+              <a:buAutoNum type="arabicPeriod"/>
+            </a:pPr>
+            <a:endParaRPr lang="en-US" dirty="0"/>
+          </a:p>
+        </p:txBody>
+      </p:sp>
+    </p:spTree>
+    <p:extLst>
+      <p:ext uri="{BB962C8B-B14F-4D97-AF65-F5344CB8AC3E}">
+        <p14:creationId xmlns:p14="http://schemas.microsoft.com/office/powerpoint/2010/main" val="2547420996"/>
+      </p:ext>
+    </p:extLst>
+  </p:cSld>
+  <p:clrMapOvr>
+    <a:masterClrMapping/>
+  </p:clrMapOvr>
+</p:sld>
+</file>
+
+<file path=ppt/slides/slide15.xml><?xml version="1.0" encoding="utf-8"?>
+<p:sld xmlns:a="http://schemas.openxmlformats.org/drawingml/2006/main" xmlns:r="http://schemas.openxmlformats.org/officeDocument/2006/relationships" xmlns:p="http://schemas.openxmlformats.org/presentationml/2006/main">
+  <p:cSld>
+    <p:spTree>
+      <p:nvGrpSpPr>
+        <p:cNvPr id="1" name="Shape 130"/>
+        <p:cNvGrpSpPr/>
+        <p:nvPr/>
+      </p:nvGrpSpPr>
+      <p:grpSpPr>
+        <a:xfrm>
+          <a:off x="0" y="0"/>
+          <a:ext cx="0" cy="0"/>
+          <a:chOff x="0" y="0"/>
+          <a:chExt cx="0" cy="0"/>
+        </a:xfrm>
+      </p:grpSpPr>
+      <p:sp>
+        <p:nvSpPr>
           <p:cNvPr id="3" name="Rectangle 2">
             <a:extLst>
               <a:ext uri="{FF2B5EF4-FFF2-40B4-BE49-F238E27FC236}">
@@ -8344,7 +10007,7 @@
 </p:sld>
 </file>
 
-<file path=ppt/slides/slide12.xml><?xml version="1.0" encoding="utf-8"?>
+<file path=ppt/slides/slide16.xml><?xml version="1.0" encoding="utf-8"?>
 <p:sld xmlns:a="http://schemas.openxmlformats.org/drawingml/2006/main" xmlns:r="http://schemas.openxmlformats.org/officeDocument/2006/relationships" xmlns:p="http://schemas.openxmlformats.org/presentationml/2006/main">
   <p:cSld>
     <p:spTree>
@@ -8652,7 +10315,7 @@
 </p:sld>
 </file>
 
-<file path=ppt/slides/slide13.xml><?xml version="1.0" encoding="utf-8"?>
+<file path=ppt/slides/slide17.xml><?xml version="1.0" encoding="utf-8"?>
 <p:sld xmlns:a="http://schemas.openxmlformats.org/drawingml/2006/main" xmlns:r="http://schemas.openxmlformats.org/officeDocument/2006/relationships" xmlns:p="http://schemas.openxmlformats.org/presentationml/2006/main">
   <p:cSld>
     <p:spTree>
@@ -8842,7 +10505,7 @@
 </p:sld>
 </file>
 
-<file path=ppt/slides/slide14.xml><?xml version="1.0" encoding="utf-8"?>
+<file path=ppt/slides/slide18.xml><?xml version="1.0" encoding="utf-8"?>
 <p:sld xmlns:a="http://schemas.openxmlformats.org/drawingml/2006/main" xmlns:r="http://schemas.openxmlformats.org/officeDocument/2006/relationships" xmlns:p="http://schemas.openxmlformats.org/presentationml/2006/main">
   <p:cSld>
     <p:spTree>
@@ -8972,8 +10635,8 @@
           </a:p>
         </p:txBody>
       </p:sp>
-      <mc:AlternateContent xmlns:mc="http://schemas.openxmlformats.org/markup-compatibility/2006">
-        <mc:Choice xmlns:a14="http://schemas.microsoft.com/office/drawing/2010/main" Requires="a14">
+      <mc:AlternateContent xmlns:mc="http://schemas.openxmlformats.org/markup-compatibility/2006" xmlns:a14="http://schemas.microsoft.com/office/drawing/2010/main">
+        <mc:Choice Requires="a14">
           <p:sp>
             <p:nvSpPr>
               <p:cNvPr id="5" name="TextBox 4">
@@ -9184,7 +10847,7 @@
             </p:txBody>
           </p:sp>
         </mc:Choice>
-        <mc:Fallback>
+        <mc:Fallback xmlns="">
           <p:sp>
             <p:nvSpPr>
               <p:cNvPr id="5" name="TextBox 4">
@@ -9339,7 +11002,7 @@
 </p:sld>
 </file>
 
-<file path=ppt/slides/slide15.xml><?xml version="1.0" encoding="utf-8"?>
+<file path=ppt/slides/slide19.xml><?xml version="1.0" encoding="utf-8"?>
 <p:sld xmlns:a="http://schemas.openxmlformats.org/drawingml/2006/main" xmlns:r="http://schemas.openxmlformats.org/officeDocument/2006/relationships" xmlns:p="http://schemas.openxmlformats.org/presentationml/2006/main">
   <p:cSld>
     <p:spTree>
@@ -9471,8 +11134,8 @@
           </a:p>
         </p:txBody>
       </p:sp>
-      <mc:AlternateContent xmlns:mc="http://schemas.openxmlformats.org/markup-compatibility/2006">
-        <mc:Choice xmlns:a14="http://schemas.microsoft.com/office/drawing/2010/main" Requires="a14">
+      <mc:AlternateContent xmlns:mc="http://schemas.openxmlformats.org/markup-compatibility/2006" xmlns:a14="http://schemas.microsoft.com/office/drawing/2010/main">
+        <mc:Choice Requires="a14">
           <p:sp>
             <p:nvSpPr>
               <p:cNvPr id="4" name="TextBox 3">
@@ -9683,7 +11346,7 @@
             </p:txBody>
           </p:sp>
         </mc:Choice>
-        <mc:Fallback>
+        <mc:Fallback xmlns="">
           <p:sp>
             <p:nvSpPr>
               <p:cNvPr id="4" name="TextBox 3">
@@ -9748,7 +11411,202 @@
 </p:sld>
 </file>
 
-<file path=ppt/slides/slide16.xml><?xml version="1.0" encoding="utf-8"?>
+<file path=ppt/slides/slide2.xml><?xml version="1.0" encoding="utf-8"?>
+<p:sld xmlns:a="http://schemas.openxmlformats.org/drawingml/2006/main" xmlns:r="http://schemas.openxmlformats.org/officeDocument/2006/relationships" xmlns:p="http://schemas.openxmlformats.org/presentationml/2006/main">
+  <p:cSld>
+    <p:spTree>
+      <p:nvGrpSpPr>
+        <p:cNvPr id="1" name="Shape 100"/>
+        <p:cNvGrpSpPr/>
+        <p:nvPr/>
+      </p:nvGrpSpPr>
+      <p:grpSpPr>
+        <a:xfrm>
+          <a:off x="0" y="0"/>
+          <a:ext cx="0" cy="0"/>
+          <a:chOff x="0" y="0"/>
+          <a:chExt cx="0" cy="0"/>
+        </a:xfrm>
+      </p:grpSpPr>
+      <p:sp>
+        <p:nvSpPr>
+          <p:cNvPr id="101" name="Shape 101"/>
+          <p:cNvSpPr txBox="1"/>
+          <p:nvPr/>
+        </p:nvSpPr>
+        <p:spPr>
+          <a:xfrm>
+            <a:off x="1122112" y="528087"/>
+            <a:ext cx="5717600" cy="584700"/>
+          </a:xfrm>
+          <a:prstGeom prst="rect">
+            <a:avLst/>
+          </a:prstGeom>
+          <a:noFill/>
+          <a:ln>
+            <a:noFill/>
+          </a:ln>
+        </p:spPr>
+        <p:txBody>
+          <a:bodyPr lIns="91425" tIns="45700" rIns="91425" bIns="45700" anchor="t" anchorCtr="0">
+            <a:noAutofit/>
+          </a:bodyPr>
+          <a:lstStyle/>
+          <a:p>
+            <a:pPr>
+              <a:buSzPct val="25000"/>
+            </a:pPr>
+            <a:r>
+              <a:rPr lang="en-US" sz="3200" b="1" dirty="0">
+                <a:latin typeface="+mj-lt"/>
+                <a:ea typeface="Gill Sans MT"/>
+                <a:cs typeface="Gill Sans MT"/>
+                <a:sym typeface="Gill Sans MT"/>
+              </a:rPr>
+              <a:t>Ingredients of classical hypothesis testing</a:t>
+            </a:r>
+          </a:p>
+        </p:txBody>
+      </p:sp>
+      <p:pic>
+        <p:nvPicPr>
+          <p:cNvPr id="3" name="Picture 2" descr="A picture containing text&#10;&#10;Description automatically generated">
+            <a:extLst>
+              <a:ext uri="{FF2B5EF4-FFF2-40B4-BE49-F238E27FC236}">
+                <a16:creationId xmlns:a16="http://schemas.microsoft.com/office/drawing/2014/main" id="{3DC1E106-D16E-FD3D-A494-FB188A31F746}"/>
+              </a:ext>
+            </a:extLst>
+          </p:cNvPr>
+          <p:cNvPicPr>
+            <a:picLocks noChangeAspect="1"/>
+          </p:cNvPicPr>
+          <p:nvPr/>
+        </p:nvPicPr>
+        <p:blipFill>
+          <a:blip r:embed="rId3">
+            <a:extLst>
+              <a:ext uri="{28A0092B-C50C-407E-A947-70E740481C1C}">
+                <a14:useLocalDpi xmlns:a14="http://schemas.microsoft.com/office/drawing/2010/main" val="0"/>
+              </a:ext>
+            </a:extLst>
+          </a:blip>
+          <a:stretch>
+            <a:fillRect/>
+          </a:stretch>
+        </p:blipFill>
+        <p:spPr>
+          <a:xfrm>
+            <a:off x="6598972" y="0"/>
+            <a:ext cx="5302577" cy="6858000"/>
+          </a:xfrm>
+          <a:prstGeom prst="rect">
+            <a:avLst/>
+          </a:prstGeom>
+        </p:spPr>
+      </p:pic>
+      <p:sp>
+        <p:nvSpPr>
+          <p:cNvPr id="4" name="TextBox 3">
+            <a:extLst>
+              <a:ext uri="{FF2B5EF4-FFF2-40B4-BE49-F238E27FC236}">
+                <a16:creationId xmlns:a16="http://schemas.microsoft.com/office/drawing/2014/main" id="{F7F85CEB-23D6-D157-E282-359D3612BCCB}"/>
+              </a:ext>
+            </a:extLst>
+          </p:cNvPr>
+          <p:cNvSpPr txBox="1"/>
+          <p:nvPr/>
+        </p:nvSpPr>
+        <p:spPr>
+          <a:xfrm>
+            <a:off x="1122112" y="1837266"/>
+            <a:ext cx="5302577" cy="3416320"/>
+          </a:xfrm>
+          <a:prstGeom prst="rect">
+            <a:avLst/>
+          </a:prstGeom>
+          <a:noFill/>
+        </p:spPr>
+        <p:txBody>
+          <a:bodyPr wrap="square">
+            <a:spAutoFit/>
+          </a:bodyPr>
+          <a:lstStyle/>
+          <a:p>
+            <a:pPr marL="494100" indent="-457200">
+              <a:buFont typeface="+mj-lt"/>
+              <a:buAutoNum type="arabicPeriod"/>
+            </a:pPr>
+            <a:r>
+              <a:rPr lang="en-US" sz="2400" dirty="0"/>
+              <a:t>State the null and alternate hypothesis</a:t>
+            </a:r>
+          </a:p>
+          <a:p>
+            <a:pPr marL="494100" indent="-457200">
+              <a:buFont typeface="+mj-lt"/>
+              <a:buAutoNum type="arabicPeriod"/>
+            </a:pPr>
+            <a:r>
+              <a:rPr lang="en-US" sz="2400" dirty="0"/>
+              <a:t>Select the appropriate test</a:t>
+            </a:r>
+          </a:p>
+          <a:p>
+            <a:pPr marL="494100" indent="-457200">
+              <a:buFont typeface="+mj-lt"/>
+              <a:buAutoNum type="arabicPeriod"/>
+            </a:pPr>
+            <a:r>
+              <a:rPr lang="en-US" sz="2400" dirty="0"/>
+              <a:t>Select the level of significance</a:t>
+            </a:r>
+          </a:p>
+          <a:p>
+            <a:pPr marL="494100" indent="-457200">
+              <a:buFont typeface="+mj-lt"/>
+              <a:buAutoNum type="arabicPeriod"/>
+            </a:pPr>
+            <a:r>
+              <a:rPr lang="en-US" sz="2400" dirty="0"/>
+              <a:t>Delineate regions of rejection and non-rejection of the null hypothesis</a:t>
+            </a:r>
+          </a:p>
+          <a:p>
+            <a:pPr marL="494100" indent="-457200">
+              <a:buFont typeface="+mj-lt"/>
+              <a:buAutoNum type="arabicPeriod"/>
+            </a:pPr>
+            <a:r>
+              <a:rPr lang="en-US" sz="2400" dirty="0"/>
+              <a:t>Calculate the t-statistic</a:t>
+            </a:r>
+          </a:p>
+          <a:p>
+            <a:pPr marL="494100" indent="-457200">
+              <a:buFont typeface="+mj-lt"/>
+              <a:buAutoNum type="arabicPeriod"/>
+            </a:pPr>
+            <a:r>
+              <a:rPr lang="en-US" sz="2400" dirty="0"/>
+              <a:t>Make a decision</a:t>
+            </a:r>
+          </a:p>
+        </p:txBody>
+      </p:sp>
+    </p:spTree>
+    <p:extLst>
+      <p:ext uri="{BB962C8B-B14F-4D97-AF65-F5344CB8AC3E}">
+        <p14:creationId xmlns:p14="http://schemas.microsoft.com/office/powerpoint/2010/main" val="1512174370"/>
+      </p:ext>
+    </p:extLst>
+  </p:cSld>
+  <p:clrMapOvr>
+    <a:masterClrMapping/>
+  </p:clrMapOvr>
+</p:sld>
+</file>
+
+<file path=ppt/slides/slide20.xml><?xml version="1.0" encoding="utf-8"?>
 <p:sld xmlns:a="http://schemas.openxmlformats.org/drawingml/2006/main" xmlns:r="http://schemas.openxmlformats.org/officeDocument/2006/relationships" xmlns:p="http://schemas.openxmlformats.org/presentationml/2006/main">
   <p:cSld>
     <p:spTree>
@@ -9880,8 +11738,8 @@
           </a:p>
         </p:txBody>
       </p:sp>
-      <mc:AlternateContent xmlns:mc="http://schemas.openxmlformats.org/markup-compatibility/2006">
-        <mc:Choice xmlns:a14="http://schemas.microsoft.com/office/drawing/2010/main" Requires="a14">
+      <mc:AlternateContent xmlns:mc="http://schemas.openxmlformats.org/markup-compatibility/2006" xmlns:a14="http://schemas.microsoft.com/office/drawing/2010/main">
+        <mc:Choice Requires="a14">
           <p:sp>
             <p:nvSpPr>
               <p:cNvPr id="4" name="TextBox 3">
@@ -10092,7 +11950,7 @@
             </p:txBody>
           </p:sp>
         </mc:Choice>
-        <mc:Fallback>
+        <mc:Fallback xmlns="">
           <p:sp>
             <p:nvSpPr>
               <p:cNvPr id="4" name="TextBox 3">
@@ -10144,8 +12002,8 @@
           </p:sp>
         </mc:Fallback>
       </mc:AlternateContent>
-      <mc:AlternateContent xmlns:mc="http://schemas.openxmlformats.org/markup-compatibility/2006">
-        <mc:Choice xmlns:a14="http://schemas.microsoft.com/office/drawing/2010/main" Requires="a14">
+      <mc:AlternateContent xmlns:mc="http://schemas.openxmlformats.org/markup-compatibility/2006" xmlns:a14="http://schemas.microsoft.com/office/drawing/2010/main">
+        <mc:Choice Requires="a14">
           <p:sp>
             <p:nvSpPr>
               <p:cNvPr id="13" name="TextBox 12">
@@ -10364,7 +12222,7 @@
             </p:txBody>
           </p:sp>
         </mc:Choice>
-        <mc:Fallback>
+        <mc:Fallback xmlns="">
           <p:sp>
             <p:nvSpPr>
               <p:cNvPr id="13" name="TextBox 12">
@@ -10422,7 +12280,7 @@
 </p:sld>
 </file>
 
-<file path=ppt/slides/slide17.xml><?xml version="1.0" encoding="utf-8"?>
+<file path=ppt/slides/slide21.xml><?xml version="1.0" encoding="utf-8"?>
 <p:sld xmlns:a="http://schemas.openxmlformats.org/drawingml/2006/main" xmlns:r="http://schemas.openxmlformats.org/officeDocument/2006/relationships" xmlns:p="http://schemas.openxmlformats.org/presentationml/2006/main">
   <p:cSld>
     <p:spTree>
@@ -10575,7 +12433,7 @@
 </p:sld>
 </file>
 
-<file path=ppt/slides/slide18.xml><?xml version="1.0" encoding="utf-8"?>
+<file path=ppt/slides/slide22.xml><?xml version="1.0" encoding="utf-8"?>
 <p:sld xmlns:a="http://schemas.openxmlformats.org/drawingml/2006/main" xmlns:r="http://schemas.openxmlformats.org/officeDocument/2006/relationships" xmlns:p="http://schemas.openxmlformats.org/presentationml/2006/main">
   <p:cSld>
     <p:spTree>
@@ -10606,7 +12464,7 @@
         </p:nvSpPr>
         <p:spPr>
           <a:xfrm>
-            <a:off x="346409" y="217048"/>
+            <a:off x="754555" y="826617"/>
             <a:ext cx="3090398" cy="646331"/>
           </a:xfrm>
           <a:prstGeom prst="rect">
@@ -10759,8 +12617,8 @@
           </a:effectLst>
         </p:spPr>
       </p:pic>
-      <mc:AlternateContent xmlns:mc="http://schemas.openxmlformats.org/markup-compatibility/2006">
-        <mc:Choice xmlns:a14="http://schemas.microsoft.com/office/drawing/2010/main" Requires="a14">
+      <mc:AlternateContent xmlns:mc="http://schemas.openxmlformats.org/markup-compatibility/2006" xmlns:a14="http://schemas.microsoft.com/office/drawing/2010/main">
+        <mc:Choice Requires="a14">
           <p:sp>
             <p:nvSpPr>
               <p:cNvPr id="2" name="TextBox 1">
@@ -10971,7 +12829,7 @@
             </p:txBody>
           </p:sp>
         </mc:Choice>
-        <mc:Fallback>
+        <mc:Fallback xmlns="">
           <p:sp>
             <p:nvSpPr>
               <p:cNvPr id="2" name="TextBox 1">
@@ -11036,7 +12894,209 @@
 </p:sld>
 </file>
 
-<file path=ppt/slides/slide19.xml><?xml version="1.0" encoding="utf-8"?>
+<file path=ppt/slides/slide23.xml><?xml version="1.0" encoding="utf-8"?>
+<p:sld xmlns:a="http://schemas.openxmlformats.org/drawingml/2006/main" xmlns:r="http://schemas.openxmlformats.org/officeDocument/2006/relationships" xmlns:p="http://schemas.openxmlformats.org/presentationml/2006/main">
+  <p:cSld>
+    <p:spTree>
+      <p:nvGrpSpPr>
+        <p:cNvPr id="1" name="Shape 130"/>
+        <p:cNvGrpSpPr/>
+        <p:nvPr/>
+      </p:nvGrpSpPr>
+      <p:grpSpPr>
+        <a:xfrm>
+          <a:off x="0" y="0"/>
+          <a:ext cx="0" cy="0"/>
+          <a:chOff x="0" y="0"/>
+          <a:chExt cx="0" cy="0"/>
+        </a:xfrm>
+      </p:grpSpPr>
+      <p:sp>
+        <p:nvSpPr>
+          <p:cNvPr id="2" name="Title 1">
+            <a:extLst>
+              <a:ext uri="{FF2B5EF4-FFF2-40B4-BE49-F238E27FC236}">
+                <a16:creationId xmlns:a16="http://schemas.microsoft.com/office/drawing/2014/main" id="{B58EF0E1-E575-9B33-7827-93804ED619C7}"/>
+              </a:ext>
+            </a:extLst>
+          </p:cNvPr>
+          <p:cNvSpPr>
+            <a:spLocks noGrp="1"/>
+          </p:cNvSpPr>
+          <p:nvPr>
+            <p:ph type="title"/>
+          </p:nvPr>
+        </p:nvSpPr>
+        <p:spPr/>
+        <p:txBody>
+          <a:bodyPr/>
+          <a:lstStyle/>
+          <a:p>
+            <a:r>
+              <a:rPr lang="en-US" dirty="0"/>
+              <a:t>Two sample </a:t>
+            </a:r>
+            <a:br>
+              <a:rPr lang="en-US" dirty="0"/>
+            </a:br>
+            <a:r>
+              <a:rPr lang="en-US" dirty="0"/>
+              <a:t>t-tests</a:t>
+            </a:r>
+          </a:p>
+        </p:txBody>
+      </p:sp>
+      <p:sp>
+        <p:nvSpPr>
+          <p:cNvPr id="10" name="Text Placeholder 9">
+            <a:extLst>
+              <a:ext uri="{FF2B5EF4-FFF2-40B4-BE49-F238E27FC236}">
+                <a16:creationId xmlns:a16="http://schemas.microsoft.com/office/drawing/2014/main" id="{3BBD66B5-5DFA-8BC1-2F81-37499215C86F}"/>
+              </a:ext>
+            </a:extLst>
+          </p:cNvPr>
+          <p:cNvSpPr>
+            <a:spLocks noGrp="1"/>
+          </p:cNvSpPr>
+          <p:nvPr>
+            <p:ph type="body" sz="half" idx="2"/>
+          </p:nvPr>
+        </p:nvSpPr>
+        <p:spPr/>
+        <p:txBody>
+          <a:bodyPr>
+            <a:normAutofit/>
+          </a:bodyPr>
+          <a:lstStyle/>
+          <a:p>
+            <a:r>
+              <a:rPr lang="en-US" sz="2000" dirty="0"/>
+              <a:t>Standard error depends on </a:t>
+            </a:r>
+            <a:r>
+              <a:rPr lang="en-US" sz="2000" b="1" i="1" dirty="0"/>
+              <a:t>variance </a:t>
+            </a:r>
+            <a:r>
+              <a:rPr lang="en-US" sz="2000" dirty="0"/>
+              <a:t>in the sample.</a:t>
+            </a:r>
+          </a:p>
+          <a:p>
+            <a:r>
+              <a:rPr lang="en-US" sz="2000" dirty="0"/>
+              <a:t>With two samples: are the variances </a:t>
+            </a:r>
+            <a:r>
+              <a:rPr lang="en-US" sz="2000" b="1" i="1" dirty="0"/>
+              <a:t>equal or unequal</a:t>
+            </a:r>
+            <a:r>
+              <a:rPr lang="en-US" sz="2000" dirty="0"/>
+              <a:t>?</a:t>
+            </a:r>
+          </a:p>
+          <a:p>
+            <a:endParaRPr lang="en-US" sz="1800" dirty="0"/>
+          </a:p>
+        </p:txBody>
+      </p:sp>
+      <p:pic>
+        <p:nvPicPr>
+          <p:cNvPr id="3074" name="Picture 2">
+            <a:extLst>
+              <a:ext uri="{FF2B5EF4-FFF2-40B4-BE49-F238E27FC236}">
+                <a16:creationId xmlns:a16="http://schemas.microsoft.com/office/drawing/2014/main" id="{683CDDBE-A7E2-EDF2-2791-562A52ABDD31}"/>
+              </a:ext>
+            </a:extLst>
+          </p:cNvPr>
+          <p:cNvPicPr>
+            <a:picLocks noChangeAspect="1" noChangeArrowheads="1"/>
+          </p:cNvPicPr>
+          <p:nvPr/>
+        </p:nvPicPr>
+        <p:blipFill>
+          <a:blip r:embed="rId3">
+            <a:extLst>
+              <a:ext uri="{28A0092B-C50C-407E-A947-70E740481C1C}">
+                <a14:useLocalDpi xmlns:a14="http://schemas.microsoft.com/office/drawing/2010/main" val="0"/>
+              </a:ext>
+            </a:extLst>
+          </a:blip>
+          <a:srcRect/>
+          <a:stretch>
+            <a:fillRect/>
+          </a:stretch>
+        </p:blipFill>
+        <p:spPr bwMode="auto">
+          <a:xfrm>
+            <a:off x="4190161" y="1186423"/>
+            <a:ext cx="7934419" cy="4497200"/>
+          </a:xfrm>
+          <a:prstGeom prst="rect">
+            <a:avLst/>
+          </a:prstGeom>
+          <a:noFill/>
+          <a:extLst>
+            <a:ext uri="{909E8E84-426E-40DD-AFC4-6F175D3DCCD1}">
+              <a14:hiddenFill xmlns:a14="http://schemas.microsoft.com/office/drawing/2010/main">
+                <a:solidFill>
+                  <a:srgbClr val="FFFFFF"/>
+                </a:solidFill>
+              </a14:hiddenFill>
+            </a:ext>
+          </a:extLst>
+        </p:spPr>
+      </p:pic>
+      <p:sp>
+        <p:nvSpPr>
+          <p:cNvPr id="12" name="TextBox 11">
+            <a:extLst>
+              <a:ext uri="{FF2B5EF4-FFF2-40B4-BE49-F238E27FC236}">
+                <a16:creationId xmlns:a16="http://schemas.microsoft.com/office/drawing/2014/main" id="{22376578-2D54-E237-F5AA-66DFF16C3B56}"/>
+              </a:ext>
+            </a:extLst>
+          </p:cNvPr>
+          <p:cNvSpPr txBox="1"/>
+          <p:nvPr/>
+        </p:nvSpPr>
+        <p:spPr>
+          <a:xfrm>
+            <a:off x="8425800" y="5764305"/>
+            <a:ext cx="3506224" cy="276999"/>
+          </a:xfrm>
+          <a:prstGeom prst="rect">
+            <a:avLst/>
+          </a:prstGeom>
+          <a:noFill/>
+        </p:spPr>
+        <p:txBody>
+          <a:bodyPr wrap="square">
+            <a:spAutoFit/>
+          </a:bodyPr>
+          <a:lstStyle/>
+          <a:p>
+            <a:r>
+              <a:rPr lang="en-US" sz="1200" i="1" dirty="0"/>
+              <a:t>https://www.qualitygurus.com/two-sample-t-test/</a:t>
+            </a:r>
+          </a:p>
+        </p:txBody>
+      </p:sp>
+    </p:spTree>
+    <p:extLst>
+      <p:ext uri="{BB962C8B-B14F-4D97-AF65-F5344CB8AC3E}">
+        <p14:creationId xmlns:p14="http://schemas.microsoft.com/office/powerpoint/2010/main" val="1813528"/>
+      </p:ext>
+    </p:extLst>
+  </p:cSld>
+  <p:clrMapOvr>
+    <a:masterClrMapping/>
+  </p:clrMapOvr>
+</p:sld>
+</file>
+
+<file path=ppt/slides/slide24.xml><?xml version="1.0" encoding="utf-8"?>
 <p:sld xmlns:a="http://schemas.openxmlformats.org/drawingml/2006/main" xmlns:r="http://schemas.openxmlformats.org/officeDocument/2006/relationships" xmlns:p="http://schemas.openxmlformats.org/presentationml/2006/main">
   <p:cSld>
     <p:spTree>
@@ -11349,7 +13409,7 @@
             </p:nvSpPr>
             <p:spPr>
               <a:xfrm>
-                <a:off x="6437088" y="4416010"/>
+                <a:off x="6509900" y="4213871"/>
                 <a:ext cx="4540025" cy="1937390"/>
               </a:xfrm>
               <a:prstGeom prst="rect">
@@ -11515,7 +13575,7 @@
             </p:nvSpPr>
             <p:spPr>
               <a:xfrm>
-                <a:off x="6437088" y="4416010"/>
+                <a:off x="6509900" y="4213871"/>
                 <a:ext cx="4540025" cy="1937390"/>
               </a:xfrm>
               <a:prstGeom prst="rect">
@@ -11558,7 +13618,7 @@
         <p:spPr>
           <a:xfrm>
             <a:off x="1142075" y="3595751"/>
-            <a:ext cx="3947261" cy="461665"/>
+            <a:ext cx="4478796" cy="461665"/>
           </a:xfrm>
           <a:prstGeom prst="rect">
             <a:avLst/>
@@ -11592,8 +13652,8 @@
         </p:nvSpPr>
         <p:spPr>
           <a:xfrm>
-            <a:off x="7659209" y="3783240"/>
-            <a:ext cx="2941889" cy="461665"/>
+            <a:off x="7435091" y="3595751"/>
+            <a:ext cx="3947261" cy="461665"/>
           </a:xfrm>
           <a:prstGeom prst="rect">
             <a:avLst/>
@@ -11616,7 +13676,7 @@
     </p:spTree>
     <p:extLst>
       <p:ext uri="{BB962C8B-B14F-4D97-AF65-F5344CB8AC3E}">
-        <p14:creationId xmlns:p14="http://schemas.microsoft.com/office/powerpoint/2010/main" val="1813528"/>
+        <p14:creationId xmlns:p14="http://schemas.microsoft.com/office/powerpoint/2010/main" val="183164780"/>
       </p:ext>
     </p:extLst>
   </p:cSld>
@@ -11626,202 +13686,7 @@
 </p:sld>
 </file>
 
-<file path=ppt/slides/slide2.xml><?xml version="1.0" encoding="utf-8"?>
-<p:sld xmlns:a="http://schemas.openxmlformats.org/drawingml/2006/main" xmlns:r="http://schemas.openxmlformats.org/officeDocument/2006/relationships" xmlns:p="http://schemas.openxmlformats.org/presentationml/2006/main">
-  <p:cSld>
-    <p:spTree>
-      <p:nvGrpSpPr>
-        <p:cNvPr id="1" name="Shape 100"/>
-        <p:cNvGrpSpPr/>
-        <p:nvPr/>
-      </p:nvGrpSpPr>
-      <p:grpSpPr>
-        <a:xfrm>
-          <a:off x="0" y="0"/>
-          <a:ext cx="0" cy="0"/>
-          <a:chOff x="0" y="0"/>
-          <a:chExt cx="0" cy="0"/>
-        </a:xfrm>
-      </p:grpSpPr>
-      <p:sp>
-        <p:nvSpPr>
-          <p:cNvPr id="101" name="Shape 101"/>
-          <p:cNvSpPr txBox="1"/>
-          <p:nvPr/>
-        </p:nvSpPr>
-        <p:spPr>
-          <a:xfrm>
-            <a:off x="1122112" y="528087"/>
-            <a:ext cx="5717600" cy="584700"/>
-          </a:xfrm>
-          <a:prstGeom prst="rect">
-            <a:avLst/>
-          </a:prstGeom>
-          <a:noFill/>
-          <a:ln>
-            <a:noFill/>
-          </a:ln>
-        </p:spPr>
-        <p:txBody>
-          <a:bodyPr lIns="91425" tIns="45700" rIns="91425" bIns="45700" anchor="t" anchorCtr="0">
-            <a:noAutofit/>
-          </a:bodyPr>
-          <a:lstStyle/>
-          <a:p>
-            <a:pPr>
-              <a:buSzPct val="25000"/>
-            </a:pPr>
-            <a:r>
-              <a:rPr lang="en-US" sz="3200" b="1" dirty="0">
-                <a:latin typeface="+mj-lt"/>
-                <a:ea typeface="Gill Sans MT"/>
-                <a:cs typeface="Gill Sans MT"/>
-                <a:sym typeface="Gill Sans MT"/>
-              </a:rPr>
-              <a:t>Ingredients of classical hypothesis testing</a:t>
-            </a:r>
-          </a:p>
-        </p:txBody>
-      </p:sp>
-      <p:pic>
-        <p:nvPicPr>
-          <p:cNvPr id="3" name="Picture 2" descr="A picture containing text&#10;&#10;Description automatically generated">
-            <a:extLst>
-              <a:ext uri="{FF2B5EF4-FFF2-40B4-BE49-F238E27FC236}">
-                <a16:creationId xmlns:a16="http://schemas.microsoft.com/office/drawing/2014/main" id="{3DC1E106-D16E-FD3D-A494-FB188A31F746}"/>
-              </a:ext>
-            </a:extLst>
-          </p:cNvPr>
-          <p:cNvPicPr>
-            <a:picLocks noChangeAspect="1"/>
-          </p:cNvPicPr>
-          <p:nvPr/>
-        </p:nvPicPr>
-        <p:blipFill>
-          <a:blip r:embed="rId3">
-            <a:extLst>
-              <a:ext uri="{28A0092B-C50C-407E-A947-70E740481C1C}">
-                <a14:useLocalDpi xmlns:a14="http://schemas.microsoft.com/office/drawing/2010/main" val="0"/>
-              </a:ext>
-            </a:extLst>
-          </a:blip>
-          <a:stretch>
-            <a:fillRect/>
-          </a:stretch>
-        </p:blipFill>
-        <p:spPr>
-          <a:xfrm>
-            <a:off x="6598972" y="0"/>
-            <a:ext cx="5302577" cy="6858000"/>
-          </a:xfrm>
-          <a:prstGeom prst="rect">
-            <a:avLst/>
-          </a:prstGeom>
-        </p:spPr>
-      </p:pic>
-      <p:sp>
-        <p:nvSpPr>
-          <p:cNvPr id="4" name="TextBox 3">
-            <a:extLst>
-              <a:ext uri="{FF2B5EF4-FFF2-40B4-BE49-F238E27FC236}">
-                <a16:creationId xmlns:a16="http://schemas.microsoft.com/office/drawing/2014/main" id="{F7F85CEB-23D6-D157-E282-359D3612BCCB}"/>
-              </a:ext>
-            </a:extLst>
-          </p:cNvPr>
-          <p:cNvSpPr txBox="1"/>
-          <p:nvPr/>
-        </p:nvSpPr>
-        <p:spPr>
-          <a:xfrm>
-            <a:off x="1122112" y="1837266"/>
-            <a:ext cx="5302577" cy="3416320"/>
-          </a:xfrm>
-          <a:prstGeom prst="rect">
-            <a:avLst/>
-          </a:prstGeom>
-          <a:noFill/>
-        </p:spPr>
-        <p:txBody>
-          <a:bodyPr wrap="square">
-            <a:spAutoFit/>
-          </a:bodyPr>
-          <a:lstStyle/>
-          <a:p>
-            <a:pPr marL="494100" indent="-457200">
-              <a:buFont typeface="+mj-lt"/>
-              <a:buAutoNum type="arabicPeriod"/>
-            </a:pPr>
-            <a:r>
-              <a:rPr lang="en-US" sz="2400" dirty="0"/>
-              <a:t>State the null and alternate hypothesis</a:t>
-            </a:r>
-          </a:p>
-          <a:p>
-            <a:pPr marL="494100" indent="-457200">
-              <a:buFont typeface="+mj-lt"/>
-              <a:buAutoNum type="arabicPeriod"/>
-            </a:pPr>
-            <a:r>
-              <a:rPr lang="en-US" sz="2400" dirty="0"/>
-              <a:t>Select the appropriate test</a:t>
-            </a:r>
-          </a:p>
-          <a:p>
-            <a:pPr marL="494100" indent="-457200">
-              <a:buFont typeface="+mj-lt"/>
-              <a:buAutoNum type="arabicPeriod"/>
-            </a:pPr>
-            <a:r>
-              <a:rPr lang="en-US" sz="2400" dirty="0"/>
-              <a:t>Select the level of significance</a:t>
-            </a:r>
-          </a:p>
-          <a:p>
-            <a:pPr marL="494100" indent="-457200">
-              <a:buFont typeface="+mj-lt"/>
-              <a:buAutoNum type="arabicPeriod"/>
-            </a:pPr>
-            <a:r>
-              <a:rPr lang="en-US" sz="2400" dirty="0"/>
-              <a:t>Delineate regions of rejection and non-rejection of the null hypothesis</a:t>
-            </a:r>
-          </a:p>
-          <a:p>
-            <a:pPr marL="494100" indent="-457200">
-              <a:buFont typeface="+mj-lt"/>
-              <a:buAutoNum type="arabicPeriod"/>
-            </a:pPr>
-            <a:r>
-              <a:rPr lang="en-US" sz="2400" dirty="0"/>
-              <a:t>Calculate the t-statistic</a:t>
-            </a:r>
-          </a:p>
-          <a:p>
-            <a:pPr marL="494100" indent="-457200">
-              <a:buFont typeface="+mj-lt"/>
-              <a:buAutoNum type="arabicPeriod"/>
-            </a:pPr>
-            <a:r>
-              <a:rPr lang="en-US" sz="2400" dirty="0"/>
-              <a:t>Make a decision</a:t>
-            </a:r>
-          </a:p>
-        </p:txBody>
-      </p:sp>
-    </p:spTree>
-    <p:extLst>
-      <p:ext uri="{BB962C8B-B14F-4D97-AF65-F5344CB8AC3E}">
-        <p14:creationId xmlns:p14="http://schemas.microsoft.com/office/powerpoint/2010/main" val="1512174370"/>
-      </p:ext>
-    </p:extLst>
-  </p:cSld>
-  <p:clrMapOvr>
-    <a:masterClrMapping/>
-  </p:clrMapOvr>
-</p:sld>
-</file>
-
-<file path=ppt/slides/slide20.xml><?xml version="1.0" encoding="utf-8"?>
+<file path=ppt/slides/slide25.xml><?xml version="1.0" encoding="utf-8"?>
 <p:sld xmlns:a="http://schemas.openxmlformats.org/drawingml/2006/main" xmlns:r="http://schemas.openxmlformats.org/officeDocument/2006/relationships" xmlns:p="http://schemas.openxmlformats.org/presentationml/2006/main">
   <p:cSld>
     <p:spTree>
@@ -12014,7 +13879,7 @@
 </p:sld>
 </file>
 
-<file path=ppt/slides/slide21.xml><?xml version="1.0" encoding="utf-8"?>
+<file path=ppt/slides/slide26.xml><?xml version="1.0" encoding="utf-8"?>
 <p:sld xmlns:a="http://schemas.openxmlformats.org/drawingml/2006/main" xmlns:r="http://schemas.openxmlformats.org/officeDocument/2006/relationships" xmlns:p="http://schemas.openxmlformats.org/presentationml/2006/main">
   <p:cSld>
     <p:spTree>
@@ -12179,7 +14044,7 @@
 </p:sld>
 </file>
 
-<file path=ppt/slides/slide22.xml><?xml version="1.0" encoding="utf-8"?>
+<file path=ppt/slides/slide27.xml><?xml version="1.0" encoding="utf-8"?>
 <p:sld xmlns:a="http://schemas.openxmlformats.org/drawingml/2006/main" xmlns:r="http://schemas.openxmlformats.org/officeDocument/2006/relationships" xmlns:p="http://schemas.openxmlformats.org/presentationml/2006/main">
   <p:cSld>
     <p:spTree>
@@ -13237,13 +15102,7 @@
   <p:cSld>
     <p:spTree>
       <p:nvGrpSpPr>
-        <p:cNvPr id="1" name="">
-          <a:extLst>
-            <a:ext uri="{FF2B5EF4-FFF2-40B4-BE49-F238E27FC236}">
-              <a16:creationId xmlns:a16="http://schemas.microsoft.com/office/drawing/2014/main" id="{D033A504-F633-0EEC-99D2-3F96255680A1}"/>
-            </a:ext>
-          </a:extLst>
-        </p:cNvPr>
+        <p:cNvPr id="1" name="Shape 130"/>
         <p:cNvGrpSpPr/>
         <p:nvPr/>
       </p:nvGrpSpPr>
@@ -13257,95 +15116,399 @@
       </p:grpSpPr>
       <p:sp>
         <p:nvSpPr>
-          <p:cNvPr id="2" name="Title 1">
+          <p:cNvPr id="132" name="Shape 132"/>
+          <p:cNvSpPr txBox="1"/>
+          <p:nvPr/>
+        </p:nvSpPr>
+        <p:spPr>
+          <a:xfrm>
+            <a:off x="1298448" y="869114"/>
+            <a:ext cx="5901571" cy="854295"/>
+          </a:xfrm>
+          <a:prstGeom prst="rect">
+            <a:avLst/>
+          </a:prstGeom>
+          <a:noFill/>
+          <a:ln>
+            <a:noFill/>
+          </a:ln>
+        </p:spPr>
+        <p:txBody>
+          <a:bodyPr lIns="91425" tIns="45700" rIns="91425" bIns="45700" anchor="t" anchorCtr="0">
+            <a:noAutofit/>
+          </a:bodyPr>
+          <a:lstStyle/>
+          <a:p>
+            <a:r>
+              <a:rPr lang="en-US" sz="4000" b="1" dirty="0"/>
+              <a:t>How do t-tests work?</a:t>
+            </a:r>
+          </a:p>
+        </p:txBody>
+      </p:sp>
+      <mc:AlternateContent xmlns:mc="http://schemas.openxmlformats.org/markup-compatibility/2006">
+        <mc:Choice xmlns:a14="http://schemas.microsoft.com/office/drawing/2010/main" Requires="a14">
+          <p:sp>
+            <p:nvSpPr>
+              <p:cNvPr id="2" name="TextBox 1">
+                <a:extLst>
+                  <a:ext uri="{FF2B5EF4-FFF2-40B4-BE49-F238E27FC236}">
+                    <a16:creationId xmlns:a16="http://schemas.microsoft.com/office/drawing/2014/main" id="{FC0FAB4F-F160-10F4-95F3-57BBD4594BAA}"/>
+                  </a:ext>
+                </a:extLst>
+              </p:cNvPr>
+              <p:cNvSpPr txBox="1"/>
+              <p:nvPr/>
+            </p:nvSpPr>
+            <p:spPr>
+              <a:xfrm>
+                <a:off x="7848566" y="2010247"/>
+                <a:ext cx="3299365" cy="2069477"/>
+              </a:xfrm>
+              <a:prstGeom prst="rect">
+                <a:avLst/>
+              </a:prstGeom>
+              <a:solidFill>
+                <a:schemeClr val="accent2">
+                  <a:lumMod val="75000"/>
+                </a:schemeClr>
+              </a:solidFill>
+              <a:effectLst>
+                <a:outerShdw blurRad="50800" dist="38100" dir="2700000" algn="tl" rotWithShape="0">
+                  <a:prstClr val="black">
+                    <a:alpha val="40000"/>
+                  </a:prstClr>
+                </a:outerShdw>
+              </a:effectLst>
+            </p:spPr>
+            <p:txBody>
+              <a:bodyPr wrap="none" lIns="0" tIns="0" rIns="0" bIns="0" rtlCol="0">
+                <a:spAutoFit/>
+              </a:bodyPr>
+              <a:lstStyle/>
+              <a:p>
+                <a:pPr/>
+                <a14:m>
+                  <m:oMathPara xmlns:m="http://schemas.openxmlformats.org/officeDocument/2006/math">
+                    <m:oMathParaPr>
+                      <m:jc m:val="centerGroup"/>
+                    </m:oMathParaPr>
+                    <m:oMath xmlns:m="http://schemas.openxmlformats.org/officeDocument/2006/math">
+                      <m:r>
+                        <a:rPr lang="en-US" sz="5400" b="0" i="1" smtClean="0">
+                          <a:solidFill>
+                            <a:schemeClr val="bg1">
+                              <a:lumMod val="95000"/>
+                            </a:schemeClr>
+                          </a:solidFill>
+                          <a:latin typeface="Cambria Math" panose="02040503050406030204" pitchFamily="18" charset="0"/>
+                        </a:rPr>
+                        <m:t>𝑡</m:t>
+                      </m:r>
+                      <m:r>
+                        <a:rPr lang="en-US" sz="5400" b="0" i="1" smtClean="0">
+                          <a:solidFill>
+                            <a:schemeClr val="bg1">
+                              <a:lumMod val="95000"/>
+                            </a:schemeClr>
+                          </a:solidFill>
+                          <a:latin typeface="Cambria Math" panose="02040503050406030204" pitchFamily="18" charset="0"/>
+                        </a:rPr>
+                        <m:t>=</m:t>
+                      </m:r>
+                      <m:f>
+                        <m:fPr>
+                          <m:ctrlPr>
+                            <a:rPr lang="en-US" sz="5400" b="0" i="1" smtClean="0">
+                              <a:solidFill>
+                                <a:schemeClr val="bg1">
+                                  <a:lumMod val="95000"/>
+                                </a:schemeClr>
+                              </a:solidFill>
+                              <a:latin typeface="Cambria Math" panose="02040503050406030204" pitchFamily="18" charset="0"/>
+                            </a:rPr>
+                          </m:ctrlPr>
+                        </m:fPr>
+                        <m:num>
+                          <m:acc>
+                            <m:accPr>
+                              <m:chr m:val="̅"/>
+                              <m:ctrlPr>
+                                <a:rPr lang="en-US" sz="5400" b="0" i="1" smtClean="0">
+                                  <a:solidFill>
+                                    <a:schemeClr val="bg1">
+                                      <a:lumMod val="95000"/>
+                                    </a:schemeClr>
+                                  </a:solidFill>
+                                  <a:latin typeface="Cambria Math" panose="02040503050406030204" pitchFamily="18" charset="0"/>
+                                </a:rPr>
+                              </m:ctrlPr>
+                            </m:accPr>
+                            <m:e>
+                              <m:r>
+                                <a:rPr lang="en-US" sz="5400" b="0" i="1" smtClean="0">
+                                  <a:solidFill>
+                                    <a:schemeClr val="bg1">
+                                      <a:lumMod val="95000"/>
+                                    </a:schemeClr>
+                                  </a:solidFill>
+                                  <a:latin typeface="Cambria Math" panose="02040503050406030204" pitchFamily="18" charset="0"/>
+                                </a:rPr>
+                                <m:t>𝑥</m:t>
+                              </m:r>
+                            </m:e>
+                          </m:acc>
+                          <m:r>
+                            <a:rPr lang="en-US" sz="5400" b="0" i="1" smtClean="0">
+                              <a:solidFill>
+                                <a:schemeClr val="bg1">
+                                  <a:lumMod val="95000"/>
+                                </a:schemeClr>
+                              </a:solidFill>
+                              <a:latin typeface="Cambria Math" panose="02040503050406030204" pitchFamily="18" charset="0"/>
+                            </a:rPr>
+                            <m:t> − </m:t>
+                          </m:r>
+                          <m:r>
+                            <a:rPr lang="en-US" sz="5400" b="0" i="1" smtClean="0">
+                              <a:solidFill>
+                                <a:schemeClr val="bg1">
+                                  <a:lumMod val="95000"/>
+                                </a:schemeClr>
+                              </a:solidFill>
+                              <a:latin typeface="Cambria Math" panose="02040503050406030204" pitchFamily="18" charset="0"/>
+                              <a:ea typeface="Cambria Math" panose="02040503050406030204" pitchFamily="18" charset="0"/>
+                            </a:rPr>
+                            <m:t>𝜇</m:t>
+                          </m:r>
+                        </m:num>
+                        <m:den>
+                          <m:f>
+                            <m:fPr>
+                              <m:type m:val="skw"/>
+                              <m:ctrlPr>
+                                <a:rPr lang="en-US" sz="5400" b="0" i="1" smtClean="0">
+                                  <a:solidFill>
+                                    <a:schemeClr val="bg1">
+                                      <a:lumMod val="95000"/>
+                                    </a:schemeClr>
+                                  </a:solidFill>
+                                  <a:latin typeface="Cambria Math" panose="02040503050406030204" pitchFamily="18" charset="0"/>
+                                </a:rPr>
+                              </m:ctrlPr>
+                            </m:fPr>
+                            <m:num>
+                              <m:r>
+                                <a:rPr lang="en-US" sz="5400" b="0" i="1" smtClean="0">
+                                  <a:solidFill>
+                                    <a:schemeClr val="bg1">
+                                      <a:lumMod val="95000"/>
+                                    </a:schemeClr>
+                                  </a:solidFill>
+                                  <a:latin typeface="Cambria Math" panose="02040503050406030204" pitchFamily="18" charset="0"/>
+                                </a:rPr>
+                                <m:t>𝑠</m:t>
+                              </m:r>
+                            </m:num>
+                            <m:den>
+                              <m:rad>
+                                <m:radPr>
+                                  <m:degHide m:val="on"/>
+                                  <m:ctrlPr>
+                                    <a:rPr lang="en-US" sz="5400" b="0" i="1" smtClean="0">
+                                      <a:solidFill>
+                                        <a:schemeClr val="bg1">
+                                          <a:lumMod val="95000"/>
+                                        </a:schemeClr>
+                                      </a:solidFill>
+                                      <a:latin typeface="Cambria Math" panose="02040503050406030204" pitchFamily="18" charset="0"/>
+                                    </a:rPr>
+                                  </m:ctrlPr>
+                                </m:radPr>
+                                <m:deg/>
+                                <m:e>
+                                  <m:r>
+                                    <a:rPr lang="en-US" sz="5400" b="0" i="1" smtClean="0">
+                                      <a:solidFill>
+                                        <a:schemeClr val="bg1">
+                                          <a:lumMod val="95000"/>
+                                        </a:schemeClr>
+                                      </a:solidFill>
+                                      <a:latin typeface="Cambria Math" panose="02040503050406030204" pitchFamily="18" charset="0"/>
+                                    </a:rPr>
+                                    <m:t>𝑛</m:t>
+                                  </m:r>
+                                </m:e>
+                              </m:rad>
+                            </m:den>
+                          </m:f>
+                        </m:den>
+                      </m:f>
+                    </m:oMath>
+                  </m:oMathPara>
+                </a14:m>
+                <a:endParaRPr lang="en-US" sz="5400" dirty="0">
+                  <a:solidFill>
+                    <a:schemeClr val="bg1">
+                      <a:lumMod val="95000"/>
+                    </a:schemeClr>
+                  </a:solidFill>
+                </a:endParaRPr>
+              </a:p>
+            </p:txBody>
+          </p:sp>
+        </mc:Choice>
+        <mc:Fallback>
+          <p:sp>
+            <p:nvSpPr>
+              <p:cNvPr id="2" name="TextBox 1">
+                <a:extLst>
+                  <a:ext uri="{FF2B5EF4-FFF2-40B4-BE49-F238E27FC236}">
+                    <a16:creationId xmlns:a16="http://schemas.microsoft.com/office/drawing/2014/main" id="{FC0FAB4F-F160-10F4-95F3-57BBD4594BAA}"/>
+                  </a:ext>
+                </a:extLst>
+              </p:cNvPr>
+              <p:cNvSpPr txBox="1">
+                <a:spLocks noRot="1" noChangeAspect="1" noMove="1" noResize="1" noEditPoints="1" noAdjustHandles="1" noChangeArrowheads="1" noChangeShapeType="1" noTextEdit="1"/>
+              </p:cNvSpPr>
+              <p:nvPr/>
+            </p:nvSpPr>
+            <p:spPr>
+              <a:xfrm>
+                <a:off x="7848566" y="2010247"/>
+                <a:ext cx="3299365" cy="2069477"/>
+              </a:xfrm>
+              <a:prstGeom prst="rect">
+                <a:avLst/>
+              </a:prstGeom>
+              <a:blipFill>
+                <a:blip r:embed="rId3"/>
+                <a:stretch>
+                  <a:fillRect/>
+                </a:stretch>
+              </a:blipFill>
+              <a:effectLst>
+                <a:outerShdw blurRad="50800" dist="38100" dir="2700000" algn="tl" rotWithShape="0">
+                  <a:prstClr val="black">
+                    <a:alpha val="40000"/>
+                  </a:prstClr>
+                </a:outerShdw>
+              </a:effectLst>
+            </p:spPr>
+            <p:txBody>
+              <a:bodyPr/>
+              <a:lstStyle/>
+              <a:p>
+                <a:r>
+                  <a:rPr lang="en-US">
+                    <a:noFill/>
+                  </a:rPr>
+                  <a:t> </a:t>
+                </a:r>
+              </a:p>
+            </p:txBody>
+          </p:sp>
+        </mc:Fallback>
+      </mc:AlternateContent>
+      <p:sp>
+        <p:nvSpPr>
+          <p:cNvPr id="5" name="TextBox 4">
             <a:extLst>
               <a:ext uri="{FF2B5EF4-FFF2-40B4-BE49-F238E27FC236}">
-                <a16:creationId xmlns:a16="http://schemas.microsoft.com/office/drawing/2014/main" id="{639BAC83-330D-113E-4C64-9277E3B4A7D4}"/>
+                <a16:creationId xmlns:a16="http://schemas.microsoft.com/office/drawing/2014/main" id="{5A3E362A-6CD7-4ECE-857C-4306E324D4A7}"/>
               </a:ext>
             </a:extLst>
           </p:cNvPr>
-          <p:cNvSpPr>
-            <a:spLocks noGrp="1"/>
-          </p:cNvSpPr>
-          <p:nvPr>
-            <p:ph type="title"/>
-          </p:nvPr>
-        </p:nvSpPr>
-        <p:spPr/>
-        <p:txBody>
-          <a:bodyPr/>
+          <p:cNvSpPr txBox="1"/>
+          <p:nvPr/>
+        </p:nvSpPr>
+        <p:spPr>
+          <a:xfrm>
+            <a:off x="1392649" y="2137044"/>
+            <a:ext cx="5901571" cy="1815882"/>
+          </a:xfrm>
+          <a:prstGeom prst="rect">
+            <a:avLst/>
+          </a:prstGeom>
+          <a:noFill/>
+          <a:ln>
+            <a:noFill/>
+          </a:ln>
+        </p:spPr>
+        <p:txBody>
+          <a:bodyPr wrap="square">
+            <a:spAutoFit/>
+          </a:bodyPr>
           <a:lstStyle/>
           <a:p>
             <a:r>
-              <a:rPr lang="en-US" dirty="0"/>
-              <a:t>Steps in hypothesis testing</a:t>
-            </a:r>
-          </a:p>
-        </p:txBody>
-      </p:sp>
-      <p:sp>
-        <p:nvSpPr>
-          <p:cNvPr id="3" name="Content Placeholder 2">
+              <a:rPr lang="en-US" sz="2800" b="1" i="1" dirty="0"/>
+              <a:t>One sample test: </a:t>
+            </a:r>
+          </a:p>
+          <a:p>
+            <a:r>
+              <a:rPr lang="en-US" sz="2800" dirty="0"/>
+              <a:t>How many standard errors is the sample mean from the population mean?</a:t>
+            </a:r>
+          </a:p>
+        </p:txBody>
+      </p:sp>
+      <p:sp>
+        <p:nvSpPr>
+          <p:cNvPr id="7" name="TextBox 6">
             <a:extLst>
               <a:ext uri="{FF2B5EF4-FFF2-40B4-BE49-F238E27FC236}">
-                <a16:creationId xmlns:a16="http://schemas.microsoft.com/office/drawing/2014/main" id="{4DEE7EC3-37C4-B133-CC88-8105E859475E}"/>
+                <a16:creationId xmlns:a16="http://schemas.microsoft.com/office/drawing/2014/main" id="{035924A6-53F3-954B-6988-4B6C9BC05D06}"/>
               </a:ext>
             </a:extLst>
           </p:cNvPr>
-          <p:cNvSpPr>
-            <a:spLocks noGrp="1"/>
-          </p:cNvSpPr>
-          <p:nvPr>
-            <p:ph idx="1"/>
-          </p:nvPr>
-        </p:nvSpPr>
-        <p:spPr/>
-        <p:txBody>
-          <a:bodyPr/>
+          <p:cNvSpPr txBox="1"/>
+          <p:nvPr/>
+        </p:nvSpPr>
+        <p:spPr>
+          <a:xfrm>
+            <a:off x="1479176" y="4680981"/>
+            <a:ext cx="7754470" cy="1200329"/>
+          </a:xfrm>
+          <a:prstGeom prst="rect">
+            <a:avLst/>
+          </a:prstGeom>
+          <a:noFill/>
+        </p:spPr>
+        <p:txBody>
+          <a:bodyPr wrap="square">
+            <a:spAutoFit/>
+          </a:bodyPr>
           <a:lstStyle/>
           <a:p>
-            <a:pPr marL="494100" indent="-457200">
-              <a:buFont typeface="+mj-lt"/>
-              <a:buAutoNum type="arabicPeriod"/>
-            </a:pPr>
-            <a:r>
-              <a:rPr lang="en-US" dirty="0"/>
-              <a:t>State the null and alternate hypothesis</a:t>
-            </a:r>
-          </a:p>
-          <a:p>
-            <a:pPr marL="494100" indent="-457200">
-              <a:buFont typeface="+mj-lt"/>
-              <a:buAutoNum type="arabicPeriod"/>
-            </a:pPr>
-            <a:r>
-              <a:rPr lang="en-US" dirty="0"/>
-              <a:t>Select the appropriate test</a:t>
-            </a:r>
-          </a:p>
-          <a:p>
-            <a:pPr marL="494100" indent="-457200">
-              <a:buFont typeface="+mj-lt"/>
-              <a:buAutoNum type="arabicPeriod"/>
-            </a:pPr>
-            <a:r>
-              <a:rPr lang="en-US" dirty="0"/>
-              <a:t>Select the level of significance</a:t>
-            </a:r>
-          </a:p>
-          <a:p>
-            <a:pPr marL="494100" indent="-457200">
-              <a:buFont typeface="+mj-lt"/>
-              <a:buAutoNum type="arabicPeriod"/>
-            </a:pPr>
-            <a:endParaRPr lang="en-US" dirty="0"/>
+            <a:r>
+              <a:rPr lang="en-US" sz="2400" i="1" dirty="0"/>
+              <a:t>Review: What percentage of sample means are within </a:t>
+            </a:r>
+            <a:r>
+              <a:rPr lang="en-US" sz="2400" b="1" i="1" u="sng" dirty="0"/>
+              <a:t>one</a:t>
+            </a:r>
+            <a:r>
+              <a:rPr lang="en-US" sz="2400" i="1" dirty="0"/>
+              <a:t> standard error of the population mean for a large sample? What percentage are within </a:t>
+            </a:r>
+            <a:r>
+              <a:rPr lang="en-US" sz="2400" b="1" i="1" u="sng" dirty="0"/>
+              <a:t>two</a:t>
+            </a:r>
+            <a:r>
+              <a:rPr lang="en-US" sz="2400" i="1" dirty="0"/>
+              <a:t>?</a:t>
+            </a:r>
           </a:p>
         </p:txBody>
       </p:sp>
     </p:spTree>
     <p:extLst>
       <p:ext uri="{BB962C8B-B14F-4D97-AF65-F5344CB8AC3E}">
-        <p14:creationId xmlns:p14="http://schemas.microsoft.com/office/powerpoint/2010/main" val="3595243208"/>
+        <p14:creationId xmlns:p14="http://schemas.microsoft.com/office/powerpoint/2010/main" val="2890252997"/>
       </p:ext>
     </p:extLst>
   </p:cSld>
@@ -13380,8 +15543,8 @@
         </p:nvSpPr>
         <p:spPr>
           <a:xfrm>
-            <a:off x="1101109" y="854421"/>
-            <a:ext cx="6567738" cy="937803"/>
+            <a:off x="1298448" y="976690"/>
+            <a:ext cx="9781928" cy="854295"/>
           </a:xfrm>
           <a:prstGeom prst="rect">
             <a:avLst/>
@@ -13397,85 +15560,173 @@
           </a:bodyPr>
           <a:lstStyle/>
           <a:p>
-            <a:pPr>
-              <a:spcBef>
-                <a:spcPts val="560"/>
-              </a:spcBef>
-              <a:buClr>
-                <a:srgbClr val="FFFF66"/>
-              </a:buClr>
-              <a:buSzPct val="25000"/>
+            <a:r>
+              <a:rPr lang="en-US" sz="3600" b="1" dirty="0"/>
+              <a:t>T-distributions are for small samples</a:t>
+            </a:r>
+          </a:p>
+        </p:txBody>
+      </p:sp>
+      <p:pic>
+        <p:nvPicPr>
+          <p:cNvPr id="2050" name="Picture 2" descr="T Distribution Detailed Table , Z TABLE - SGEIZ">
+            <a:extLst>
+              <a:ext uri="{FF2B5EF4-FFF2-40B4-BE49-F238E27FC236}">
+                <a16:creationId xmlns:a16="http://schemas.microsoft.com/office/drawing/2014/main" id="{F14B5492-9C30-D4D9-7B39-E94C638257CB}"/>
+              </a:ext>
+            </a:extLst>
+          </p:cNvPr>
+          <p:cNvPicPr>
+            <a:picLocks noChangeAspect="1" noChangeArrowheads="1"/>
+          </p:cNvPicPr>
+          <p:nvPr/>
+        </p:nvPicPr>
+        <p:blipFill>
+          <a:blip r:embed="rId3">
+            <a:extLst>
+              <a:ext uri="{28A0092B-C50C-407E-A947-70E740481C1C}">
+                <a14:useLocalDpi xmlns:a14="http://schemas.microsoft.com/office/drawing/2010/main" val="0"/>
+              </a:ext>
+            </a:extLst>
+          </a:blip>
+          <a:srcRect/>
+          <a:stretch>
+            <a:fillRect/>
+          </a:stretch>
+        </p:blipFill>
+        <p:spPr bwMode="auto">
+          <a:xfrm>
+            <a:off x="5336966" y="2034987"/>
+            <a:ext cx="5830536" cy="4060451"/>
+          </a:xfrm>
+          <a:prstGeom prst="rect">
+            <a:avLst/>
+          </a:prstGeom>
+          <a:noFill/>
+          <a:extLst>
+            <a:ext uri="{909E8E84-426E-40DD-AFC4-6F175D3DCCD1}">
+              <a14:hiddenFill xmlns:a14="http://schemas.microsoft.com/office/drawing/2010/main">
+                <a:solidFill>
+                  <a:srgbClr val="FFFFFF"/>
+                </a:solidFill>
+              </a14:hiddenFill>
+            </a:ext>
+          </a:extLst>
+        </p:spPr>
+      </p:pic>
+      <p:sp>
+        <p:nvSpPr>
+          <p:cNvPr id="4" name="TextBox 3">
+            <a:extLst>
+              <a:ext uri="{FF2B5EF4-FFF2-40B4-BE49-F238E27FC236}">
+                <a16:creationId xmlns:a16="http://schemas.microsoft.com/office/drawing/2014/main" id="{CBD69C08-FDB1-E6D5-E062-743D18946680}"/>
+              </a:ext>
+            </a:extLst>
+          </p:cNvPr>
+          <p:cNvSpPr txBox="1"/>
+          <p:nvPr/>
+        </p:nvSpPr>
+        <p:spPr>
+          <a:xfrm>
+            <a:off x="1212757" y="2106704"/>
+            <a:ext cx="3836894" cy="2308324"/>
+          </a:xfrm>
+          <a:prstGeom prst="rect">
+            <a:avLst/>
+          </a:prstGeom>
+          <a:noFill/>
+        </p:spPr>
+        <p:txBody>
+          <a:bodyPr wrap="square">
+            <a:spAutoFit/>
+          </a:bodyPr>
+          <a:lstStyle/>
+          <a:p>
+            <a:r>
+              <a:rPr lang="en-US" sz="2400" b="1" dirty="0"/>
+              <a:t>Degrees of freedom (</a:t>
+            </a:r>
+            <a:r>
+              <a:rPr lang="en-US" sz="2400" b="1" dirty="0" err="1"/>
+              <a:t>df</a:t>
+            </a:r>
+            <a:r>
+              <a:rPr lang="en-US" sz="2400" b="1" dirty="0"/>
+              <a:t>):</a:t>
+            </a:r>
+            <a:r>
+              <a:rPr lang="en-US" sz="2400" b="1" i="1" dirty="0"/>
+              <a:t> </a:t>
+            </a:r>
+          </a:p>
+          <a:p>
+            <a:pPr marL="342900" lvl="0" indent="-342900">
+              <a:buSzPct val="100000"/>
+              <a:buFont typeface="Arial" panose="020B0604020202020204" pitchFamily="34" charset="0"/>
+              <a:buChar char="•"/>
             </a:pPr>
             <a:r>
-              <a:rPr lang="en-US" sz="4000" b="1" dirty="0">
+              <a:rPr lang="en-US" sz="2400" dirty="0">
                 <a:ea typeface="Gill Sans MT"/>
                 <a:cs typeface="Gill Sans MT"/>
                 <a:sym typeface="Gill Sans MT"/>
               </a:rPr>
-              <a:t>Select level of significance</a:t>
-            </a:r>
-            <a:endParaRPr lang="en-US" sz="4000" b="1" dirty="0">
-              <a:effectLst/>
-              <a:ea typeface="Gill Sans MT"/>
-              <a:cs typeface="Gill Sans MT"/>
+              <a:t>Sample size (n) – 1</a:t>
+            </a:r>
+            <a:endParaRPr lang="en-US" sz="2400" dirty="0">
               <a:sym typeface="Gill Sans MT"/>
             </a:endParaRPr>
           </a:p>
-        </p:txBody>
-      </p:sp>
-      <p:pic>
-        <p:nvPicPr>
-          <p:cNvPr id="4" name="Shape 153" descr="http://www.biochemia-medica.com/sites/default/files/Marusteri_M._Statistical_test_selection_when_comparing_groups_Fig._3.jpg">
+          <a:p>
+            <a:pPr marL="342900" lvl="0" indent="-342900">
+              <a:buSzPct val="100000"/>
+              <a:buFont typeface="Arial" panose="020B0604020202020204" pitchFamily="34" charset="0"/>
+              <a:buChar char="•"/>
+            </a:pPr>
+            <a:r>
+              <a:rPr lang="en-US" sz="2400" dirty="0">
+                <a:sym typeface="Gill Sans MT"/>
+              </a:rPr>
+              <a:t>Small sample sizes = “fatter” tails</a:t>
+            </a:r>
+          </a:p>
+          <a:p>
+            <a:pPr marL="342900" lvl="0" indent="-342900">
+              <a:buSzPct val="100000"/>
+              <a:buFont typeface="Arial" panose="020B0604020202020204" pitchFamily="34" charset="0"/>
+              <a:buChar char="•"/>
+            </a:pPr>
+            <a:r>
+              <a:rPr lang="en-US" sz="2400" dirty="0">
+                <a:sym typeface="Gill Sans MT"/>
+              </a:rPr>
+              <a:t>Main differences are for n&lt;30</a:t>
+            </a:r>
+            <a:endParaRPr lang="en-US" sz="2400" dirty="0"/>
+          </a:p>
+        </p:txBody>
+      </p:sp>
+      <p:sp>
+        <p:nvSpPr>
+          <p:cNvPr id="8" name="TextBox 7">
             <a:extLst>
               <a:ext uri="{FF2B5EF4-FFF2-40B4-BE49-F238E27FC236}">
-                <a16:creationId xmlns:a16="http://schemas.microsoft.com/office/drawing/2014/main" id="{F77A2C1E-7756-44BD-9939-354C5123333D}"/>
+                <a16:creationId xmlns:a16="http://schemas.microsoft.com/office/drawing/2014/main" id="{8049A9BE-CEC2-90C6-2A68-318F48370583}"/>
               </a:ext>
             </a:extLst>
           </p:cNvPr>
-          <p:cNvPicPr preferRelativeResize="0"/>
+          <p:cNvSpPr txBox="1"/>
           <p:nvPr/>
-        </p:nvPicPr>
-        <p:blipFill rotWithShape="1">
-          <a:blip r:embed="rId3">
-            <a:alphaModFix/>
-          </a:blip>
-          <a:srcRect/>
-          <a:stretch/>
-        </p:blipFill>
-        <p:spPr>
-          <a:xfrm>
-            <a:off x="6309360" y="2122185"/>
-            <a:ext cx="5302740" cy="3653571"/>
+        </p:nvSpPr>
+        <p:spPr>
+          <a:xfrm>
+            <a:off x="6938682" y="5750505"/>
+            <a:ext cx="3989294" cy="261610"/>
           </a:xfrm>
           <a:prstGeom prst="rect">
             <a:avLst/>
           </a:prstGeom>
           <a:noFill/>
-          <a:ln>
-            <a:noFill/>
-          </a:ln>
-        </p:spPr>
-      </p:pic>
-      <p:sp>
-        <p:nvSpPr>
-          <p:cNvPr id="5" name="Rectangle 4">
-            <a:extLst>
-              <a:ext uri="{FF2B5EF4-FFF2-40B4-BE49-F238E27FC236}">
-                <a16:creationId xmlns:a16="http://schemas.microsoft.com/office/drawing/2014/main" id="{4C7441C5-4496-43B4-8C0B-7E4EF33586AA}"/>
-              </a:ext>
-            </a:extLst>
-          </p:cNvPr>
-          <p:cNvSpPr/>
-          <p:nvPr/>
-        </p:nvSpPr>
-        <p:spPr>
-          <a:xfrm>
-            <a:off x="1212746" y="2122185"/>
-            <a:ext cx="4426261" cy="3108543"/>
-          </a:xfrm>
-          <a:prstGeom prst="rect">
-            <a:avLst/>
-          </a:prstGeom>
         </p:spPr>
         <p:txBody>
           <a:bodyPr wrap="square">
@@ -13484,17 +15735,8 @@
           <a:lstStyle/>
           <a:p>
             <a:r>
-              <a:rPr lang="en-US" sz="2800" dirty="0"/>
-              <a:t>P &lt; 0.05:</a:t>
-            </a:r>
-          </a:p>
-          <a:p>
-            <a:endParaRPr lang="en-US" sz="2800" dirty="0"/>
-          </a:p>
-          <a:p>
-            <a:r>
-              <a:rPr lang="en-US" sz="2800" dirty="0"/>
-              <a:t>The probability that this sample comes from a population in which the two means are equal is less than 5%</a:t>
+              <a:rPr lang="en-US" sz="1100" i="1" dirty="0"/>
+              <a:t>https://private.smaat.de/t-distribution-detailed-table-z-table/</a:t>
             </a:r>
           </a:p>
         </p:txBody>
@@ -13502,7 +15744,7 @@
     </p:spTree>
     <p:extLst>
       <p:ext uri="{BB962C8B-B14F-4D97-AF65-F5344CB8AC3E}">
-        <p14:creationId xmlns:p14="http://schemas.microsoft.com/office/powerpoint/2010/main" val="789215728"/>
+        <p14:creationId xmlns:p14="http://schemas.microsoft.com/office/powerpoint/2010/main" val="921666443"/>
       </p:ext>
     </p:extLst>
   </p:cSld>

--- a/in_class_slides/geog4300_L13 Hypotheses and one sample tests and normality.pptx
+++ b/in_class_slides/geog4300_L13 Hypotheses and one sample tests and normality.pptx
@@ -5,36 +5,37 @@
     <p:sldMasterId id="2147483732" r:id="rId1"/>
   </p:sldMasterIdLst>
   <p:notesMasterIdLst>
-    <p:notesMasterId r:id="rId29"/>
+    <p:notesMasterId r:id="rId30"/>
   </p:notesMasterIdLst>
   <p:sldIdLst>
     <p:sldId id="256" r:id="rId2"/>
     <p:sldId id="295" r:id="rId3"/>
     <p:sldId id="318" r:id="rId4"/>
-    <p:sldId id="306" r:id="rId5"/>
-    <p:sldId id="319" r:id="rId6"/>
-    <p:sldId id="297" r:id="rId7"/>
-    <p:sldId id="269" r:id="rId8"/>
-    <p:sldId id="331" r:id="rId9"/>
-    <p:sldId id="333" r:id="rId10"/>
-    <p:sldId id="332" r:id="rId11"/>
-    <p:sldId id="330" r:id="rId12"/>
-    <p:sldId id="320" r:id="rId13"/>
-    <p:sldId id="298" r:id="rId14"/>
-    <p:sldId id="321" r:id="rId15"/>
-    <p:sldId id="299" r:id="rId16"/>
-    <p:sldId id="304" r:id="rId17"/>
-    <p:sldId id="296" r:id="rId18"/>
-    <p:sldId id="322" r:id="rId19"/>
-    <p:sldId id="329" r:id="rId20"/>
-    <p:sldId id="317" r:id="rId21"/>
-    <p:sldId id="323" r:id="rId22"/>
-    <p:sldId id="307" r:id="rId23"/>
-    <p:sldId id="308" r:id="rId24"/>
-    <p:sldId id="334" r:id="rId25"/>
-    <p:sldId id="324" r:id="rId26"/>
-    <p:sldId id="326" r:id="rId27"/>
-    <p:sldId id="262" r:id="rId28"/>
+    <p:sldId id="335" r:id="rId5"/>
+    <p:sldId id="306" r:id="rId6"/>
+    <p:sldId id="319" r:id="rId7"/>
+    <p:sldId id="297" r:id="rId8"/>
+    <p:sldId id="269" r:id="rId9"/>
+    <p:sldId id="331" r:id="rId10"/>
+    <p:sldId id="333" r:id="rId11"/>
+    <p:sldId id="332" r:id="rId12"/>
+    <p:sldId id="330" r:id="rId13"/>
+    <p:sldId id="320" r:id="rId14"/>
+    <p:sldId id="298" r:id="rId15"/>
+    <p:sldId id="321" r:id="rId16"/>
+    <p:sldId id="299" r:id="rId17"/>
+    <p:sldId id="304" r:id="rId18"/>
+    <p:sldId id="296" r:id="rId19"/>
+    <p:sldId id="322" r:id="rId20"/>
+    <p:sldId id="329" r:id="rId21"/>
+    <p:sldId id="317" r:id="rId22"/>
+    <p:sldId id="323" r:id="rId23"/>
+    <p:sldId id="307" r:id="rId24"/>
+    <p:sldId id="308" r:id="rId25"/>
+    <p:sldId id="334" r:id="rId26"/>
+    <p:sldId id="324" r:id="rId27"/>
+    <p:sldId id="326" r:id="rId28"/>
+    <p:sldId id="262" r:id="rId29"/>
   </p:sldIdLst>
   <p:sldSz cx="12192000" cy="6858000"/>
   <p:notesSz cx="6858000" cy="9144000"/>
@@ -1397,7 +1398,7 @@
                 <a:cs typeface="Calibri"/>
                 <a:sym typeface="Calibri"/>
               </a:rPr>
-              <a:t>15</a:t>
+              <a:t>16</a:t>
             </a:fld>
             <a:endParaRPr lang="en-US" sz="1200">
               <a:solidFill>
@@ -1586,7 +1587,7 @@
                 <a:cs typeface="Calibri"/>
                 <a:sym typeface="Calibri"/>
               </a:rPr>
-              <a:t>16</a:t>
+              <a:t>17</a:t>
             </a:fld>
             <a:endParaRPr lang="en-US" sz="1200">
               <a:solidFill>
@@ -1778,7 +1779,7 @@
                 <a:cs typeface="Calibri"/>
                 <a:sym typeface="Calibri"/>
               </a:rPr>
-              <a:t>17</a:t>
+              <a:t>18</a:t>
             </a:fld>
             <a:endParaRPr lang="en-US" sz="1200">
               <a:solidFill>
@@ -1967,7 +1968,7 @@
                 <a:cs typeface="Calibri"/>
                 <a:sym typeface="Calibri"/>
               </a:rPr>
-              <a:t>19</a:t>
+              <a:t>20</a:t>
             </a:fld>
             <a:endParaRPr lang="en-US" sz="1200">
               <a:solidFill>
@@ -2156,7 +2157,7 @@
                 <a:cs typeface="Calibri"/>
                 <a:sym typeface="Calibri"/>
               </a:rPr>
-              <a:t>20</a:t>
+              <a:t>21</a:t>
             </a:fld>
             <a:endParaRPr lang="en-US" sz="1200">
               <a:solidFill>
@@ -2345,7 +2346,7 @@
                 <a:cs typeface="Calibri"/>
                 <a:sym typeface="Calibri"/>
               </a:rPr>
-              <a:t>22</a:t>
+              <a:t>23</a:t>
             </a:fld>
             <a:endParaRPr lang="en-US" sz="1200">
               <a:solidFill>
@@ -2534,7 +2535,7 @@
                 <a:cs typeface="Calibri"/>
                 <a:sym typeface="Calibri"/>
               </a:rPr>
-              <a:t>23</a:t>
+              <a:t>24</a:t>
             </a:fld>
             <a:endParaRPr lang="en-US" sz="1200">
               <a:solidFill>
@@ -2723,7 +2724,7 @@
                 <a:cs typeface="Calibri"/>
                 <a:sym typeface="Calibri"/>
               </a:rPr>
-              <a:t>24</a:t>
+              <a:t>25</a:t>
             </a:fld>
             <a:endParaRPr lang="en-US" sz="1200">
               <a:solidFill>
@@ -2915,7 +2916,7 @@
                 <a:cs typeface="Calibri"/>
                 <a:sym typeface="Calibri"/>
               </a:rPr>
-              <a:t>25</a:t>
+              <a:t>26</a:t>
             </a:fld>
             <a:endParaRPr lang="en-US" sz="1200">
               <a:solidFill>
@@ -3107,7 +3108,7 @@
                 <a:cs typeface="Calibri"/>
                 <a:sym typeface="Calibri"/>
               </a:rPr>
-              <a:t>26</a:t>
+              <a:t>27</a:t>
             </a:fld>
             <a:endParaRPr lang="en-US" sz="1200">
               <a:solidFill>
@@ -3299,7 +3300,7 @@
                 <a:cs typeface="Calibri"/>
                 <a:sym typeface="Calibri"/>
               </a:rPr>
-              <a:t>4</a:t>
+              <a:t>5</a:t>
             </a:fld>
             <a:endParaRPr lang="en-US" sz="1200">
               <a:solidFill>
@@ -3488,7 +3489,7 @@
                 <a:cs typeface="Calibri"/>
                 <a:sym typeface="Calibri"/>
               </a:rPr>
-              <a:t>27</a:t>
+              <a:t>28</a:t>
             </a:fld>
             <a:endParaRPr lang="en-US" sz="1200">
               <a:solidFill>
@@ -3672,7 +3673,7 @@
                 <a:cs typeface="Calibri"/>
                 <a:sym typeface="Calibri"/>
               </a:rPr>
-              <a:t>6</a:t>
+              <a:t>7</a:t>
             </a:fld>
             <a:endParaRPr lang="en-US" sz="1200">
               <a:solidFill>
@@ -3861,7 +3862,7 @@
                 <a:cs typeface="Calibri"/>
                 <a:sym typeface="Calibri"/>
               </a:rPr>
-              <a:t>7</a:t>
+              <a:t>8</a:t>
             </a:fld>
             <a:endParaRPr lang="en-US" sz="1200">
               <a:solidFill>
@@ -4045,7 +4046,7 @@
                 <a:cs typeface="Calibri"/>
                 <a:sym typeface="Calibri"/>
               </a:rPr>
-              <a:t>8</a:t>
+              <a:t>9</a:t>
             </a:fld>
             <a:endParaRPr lang="en-US" sz="1200">
               <a:solidFill>
@@ -4234,7 +4235,7 @@
                 <a:cs typeface="Calibri"/>
                 <a:sym typeface="Calibri"/>
               </a:rPr>
-              <a:t>9</a:t>
+              <a:t>10</a:t>
             </a:fld>
             <a:endParaRPr lang="en-US" sz="1200">
               <a:solidFill>
@@ -4423,7 +4424,7 @@
                 <a:cs typeface="Calibri"/>
                 <a:sym typeface="Calibri"/>
               </a:rPr>
-              <a:t>10</a:t>
+              <a:t>11</a:t>
             </a:fld>
             <a:endParaRPr lang="en-US" sz="1200">
               <a:solidFill>
@@ -4612,7 +4613,7 @@
                 <a:cs typeface="Calibri"/>
                 <a:sym typeface="Calibri"/>
               </a:rPr>
-              <a:t>11</a:t>
+              <a:t>12</a:t>
             </a:fld>
             <a:endParaRPr lang="en-US" sz="1200">
               <a:solidFill>
@@ -4801,7 +4802,7 @@
                 <a:cs typeface="Calibri"/>
                 <a:sym typeface="Calibri"/>
               </a:rPr>
-              <a:t>13</a:t>
+              <a:t>14</a:t>
             </a:fld>
             <a:endParaRPr lang="en-US" sz="1200">
               <a:solidFill>
@@ -8955,6 +8956,242 @@
           <a:chExt cx="0" cy="0"/>
         </a:xfrm>
       </p:grpSpPr>
+      <p:sp>
+        <p:nvSpPr>
+          <p:cNvPr id="132" name="Shape 132"/>
+          <p:cNvSpPr txBox="1"/>
+          <p:nvPr/>
+        </p:nvSpPr>
+        <p:spPr>
+          <a:xfrm>
+            <a:off x="1298448" y="976690"/>
+            <a:ext cx="9781928" cy="854295"/>
+          </a:xfrm>
+          <a:prstGeom prst="rect">
+            <a:avLst/>
+          </a:prstGeom>
+          <a:noFill/>
+          <a:ln>
+            <a:noFill/>
+          </a:ln>
+        </p:spPr>
+        <p:txBody>
+          <a:bodyPr lIns="91425" tIns="45700" rIns="91425" bIns="45700" anchor="t" anchorCtr="0">
+            <a:noAutofit/>
+          </a:bodyPr>
+          <a:lstStyle/>
+          <a:p>
+            <a:r>
+              <a:rPr lang="en-US" sz="3600" b="1" dirty="0"/>
+              <a:t>T-distributions are for small samples</a:t>
+            </a:r>
+          </a:p>
+        </p:txBody>
+      </p:sp>
+      <p:pic>
+        <p:nvPicPr>
+          <p:cNvPr id="2050" name="Picture 2" descr="T Distribution Detailed Table , Z TABLE - SGEIZ">
+            <a:extLst>
+              <a:ext uri="{FF2B5EF4-FFF2-40B4-BE49-F238E27FC236}">
+                <a16:creationId xmlns:a16="http://schemas.microsoft.com/office/drawing/2014/main" id="{F14B5492-9C30-D4D9-7B39-E94C638257CB}"/>
+              </a:ext>
+            </a:extLst>
+          </p:cNvPr>
+          <p:cNvPicPr>
+            <a:picLocks noChangeAspect="1" noChangeArrowheads="1"/>
+          </p:cNvPicPr>
+          <p:nvPr/>
+        </p:nvPicPr>
+        <p:blipFill>
+          <a:blip r:embed="rId3">
+            <a:extLst>
+              <a:ext uri="{28A0092B-C50C-407E-A947-70E740481C1C}">
+                <a14:useLocalDpi xmlns:a14="http://schemas.microsoft.com/office/drawing/2010/main" val="0"/>
+              </a:ext>
+            </a:extLst>
+          </a:blip>
+          <a:srcRect/>
+          <a:stretch>
+            <a:fillRect/>
+          </a:stretch>
+        </p:blipFill>
+        <p:spPr bwMode="auto">
+          <a:xfrm>
+            <a:off x="5336966" y="2034987"/>
+            <a:ext cx="5830536" cy="4060451"/>
+          </a:xfrm>
+          <a:prstGeom prst="rect">
+            <a:avLst/>
+          </a:prstGeom>
+          <a:noFill/>
+          <a:extLst>
+            <a:ext uri="{909E8E84-426E-40DD-AFC4-6F175D3DCCD1}">
+              <a14:hiddenFill xmlns:a14="http://schemas.microsoft.com/office/drawing/2010/main">
+                <a:solidFill>
+                  <a:srgbClr val="FFFFFF"/>
+                </a:solidFill>
+              </a14:hiddenFill>
+            </a:ext>
+          </a:extLst>
+        </p:spPr>
+      </p:pic>
+      <p:sp>
+        <p:nvSpPr>
+          <p:cNvPr id="4" name="TextBox 3">
+            <a:extLst>
+              <a:ext uri="{FF2B5EF4-FFF2-40B4-BE49-F238E27FC236}">
+                <a16:creationId xmlns:a16="http://schemas.microsoft.com/office/drawing/2014/main" id="{CBD69C08-FDB1-E6D5-E062-743D18946680}"/>
+              </a:ext>
+            </a:extLst>
+          </p:cNvPr>
+          <p:cNvSpPr txBox="1"/>
+          <p:nvPr/>
+        </p:nvSpPr>
+        <p:spPr>
+          <a:xfrm>
+            <a:off x="1212757" y="2106704"/>
+            <a:ext cx="3836894" cy="2308324"/>
+          </a:xfrm>
+          <a:prstGeom prst="rect">
+            <a:avLst/>
+          </a:prstGeom>
+          <a:noFill/>
+        </p:spPr>
+        <p:txBody>
+          <a:bodyPr wrap="square">
+            <a:spAutoFit/>
+          </a:bodyPr>
+          <a:lstStyle/>
+          <a:p>
+            <a:r>
+              <a:rPr lang="en-US" sz="2400" b="1" dirty="0"/>
+              <a:t>Degrees of freedom (</a:t>
+            </a:r>
+            <a:r>
+              <a:rPr lang="en-US" sz="2400" b="1" dirty="0" err="1"/>
+              <a:t>df</a:t>
+            </a:r>
+            <a:r>
+              <a:rPr lang="en-US" sz="2400" b="1" dirty="0"/>
+              <a:t>):</a:t>
+            </a:r>
+            <a:r>
+              <a:rPr lang="en-US" sz="2400" b="1" i="1" dirty="0"/>
+              <a:t> </a:t>
+            </a:r>
+          </a:p>
+          <a:p>
+            <a:pPr marL="342900" lvl="0" indent="-342900">
+              <a:buSzPct val="100000"/>
+              <a:buFont typeface="Arial" panose="020B0604020202020204" pitchFamily="34" charset="0"/>
+              <a:buChar char="•"/>
+            </a:pPr>
+            <a:r>
+              <a:rPr lang="en-US" sz="2400" dirty="0">
+                <a:ea typeface="Gill Sans MT"/>
+                <a:cs typeface="Gill Sans MT"/>
+                <a:sym typeface="Gill Sans MT"/>
+              </a:rPr>
+              <a:t>Sample size (n) – 1</a:t>
+            </a:r>
+            <a:endParaRPr lang="en-US" sz="2400" dirty="0">
+              <a:sym typeface="Gill Sans MT"/>
+            </a:endParaRPr>
+          </a:p>
+          <a:p>
+            <a:pPr marL="342900" lvl="0" indent="-342900">
+              <a:buSzPct val="100000"/>
+              <a:buFont typeface="Arial" panose="020B0604020202020204" pitchFamily="34" charset="0"/>
+              <a:buChar char="•"/>
+            </a:pPr>
+            <a:r>
+              <a:rPr lang="en-US" sz="2400" dirty="0">
+                <a:sym typeface="Gill Sans MT"/>
+              </a:rPr>
+              <a:t>Small sample sizes = “fatter” tails</a:t>
+            </a:r>
+          </a:p>
+          <a:p>
+            <a:pPr marL="342900" lvl="0" indent="-342900">
+              <a:buSzPct val="100000"/>
+              <a:buFont typeface="Arial" panose="020B0604020202020204" pitchFamily="34" charset="0"/>
+              <a:buChar char="•"/>
+            </a:pPr>
+            <a:r>
+              <a:rPr lang="en-US" sz="2400" dirty="0">
+                <a:sym typeface="Gill Sans MT"/>
+              </a:rPr>
+              <a:t>Main differences are for n&lt;30</a:t>
+            </a:r>
+            <a:endParaRPr lang="en-US" sz="2400" dirty="0"/>
+          </a:p>
+        </p:txBody>
+      </p:sp>
+      <p:sp>
+        <p:nvSpPr>
+          <p:cNvPr id="8" name="TextBox 7">
+            <a:extLst>
+              <a:ext uri="{FF2B5EF4-FFF2-40B4-BE49-F238E27FC236}">
+                <a16:creationId xmlns:a16="http://schemas.microsoft.com/office/drawing/2014/main" id="{8049A9BE-CEC2-90C6-2A68-318F48370583}"/>
+              </a:ext>
+            </a:extLst>
+          </p:cNvPr>
+          <p:cNvSpPr txBox="1"/>
+          <p:nvPr/>
+        </p:nvSpPr>
+        <p:spPr>
+          <a:xfrm>
+            <a:off x="6938682" y="5750505"/>
+            <a:ext cx="3989294" cy="261610"/>
+          </a:xfrm>
+          <a:prstGeom prst="rect">
+            <a:avLst/>
+          </a:prstGeom>
+          <a:noFill/>
+        </p:spPr>
+        <p:txBody>
+          <a:bodyPr wrap="square">
+            <a:spAutoFit/>
+          </a:bodyPr>
+          <a:lstStyle/>
+          <a:p>
+            <a:r>
+              <a:rPr lang="en-US" sz="1100" i="1" dirty="0"/>
+              <a:t>https://private.smaat.de/t-distribution-detailed-table-z-table/</a:t>
+            </a:r>
+          </a:p>
+        </p:txBody>
+      </p:sp>
+    </p:spTree>
+    <p:extLst>
+      <p:ext uri="{BB962C8B-B14F-4D97-AF65-F5344CB8AC3E}">
+        <p14:creationId xmlns:p14="http://schemas.microsoft.com/office/powerpoint/2010/main" val="921666443"/>
+      </p:ext>
+    </p:extLst>
+  </p:cSld>
+  <p:clrMapOvr>
+    <a:masterClrMapping/>
+  </p:clrMapOvr>
+</p:sld>
+</file>
+
+<file path=ppt/slides/slide11.xml><?xml version="1.0" encoding="utf-8"?>
+<p:sld xmlns:a="http://schemas.openxmlformats.org/drawingml/2006/main" xmlns:r="http://schemas.openxmlformats.org/officeDocument/2006/relationships" xmlns:p="http://schemas.openxmlformats.org/presentationml/2006/main">
+  <p:cSld>
+    <p:spTree>
+      <p:nvGrpSpPr>
+        <p:cNvPr id="1" name="Shape 130"/>
+        <p:cNvGrpSpPr/>
+        <p:nvPr/>
+      </p:nvGrpSpPr>
+      <p:grpSpPr>
+        <a:xfrm>
+          <a:off x="0" y="0"/>
+          <a:ext cx="0" cy="0"/>
+          <a:chOff x="0" y="0"/>
+          <a:chExt cx="0" cy="0"/>
+        </a:xfrm>
+      </p:grpSpPr>
       <p:pic>
         <p:nvPicPr>
           <p:cNvPr id="3" name="Online Media 2" title="Why We Might Not Have Statistics Without Guinness Brewery – A History of the t-Test (10-0)">
@@ -9189,7 +9426,7 @@
 </p:sld>
 </file>
 
-<file path=ppt/slides/slide11.xml><?xml version="1.0" encoding="utf-8"?>
+<file path=ppt/slides/slide12.xml><?xml version="1.0" encoding="utf-8"?>
 <p:sld xmlns:a="http://schemas.openxmlformats.org/drawingml/2006/main" xmlns:r="http://schemas.openxmlformats.org/officeDocument/2006/relationships" xmlns:p="http://schemas.openxmlformats.org/presentationml/2006/main">
   <p:cSld>
     <p:spTree>
@@ -9371,7 +9608,7 @@
 </p:sld>
 </file>
 
-<file path=ppt/slides/slide12.xml><?xml version="1.0" encoding="utf-8"?>
+<file path=ppt/slides/slide13.xml><?xml version="1.0" encoding="utf-8"?>
 <p:sld xmlns:a="http://schemas.openxmlformats.org/drawingml/2006/main" xmlns:r="http://schemas.openxmlformats.org/officeDocument/2006/relationships" xmlns:p="http://schemas.openxmlformats.org/presentationml/2006/main">
   <p:cSld>
     <p:spTree>
@@ -9494,7 +9731,7 @@
 </p:sld>
 </file>
 
-<file path=ppt/slides/slide13.xml><?xml version="1.0" encoding="utf-8"?>
+<file path=ppt/slides/slide14.xml><?xml version="1.0" encoding="utf-8"?>
 <p:sld xmlns:a="http://schemas.openxmlformats.org/drawingml/2006/main" xmlns:r="http://schemas.openxmlformats.org/officeDocument/2006/relationships" xmlns:p="http://schemas.openxmlformats.org/presentationml/2006/main">
   <p:cSld>
     <p:spTree>
@@ -9651,7 +9888,7 @@
 </p:sld>
 </file>
 
-<file path=ppt/slides/slide14.xml><?xml version="1.0" encoding="utf-8"?>
+<file path=ppt/slides/slide15.xml><?xml version="1.0" encoding="utf-8"?>
 <p:sld xmlns:a="http://schemas.openxmlformats.org/drawingml/2006/main" xmlns:r="http://schemas.openxmlformats.org/officeDocument/2006/relationships" xmlns:p="http://schemas.openxmlformats.org/presentationml/2006/main">
   <p:cSld>
     <p:spTree>
@@ -9775,229 +10012,6 @@
     <p:extLst>
       <p:ext uri="{BB962C8B-B14F-4D97-AF65-F5344CB8AC3E}">
         <p14:creationId xmlns:p14="http://schemas.microsoft.com/office/powerpoint/2010/main" val="2547420996"/>
-      </p:ext>
-    </p:extLst>
-  </p:cSld>
-  <p:clrMapOvr>
-    <a:masterClrMapping/>
-  </p:clrMapOvr>
-</p:sld>
-</file>
-
-<file path=ppt/slides/slide15.xml><?xml version="1.0" encoding="utf-8"?>
-<p:sld xmlns:a="http://schemas.openxmlformats.org/drawingml/2006/main" xmlns:r="http://schemas.openxmlformats.org/officeDocument/2006/relationships" xmlns:p="http://schemas.openxmlformats.org/presentationml/2006/main">
-  <p:cSld>
-    <p:spTree>
-      <p:nvGrpSpPr>
-        <p:cNvPr id="1" name="Shape 130"/>
-        <p:cNvGrpSpPr/>
-        <p:nvPr/>
-      </p:nvGrpSpPr>
-      <p:grpSpPr>
-        <a:xfrm>
-          <a:off x="0" y="0"/>
-          <a:ext cx="0" cy="0"/>
-          <a:chOff x="0" y="0"/>
-          <a:chExt cx="0" cy="0"/>
-        </a:xfrm>
-      </p:grpSpPr>
-      <p:sp>
-        <p:nvSpPr>
-          <p:cNvPr id="3" name="Rectangle 2">
-            <a:extLst>
-              <a:ext uri="{FF2B5EF4-FFF2-40B4-BE49-F238E27FC236}">
-                <a16:creationId xmlns:a16="http://schemas.microsoft.com/office/drawing/2014/main" id="{606DAFA2-681F-4AFC-A065-CDB4A8A21AC1}"/>
-              </a:ext>
-            </a:extLst>
-          </p:cNvPr>
-          <p:cNvSpPr/>
-          <p:nvPr/>
-        </p:nvSpPr>
-        <p:spPr>
-          <a:xfrm>
-            <a:off x="346409" y="217048"/>
-            <a:ext cx="6498275" cy="1200329"/>
-          </a:xfrm>
-          <a:prstGeom prst="rect">
-            <a:avLst/>
-          </a:prstGeom>
-        </p:spPr>
-        <p:txBody>
-          <a:bodyPr wrap="square">
-            <a:spAutoFit/>
-          </a:bodyPr>
-          <a:lstStyle/>
-          <a:p>
-            <a:pPr>
-              <a:spcBef>
-                <a:spcPts val="560"/>
-              </a:spcBef>
-              <a:buClr>
-                <a:srgbClr val="FFFF66"/>
-              </a:buClr>
-              <a:buSzPct val="25000"/>
-            </a:pPr>
-            <a:r>
-              <a:rPr lang="en-US" sz="3600" b="1" dirty="0">
-                <a:ea typeface="Gill Sans MT"/>
-                <a:cs typeface="Gill Sans MT"/>
-                <a:sym typeface="Gill Sans MT"/>
-              </a:rPr>
-              <a:t>Delineate regions of rejection / non-rejection</a:t>
-            </a:r>
-          </a:p>
-        </p:txBody>
-      </p:sp>
-      <p:sp>
-        <p:nvSpPr>
-          <p:cNvPr id="7" name="Rectangle 6">
-            <a:extLst>
-              <a:ext uri="{FF2B5EF4-FFF2-40B4-BE49-F238E27FC236}">
-                <a16:creationId xmlns:a16="http://schemas.microsoft.com/office/drawing/2014/main" id="{723EC99C-11A5-42CE-89E8-A7932E31ABC6}"/>
-              </a:ext>
-            </a:extLst>
-          </p:cNvPr>
-          <p:cNvSpPr/>
-          <p:nvPr/>
-        </p:nvSpPr>
-        <p:spPr>
-          <a:xfrm>
-            <a:off x="449333" y="2070175"/>
-            <a:ext cx="6292426" cy="3539430"/>
-          </a:xfrm>
-          <a:prstGeom prst="rect">
-            <a:avLst/>
-          </a:prstGeom>
-        </p:spPr>
-        <p:txBody>
-          <a:bodyPr wrap="square">
-            <a:spAutoFit/>
-          </a:bodyPr>
-          <a:lstStyle/>
-          <a:p>
-            <a:endParaRPr lang="en-US" sz="2800" dirty="0"/>
-          </a:p>
-          <a:p>
-            <a:r>
-              <a:rPr lang="en-US" sz="2800" b="1" dirty="0"/>
-              <a:t>Degrees of freedom:</a:t>
-            </a:r>
-            <a:r>
-              <a:rPr lang="en-US" sz="2800" b="1" i="1" dirty="0"/>
-              <a:t> </a:t>
-            </a:r>
-          </a:p>
-          <a:p>
-            <a:pPr lvl="0">
-              <a:buSzPct val="25000"/>
-            </a:pPr>
-            <a:r>
-              <a:rPr lang="en-US" sz="2800" dirty="0">
-                <a:ea typeface="Gill Sans MT"/>
-                <a:cs typeface="Gill Sans MT"/>
-                <a:sym typeface="Gill Sans MT"/>
-              </a:rPr>
-              <a:t>One sample test: n-1 (24 in our case)</a:t>
-            </a:r>
-          </a:p>
-          <a:p>
-            <a:pPr lvl="0">
-              <a:buSzPct val="25000"/>
-            </a:pPr>
-            <a:endParaRPr lang="en-US" sz="2800" dirty="0">
-              <a:ea typeface="Gill Sans MT"/>
-              <a:cs typeface="Gill Sans MT"/>
-              <a:sym typeface="Gill Sans MT"/>
-            </a:endParaRPr>
-          </a:p>
-          <a:p>
-            <a:pPr lvl="0">
-              <a:buSzPct val="25000"/>
-            </a:pPr>
-            <a:endParaRPr lang="en-US" sz="2800" dirty="0">
-              <a:ea typeface="Gill Sans MT"/>
-              <a:cs typeface="Gill Sans MT"/>
-              <a:sym typeface="Gill Sans MT"/>
-            </a:endParaRPr>
-          </a:p>
-          <a:p>
-            <a:pPr>
-              <a:buSzPct val="25000"/>
-            </a:pPr>
-            <a:r>
-              <a:rPr lang="en-US" sz="2800" b="1" dirty="0"/>
-              <a:t>Critical value:</a:t>
-            </a:r>
-            <a:r>
-              <a:rPr lang="en-US" sz="2800" b="1" i="1" dirty="0"/>
-              <a:t> </a:t>
-            </a:r>
-          </a:p>
-          <a:p>
-            <a:pPr lvl="0">
-              <a:buSzPct val="25000"/>
-            </a:pPr>
-            <a:r>
-              <a:rPr lang="en-US" sz="2800" dirty="0">
-                <a:ea typeface="Gill Sans MT"/>
-                <a:cs typeface="Gill Sans MT"/>
-                <a:sym typeface="Gill Sans MT"/>
-              </a:rPr>
-              <a:t>Based on confidence level (alpha) and </a:t>
-            </a:r>
-            <a:r>
-              <a:rPr lang="en-US" sz="2800" dirty="0" err="1">
-                <a:ea typeface="Gill Sans MT"/>
-                <a:cs typeface="Gill Sans MT"/>
-                <a:sym typeface="Gill Sans MT"/>
-              </a:rPr>
-              <a:t>df</a:t>
-            </a:r>
-            <a:endParaRPr lang="en-US" sz="2800" dirty="0">
-              <a:ea typeface="Gill Sans MT"/>
-              <a:cs typeface="Gill Sans MT"/>
-              <a:sym typeface="Gill Sans MT"/>
-            </a:endParaRPr>
-          </a:p>
-          <a:p>
-            <a:endParaRPr lang="en-US" sz="2800" dirty="0"/>
-          </a:p>
-        </p:txBody>
-      </p:sp>
-      <p:pic>
-        <p:nvPicPr>
-          <p:cNvPr id="10" name="Picture 9">
-            <a:extLst>
-              <a:ext uri="{FF2B5EF4-FFF2-40B4-BE49-F238E27FC236}">
-                <a16:creationId xmlns:a16="http://schemas.microsoft.com/office/drawing/2014/main" id="{0476EA96-E7C3-49FE-8148-26FB35F7A6E5}"/>
-              </a:ext>
-            </a:extLst>
-          </p:cNvPr>
-          <p:cNvPicPr>
-            <a:picLocks noChangeAspect="1"/>
-          </p:cNvPicPr>
-          <p:nvPr/>
-        </p:nvPicPr>
-        <p:blipFill>
-          <a:blip r:embed="rId3"/>
-          <a:stretch>
-            <a:fillRect/>
-          </a:stretch>
-        </p:blipFill>
-        <p:spPr>
-          <a:xfrm>
-            <a:off x="7137647" y="-1"/>
-            <a:ext cx="5054353" cy="6856681"/>
-          </a:xfrm>
-          <a:prstGeom prst="rect">
-            <a:avLst/>
-          </a:prstGeom>
-        </p:spPr>
-      </p:pic>
-    </p:spTree>
-    <p:extLst>
-      <p:ext uri="{BB962C8B-B14F-4D97-AF65-F5344CB8AC3E}">
-        <p14:creationId xmlns:p14="http://schemas.microsoft.com/office/powerpoint/2010/main" val="3184897983"/>
       </p:ext>
     </p:extLst>
   </p:cSld>
@@ -10026,6 +10040,53 @@
       </p:grpSpPr>
       <p:sp>
         <p:nvSpPr>
+          <p:cNvPr id="3" name="Rectangle 2">
+            <a:extLst>
+              <a:ext uri="{FF2B5EF4-FFF2-40B4-BE49-F238E27FC236}">
+                <a16:creationId xmlns:a16="http://schemas.microsoft.com/office/drawing/2014/main" id="{606DAFA2-681F-4AFC-A065-CDB4A8A21AC1}"/>
+              </a:ext>
+            </a:extLst>
+          </p:cNvPr>
+          <p:cNvSpPr/>
+          <p:nvPr/>
+        </p:nvSpPr>
+        <p:spPr>
+          <a:xfrm>
+            <a:off x="346409" y="217048"/>
+            <a:ext cx="6498275" cy="1200329"/>
+          </a:xfrm>
+          <a:prstGeom prst="rect">
+            <a:avLst/>
+          </a:prstGeom>
+        </p:spPr>
+        <p:txBody>
+          <a:bodyPr wrap="square">
+            <a:spAutoFit/>
+          </a:bodyPr>
+          <a:lstStyle/>
+          <a:p>
+            <a:pPr>
+              <a:spcBef>
+                <a:spcPts val="560"/>
+              </a:spcBef>
+              <a:buClr>
+                <a:srgbClr val="FFFF66"/>
+              </a:buClr>
+              <a:buSzPct val="25000"/>
+            </a:pPr>
+            <a:r>
+              <a:rPr lang="en-US" sz="3600" b="1" dirty="0">
+                <a:ea typeface="Gill Sans MT"/>
+                <a:cs typeface="Gill Sans MT"/>
+                <a:sym typeface="Gill Sans MT"/>
+              </a:rPr>
+              <a:t>Delineate regions of rejection / non-rejection</a:t>
+            </a:r>
+          </a:p>
+        </p:txBody>
+      </p:sp>
+      <p:sp>
+        <p:nvSpPr>
           <p:cNvPr id="7" name="Rectangle 6">
             <a:extLst>
               <a:ext uri="{FF2B5EF4-FFF2-40B4-BE49-F238E27FC236}">
@@ -10038,8 +10099,8 @@
         </p:nvSpPr>
         <p:spPr>
           <a:xfrm>
-            <a:off x="449333" y="2035975"/>
-            <a:ext cx="6292426" cy="3108543"/>
+            <a:off x="449333" y="2070175"/>
+            <a:ext cx="6292426" cy="3539430"/>
           </a:xfrm>
           <a:prstGeom prst="rect">
             <a:avLst/>
@@ -10075,6 +10136,16 @@
               </a:rPr>
               <a:t>One sample test: n-1 (24 in our case)</a:t>
             </a:r>
+          </a:p>
+          <a:p>
+            <a:pPr lvl="0">
+              <a:buSzPct val="25000"/>
+            </a:pPr>
+            <a:endParaRPr lang="en-US" sz="2800" dirty="0">
+              <a:ea typeface="Gill Sans MT"/>
+              <a:cs typeface="Gill Sans MT"/>
+              <a:sym typeface="Gill Sans MT"/>
+            </a:endParaRPr>
           </a:p>
           <a:p>
             <a:pPr lvl="0">
@@ -10160,6 +10231,172 @@
           </a:prstGeom>
         </p:spPr>
       </p:pic>
+    </p:spTree>
+    <p:extLst>
+      <p:ext uri="{BB962C8B-B14F-4D97-AF65-F5344CB8AC3E}">
+        <p14:creationId xmlns:p14="http://schemas.microsoft.com/office/powerpoint/2010/main" val="3184897983"/>
+      </p:ext>
+    </p:extLst>
+  </p:cSld>
+  <p:clrMapOvr>
+    <a:masterClrMapping/>
+  </p:clrMapOvr>
+</p:sld>
+</file>
+
+<file path=ppt/slides/slide17.xml><?xml version="1.0" encoding="utf-8"?>
+<p:sld xmlns:a="http://schemas.openxmlformats.org/drawingml/2006/main" xmlns:r="http://schemas.openxmlformats.org/officeDocument/2006/relationships" xmlns:p="http://schemas.openxmlformats.org/presentationml/2006/main">
+  <p:cSld>
+    <p:spTree>
+      <p:nvGrpSpPr>
+        <p:cNvPr id="1" name="Shape 130"/>
+        <p:cNvGrpSpPr/>
+        <p:nvPr/>
+      </p:nvGrpSpPr>
+      <p:grpSpPr>
+        <a:xfrm>
+          <a:off x="0" y="0"/>
+          <a:ext cx="0" cy="0"/>
+          <a:chOff x="0" y="0"/>
+          <a:chExt cx="0" cy="0"/>
+        </a:xfrm>
+      </p:grpSpPr>
+      <p:sp>
+        <p:nvSpPr>
+          <p:cNvPr id="7" name="Rectangle 6">
+            <a:extLst>
+              <a:ext uri="{FF2B5EF4-FFF2-40B4-BE49-F238E27FC236}">
+                <a16:creationId xmlns:a16="http://schemas.microsoft.com/office/drawing/2014/main" id="{723EC99C-11A5-42CE-89E8-A7932E31ABC6}"/>
+              </a:ext>
+            </a:extLst>
+          </p:cNvPr>
+          <p:cNvSpPr/>
+          <p:nvPr/>
+        </p:nvSpPr>
+        <p:spPr>
+          <a:xfrm>
+            <a:off x="449333" y="2035975"/>
+            <a:ext cx="6292426" cy="3108543"/>
+          </a:xfrm>
+          <a:prstGeom prst="rect">
+            <a:avLst/>
+          </a:prstGeom>
+        </p:spPr>
+        <p:txBody>
+          <a:bodyPr wrap="square">
+            <a:spAutoFit/>
+          </a:bodyPr>
+          <a:lstStyle/>
+          <a:p>
+            <a:endParaRPr lang="en-US" sz="2800" dirty="0"/>
+          </a:p>
+          <a:p>
+            <a:r>
+              <a:rPr lang="en-US" sz="2800" b="1" dirty="0"/>
+              <a:t>Degrees of freedom:</a:t>
+            </a:r>
+            <a:r>
+              <a:rPr lang="en-US" sz="2800" b="1" i="1" dirty="0"/>
+              <a:t> </a:t>
+            </a:r>
+          </a:p>
+          <a:p>
+            <a:pPr lvl="0">
+              <a:buSzPct val="25000"/>
+            </a:pPr>
+            <a:r>
+              <a:rPr lang="en-US" sz="2800" dirty="0">
+                <a:ea typeface="Gill Sans MT"/>
+                <a:cs typeface="Gill Sans MT"/>
+                <a:sym typeface="Gill Sans MT"/>
+              </a:rPr>
+              <a:t>One sample test: n-1 (24 in our case)</a:t>
+            </a:r>
+          </a:p>
+          <a:p>
+            <a:pPr lvl="0">
+              <a:buSzPct val="25000"/>
+            </a:pPr>
+            <a:endParaRPr lang="en-US" sz="2800" dirty="0">
+              <a:ea typeface="Gill Sans MT"/>
+              <a:cs typeface="Gill Sans MT"/>
+              <a:sym typeface="Gill Sans MT"/>
+            </a:endParaRPr>
+          </a:p>
+          <a:p>
+            <a:pPr>
+              <a:buSzPct val="25000"/>
+            </a:pPr>
+            <a:r>
+              <a:rPr lang="en-US" sz="2800" b="1" dirty="0"/>
+              <a:t>Critical value:</a:t>
+            </a:r>
+            <a:r>
+              <a:rPr lang="en-US" sz="2800" b="1" i="1" dirty="0"/>
+              <a:t> </a:t>
+            </a:r>
+          </a:p>
+          <a:p>
+            <a:pPr lvl="0">
+              <a:buSzPct val="25000"/>
+            </a:pPr>
+            <a:r>
+              <a:rPr lang="en-US" sz="2800" dirty="0">
+                <a:ea typeface="Gill Sans MT"/>
+                <a:cs typeface="Gill Sans MT"/>
+                <a:sym typeface="Gill Sans MT"/>
+              </a:rPr>
+              <a:t>Based on confidence level (alpha) and </a:t>
+            </a:r>
+            <a:r>
+              <a:rPr lang="en-US" sz="2800" dirty="0" err="1">
+                <a:ea typeface="Gill Sans MT"/>
+                <a:cs typeface="Gill Sans MT"/>
+                <a:sym typeface="Gill Sans MT"/>
+              </a:rPr>
+              <a:t>df</a:t>
+            </a:r>
+            <a:endParaRPr lang="en-US" sz="2800" dirty="0">
+              <a:ea typeface="Gill Sans MT"/>
+              <a:cs typeface="Gill Sans MT"/>
+              <a:sym typeface="Gill Sans MT"/>
+            </a:endParaRPr>
+          </a:p>
+          <a:p>
+            <a:endParaRPr lang="en-US" sz="2800" dirty="0"/>
+          </a:p>
+        </p:txBody>
+      </p:sp>
+      <p:pic>
+        <p:nvPicPr>
+          <p:cNvPr id="10" name="Picture 9">
+            <a:extLst>
+              <a:ext uri="{FF2B5EF4-FFF2-40B4-BE49-F238E27FC236}">
+                <a16:creationId xmlns:a16="http://schemas.microsoft.com/office/drawing/2014/main" id="{0476EA96-E7C3-49FE-8148-26FB35F7A6E5}"/>
+              </a:ext>
+            </a:extLst>
+          </p:cNvPr>
+          <p:cNvPicPr>
+            <a:picLocks noChangeAspect="1"/>
+          </p:cNvPicPr>
+          <p:nvPr/>
+        </p:nvPicPr>
+        <p:blipFill>
+          <a:blip r:embed="rId3"/>
+          <a:stretch>
+            <a:fillRect/>
+          </a:stretch>
+        </p:blipFill>
+        <p:spPr>
+          <a:xfrm>
+            <a:off x="7137647" y="-1"/>
+            <a:ext cx="5054353" cy="6856681"/>
+          </a:xfrm>
+          <a:prstGeom prst="rect">
+            <a:avLst/>
+          </a:prstGeom>
+        </p:spPr>
+      </p:pic>
       <p:sp>
         <p:nvSpPr>
           <p:cNvPr id="2" name="Rectangle 1">
@@ -10315,7 +10552,7 @@
 </p:sld>
 </file>
 
-<file path=ppt/slides/slide17.xml><?xml version="1.0" encoding="utf-8"?>
+<file path=ppt/slides/slide18.xml><?xml version="1.0" encoding="utf-8"?>
 <p:sld xmlns:a="http://schemas.openxmlformats.org/drawingml/2006/main" xmlns:r="http://schemas.openxmlformats.org/officeDocument/2006/relationships" xmlns:p="http://schemas.openxmlformats.org/presentationml/2006/main">
   <p:cSld>
     <p:spTree>
@@ -10505,7 +10742,7 @@
 </p:sld>
 </file>
 
-<file path=ppt/slides/slide18.xml><?xml version="1.0" encoding="utf-8"?>
+<file path=ppt/slides/slide19.xml><?xml version="1.0" encoding="utf-8"?>
 <p:sld xmlns:a="http://schemas.openxmlformats.org/drawingml/2006/main" xmlns:r="http://schemas.openxmlformats.org/officeDocument/2006/relationships" xmlns:p="http://schemas.openxmlformats.org/presentationml/2006/main">
   <p:cSld>
     <p:spTree>
@@ -11002,7 +11239,202 @@
 </p:sld>
 </file>
 
-<file path=ppt/slides/slide19.xml><?xml version="1.0" encoding="utf-8"?>
+<file path=ppt/slides/slide2.xml><?xml version="1.0" encoding="utf-8"?>
+<p:sld xmlns:a="http://schemas.openxmlformats.org/drawingml/2006/main" xmlns:r="http://schemas.openxmlformats.org/officeDocument/2006/relationships" xmlns:p="http://schemas.openxmlformats.org/presentationml/2006/main">
+  <p:cSld>
+    <p:spTree>
+      <p:nvGrpSpPr>
+        <p:cNvPr id="1" name="Shape 100"/>
+        <p:cNvGrpSpPr/>
+        <p:nvPr/>
+      </p:nvGrpSpPr>
+      <p:grpSpPr>
+        <a:xfrm>
+          <a:off x="0" y="0"/>
+          <a:ext cx="0" cy="0"/>
+          <a:chOff x="0" y="0"/>
+          <a:chExt cx="0" cy="0"/>
+        </a:xfrm>
+      </p:grpSpPr>
+      <p:sp>
+        <p:nvSpPr>
+          <p:cNvPr id="101" name="Shape 101"/>
+          <p:cNvSpPr txBox="1"/>
+          <p:nvPr/>
+        </p:nvSpPr>
+        <p:spPr>
+          <a:xfrm>
+            <a:off x="1122112" y="528087"/>
+            <a:ext cx="5717600" cy="584700"/>
+          </a:xfrm>
+          <a:prstGeom prst="rect">
+            <a:avLst/>
+          </a:prstGeom>
+          <a:noFill/>
+          <a:ln>
+            <a:noFill/>
+          </a:ln>
+        </p:spPr>
+        <p:txBody>
+          <a:bodyPr lIns="91425" tIns="45700" rIns="91425" bIns="45700" anchor="t" anchorCtr="0">
+            <a:noAutofit/>
+          </a:bodyPr>
+          <a:lstStyle/>
+          <a:p>
+            <a:pPr>
+              <a:buSzPct val="25000"/>
+            </a:pPr>
+            <a:r>
+              <a:rPr lang="en-US" sz="3200" b="1" dirty="0">
+                <a:latin typeface="+mj-lt"/>
+                <a:ea typeface="Gill Sans MT"/>
+                <a:cs typeface="Gill Sans MT"/>
+                <a:sym typeface="Gill Sans MT"/>
+              </a:rPr>
+              <a:t>Ingredients of classical hypothesis testing</a:t>
+            </a:r>
+          </a:p>
+        </p:txBody>
+      </p:sp>
+      <p:pic>
+        <p:nvPicPr>
+          <p:cNvPr id="3" name="Picture 2" descr="A picture containing text&#10;&#10;Description automatically generated">
+            <a:extLst>
+              <a:ext uri="{FF2B5EF4-FFF2-40B4-BE49-F238E27FC236}">
+                <a16:creationId xmlns:a16="http://schemas.microsoft.com/office/drawing/2014/main" id="{3DC1E106-D16E-FD3D-A494-FB188A31F746}"/>
+              </a:ext>
+            </a:extLst>
+          </p:cNvPr>
+          <p:cNvPicPr>
+            <a:picLocks noChangeAspect="1"/>
+          </p:cNvPicPr>
+          <p:nvPr/>
+        </p:nvPicPr>
+        <p:blipFill>
+          <a:blip r:embed="rId3">
+            <a:extLst>
+              <a:ext uri="{28A0092B-C50C-407E-A947-70E740481C1C}">
+                <a14:useLocalDpi xmlns:a14="http://schemas.microsoft.com/office/drawing/2010/main" val="0"/>
+              </a:ext>
+            </a:extLst>
+          </a:blip>
+          <a:stretch>
+            <a:fillRect/>
+          </a:stretch>
+        </p:blipFill>
+        <p:spPr>
+          <a:xfrm>
+            <a:off x="6598972" y="0"/>
+            <a:ext cx="5302577" cy="6858000"/>
+          </a:xfrm>
+          <a:prstGeom prst="rect">
+            <a:avLst/>
+          </a:prstGeom>
+        </p:spPr>
+      </p:pic>
+      <p:sp>
+        <p:nvSpPr>
+          <p:cNvPr id="4" name="TextBox 3">
+            <a:extLst>
+              <a:ext uri="{FF2B5EF4-FFF2-40B4-BE49-F238E27FC236}">
+                <a16:creationId xmlns:a16="http://schemas.microsoft.com/office/drawing/2014/main" id="{F7F85CEB-23D6-D157-E282-359D3612BCCB}"/>
+              </a:ext>
+            </a:extLst>
+          </p:cNvPr>
+          <p:cNvSpPr txBox="1"/>
+          <p:nvPr/>
+        </p:nvSpPr>
+        <p:spPr>
+          <a:xfrm>
+            <a:off x="1122112" y="1837266"/>
+            <a:ext cx="5302577" cy="3416320"/>
+          </a:xfrm>
+          <a:prstGeom prst="rect">
+            <a:avLst/>
+          </a:prstGeom>
+          <a:noFill/>
+        </p:spPr>
+        <p:txBody>
+          <a:bodyPr wrap="square">
+            <a:spAutoFit/>
+          </a:bodyPr>
+          <a:lstStyle/>
+          <a:p>
+            <a:pPr marL="494100" indent="-457200">
+              <a:buFont typeface="+mj-lt"/>
+              <a:buAutoNum type="arabicPeriod"/>
+            </a:pPr>
+            <a:r>
+              <a:rPr lang="en-US" sz="2400" dirty="0"/>
+              <a:t>State the null and alternate hypothesis</a:t>
+            </a:r>
+          </a:p>
+          <a:p>
+            <a:pPr marL="494100" indent="-457200">
+              <a:buFont typeface="+mj-lt"/>
+              <a:buAutoNum type="arabicPeriod"/>
+            </a:pPr>
+            <a:r>
+              <a:rPr lang="en-US" sz="2400" dirty="0"/>
+              <a:t>Select the appropriate test</a:t>
+            </a:r>
+          </a:p>
+          <a:p>
+            <a:pPr marL="494100" indent="-457200">
+              <a:buFont typeface="+mj-lt"/>
+              <a:buAutoNum type="arabicPeriod"/>
+            </a:pPr>
+            <a:r>
+              <a:rPr lang="en-US" sz="2400" dirty="0"/>
+              <a:t>Select the level of significance</a:t>
+            </a:r>
+          </a:p>
+          <a:p>
+            <a:pPr marL="494100" indent="-457200">
+              <a:buFont typeface="+mj-lt"/>
+              <a:buAutoNum type="arabicPeriod"/>
+            </a:pPr>
+            <a:r>
+              <a:rPr lang="en-US" sz="2400" dirty="0"/>
+              <a:t>Delineate regions of rejection and non-rejection of the null hypothesis</a:t>
+            </a:r>
+          </a:p>
+          <a:p>
+            <a:pPr marL="494100" indent="-457200">
+              <a:buFont typeface="+mj-lt"/>
+              <a:buAutoNum type="arabicPeriod"/>
+            </a:pPr>
+            <a:r>
+              <a:rPr lang="en-US" sz="2400" dirty="0"/>
+              <a:t>Calculate the t-statistic</a:t>
+            </a:r>
+          </a:p>
+          <a:p>
+            <a:pPr marL="494100" indent="-457200">
+              <a:buFont typeface="+mj-lt"/>
+              <a:buAutoNum type="arabicPeriod"/>
+            </a:pPr>
+            <a:r>
+              <a:rPr lang="en-US" sz="2400" dirty="0"/>
+              <a:t>Make a decision</a:t>
+            </a:r>
+          </a:p>
+        </p:txBody>
+      </p:sp>
+    </p:spTree>
+    <p:extLst>
+      <p:ext uri="{BB962C8B-B14F-4D97-AF65-F5344CB8AC3E}">
+        <p14:creationId xmlns:p14="http://schemas.microsoft.com/office/powerpoint/2010/main" val="1512174370"/>
+      </p:ext>
+    </p:extLst>
+  </p:cSld>
+  <p:clrMapOvr>
+    <a:masterClrMapping/>
+  </p:clrMapOvr>
+</p:sld>
+</file>
+
+<file path=ppt/slides/slide20.xml><?xml version="1.0" encoding="utf-8"?>
 <p:sld xmlns:a="http://schemas.openxmlformats.org/drawingml/2006/main" xmlns:r="http://schemas.openxmlformats.org/officeDocument/2006/relationships" xmlns:p="http://schemas.openxmlformats.org/presentationml/2006/main">
   <p:cSld>
     <p:spTree>
@@ -11411,202 +11843,7 @@
 </p:sld>
 </file>
 
-<file path=ppt/slides/slide2.xml><?xml version="1.0" encoding="utf-8"?>
-<p:sld xmlns:a="http://schemas.openxmlformats.org/drawingml/2006/main" xmlns:r="http://schemas.openxmlformats.org/officeDocument/2006/relationships" xmlns:p="http://schemas.openxmlformats.org/presentationml/2006/main">
-  <p:cSld>
-    <p:spTree>
-      <p:nvGrpSpPr>
-        <p:cNvPr id="1" name="Shape 100"/>
-        <p:cNvGrpSpPr/>
-        <p:nvPr/>
-      </p:nvGrpSpPr>
-      <p:grpSpPr>
-        <a:xfrm>
-          <a:off x="0" y="0"/>
-          <a:ext cx="0" cy="0"/>
-          <a:chOff x="0" y="0"/>
-          <a:chExt cx="0" cy="0"/>
-        </a:xfrm>
-      </p:grpSpPr>
-      <p:sp>
-        <p:nvSpPr>
-          <p:cNvPr id="101" name="Shape 101"/>
-          <p:cNvSpPr txBox="1"/>
-          <p:nvPr/>
-        </p:nvSpPr>
-        <p:spPr>
-          <a:xfrm>
-            <a:off x="1122112" y="528087"/>
-            <a:ext cx="5717600" cy="584700"/>
-          </a:xfrm>
-          <a:prstGeom prst="rect">
-            <a:avLst/>
-          </a:prstGeom>
-          <a:noFill/>
-          <a:ln>
-            <a:noFill/>
-          </a:ln>
-        </p:spPr>
-        <p:txBody>
-          <a:bodyPr lIns="91425" tIns="45700" rIns="91425" bIns="45700" anchor="t" anchorCtr="0">
-            <a:noAutofit/>
-          </a:bodyPr>
-          <a:lstStyle/>
-          <a:p>
-            <a:pPr>
-              <a:buSzPct val="25000"/>
-            </a:pPr>
-            <a:r>
-              <a:rPr lang="en-US" sz="3200" b="1" dirty="0">
-                <a:latin typeface="+mj-lt"/>
-                <a:ea typeface="Gill Sans MT"/>
-                <a:cs typeface="Gill Sans MT"/>
-                <a:sym typeface="Gill Sans MT"/>
-              </a:rPr>
-              <a:t>Ingredients of classical hypothesis testing</a:t>
-            </a:r>
-          </a:p>
-        </p:txBody>
-      </p:sp>
-      <p:pic>
-        <p:nvPicPr>
-          <p:cNvPr id="3" name="Picture 2" descr="A picture containing text&#10;&#10;Description automatically generated">
-            <a:extLst>
-              <a:ext uri="{FF2B5EF4-FFF2-40B4-BE49-F238E27FC236}">
-                <a16:creationId xmlns:a16="http://schemas.microsoft.com/office/drawing/2014/main" id="{3DC1E106-D16E-FD3D-A494-FB188A31F746}"/>
-              </a:ext>
-            </a:extLst>
-          </p:cNvPr>
-          <p:cNvPicPr>
-            <a:picLocks noChangeAspect="1"/>
-          </p:cNvPicPr>
-          <p:nvPr/>
-        </p:nvPicPr>
-        <p:blipFill>
-          <a:blip r:embed="rId3">
-            <a:extLst>
-              <a:ext uri="{28A0092B-C50C-407E-A947-70E740481C1C}">
-                <a14:useLocalDpi xmlns:a14="http://schemas.microsoft.com/office/drawing/2010/main" val="0"/>
-              </a:ext>
-            </a:extLst>
-          </a:blip>
-          <a:stretch>
-            <a:fillRect/>
-          </a:stretch>
-        </p:blipFill>
-        <p:spPr>
-          <a:xfrm>
-            <a:off x="6598972" y="0"/>
-            <a:ext cx="5302577" cy="6858000"/>
-          </a:xfrm>
-          <a:prstGeom prst="rect">
-            <a:avLst/>
-          </a:prstGeom>
-        </p:spPr>
-      </p:pic>
-      <p:sp>
-        <p:nvSpPr>
-          <p:cNvPr id="4" name="TextBox 3">
-            <a:extLst>
-              <a:ext uri="{FF2B5EF4-FFF2-40B4-BE49-F238E27FC236}">
-                <a16:creationId xmlns:a16="http://schemas.microsoft.com/office/drawing/2014/main" id="{F7F85CEB-23D6-D157-E282-359D3612BCCB}"/>
-              </a:ext>
-            </a:extLst>
-          </p:cNvPr>
-          <p:cNvSpPr txBox="1"/>
-          <p:nvPr/>
-        </p:nvSpPr>
-        <p:spPr>
-          <a:xfrm>
-            <a:off x="1122112" y="1837266"/>
-            <a:ext cx="5302577" cy="3416320"/>
-          </a:xfrm>
-          <a:prstGeom prst="rect">
-            <a:avLst/>
-          </a:prstGeom>
-          <a:noFill/>
-        </p:spPr>
-        <p:txBody>
-          <a:bodyPr wrap="square">
-            <a:spAutoFit/>
-          </a:bodyPr>
-          <a:lstStyle/>
-          <a:p>
-            <a:pPr marL="494100" indent="-457200">
-              <a:buFont typeface="+mj-lt"/>
-              <a:buAutoNum type="arabicPeriod"/>
-            </a:pPr>
-            <a:r>
-              <a:rPr lang="en-US" sz="2400" dirty="0"/>
-              <a:t>State the null and alternate hypothesis</a:t>
-            </a:r>
-          </a:p>
-          <a:p>
-            <a:pPr marL="494100" indent="-457200">
-              <a:buFont typeface="+mj-lt"/>
-              <a:buAutoNum type="arabicPeriod"/>
-            </a:pPr>
-            <a:r>
-              <a:rPr lang="en-US" sz="2400" dirty="0"/>
-              <a:t>Select the appropriate test</a:t>
-            </a:r>
-          </a:p>
-          <a:p>
-            <a:pPr marL="494100" indent="-457200">
-              <a:buFont typeface="+mj-lt"/>
-              <a:buAutoNum type="arabicPeriod"/>
-            </a:pPr>
-            <a:r>
-              <a:rPr lang="en-US" sz="2400" dirty="0"/>
-              <a:t>Select the level of significance</a:t>
-            </a:r>
-          </a:p>
-          <a:p>
-            <a:pPr marL="494100" indent="-457200">
-              <a:buFont typeface="+mj-lt"/>
-              <a:buAutoNum type="arabicPeriod"/>
-            </a:pPr>
-            <a:r>
-              <a:rPr lang="en-US" sz="2400" dirty="0"/>
-              <a:t>Delineate regions of rejection and non-rejection of the null hypothesis</a:t>
-            </a:r>
-          </a:p>
-          <a:p>
-            <a:pPr marL="494100" indent="-457200">
-              <a:buFont typeface="+mj-lt"/>
-              <a:buAutoNum type="arabicPeriod"/>
-            </a:pPr>
-            <a:r>
-              <a:rPr lang="en-US" sz="2400" dirty="0"/>
-              <a:t>Calculate the t-statistic</a:t>
-            </a:r>
-          </a:p>
-          <a:p>
-            <a:pPr marL="494100" indent="-457200">
-              <a:buFont typeface="+mj-lt"/>
-              <a:buAutoNum type="arabicPeriod"/>
-            </a:pPr>
-            <a:r>
-              <a:rPr lang="en-US" sz="2400" dirty="0"/>
-              <a:t>Make a decision</a:t>
-            </a:r>
-          </a:p>
-        </p:txBody>
-      </p:sp>
-    </p:spTree>
-    <p:extLst>
-      <p:ext uri="{BB962C8B-B14F-4D97-AF65-F5344CB8AC3E}">
-        <p14:creationId xmlns:p14="http://schemas.microsoft.com/office/powerpoint/2010/main" val="1512174370"/>
-      </p:ext>
-    </p:extLst>
-  </p:cSld>
-  <p:clrMapOvr>
-    <a:masterClrMapping/>
-  </p:clrMapOvr>
-</p:sld>
-</file>
-
-<file path=ppt/slides/slide20.xml><?xml version="1.0" encoding="utf-8"?>
+<file path=ppt/slides/slide21.xml><?xml version="1.0" encoding="utf-8"?>
 <p:sld xmlns:a="http://schemas.openxmlformats.org/drawingml/2006/main" xmlns:r="http://schemas.openxmlformats.org/officeDocument/2006/relationships" xmlns:p="http://schemas.openxmlformats.org/presentationml/2006/main">
   <p:cSld>
     <p:spTree>
@@ -12280,7 +12517,7 @@
 </p:sld>
 </file>
 
-<file path=ppt/slides/slide21.xml><?xml version="1.0" encoding="utf-8"?>
+<file path=ppt/slides/slide22.xml><?xml version="1.0" encoding="utf-8"?>
 <p:sld xmlns:a="http://schemas.openxmlformats.org/drawingml/2006/main" xmlns:r="http://schemas.openxmlformats.org/officeDocument/2006/relationships" xmlns:p="http://schemas.openxmlformats.org/presentationml/2006/main">
   <p:cSld>
     <p:spTree>
@@ -12433,7 +12670,7 @@
 </p:sld>
 </file>
 
-<file path=ppt/slides/slide22.xml><?xml version="1.0" encoding="utf-8"?>
+<file path=ppt/slides/slide23.xml><?xml version="1.0" encoding="utf-8"?>
 <p:sld xmlns:a="http://schemas.openxmlformats.org/drawingml/2006/main" xmlns:r="http://schemas.openxmlformats.org/officeDocument/2006/relationships" xmlns:p="http://schemas.openxmlformats.org/presentationml/2006/main">
   <p:cSld>
     <p:spTree>
@@ -12894,7 +13131,7 @@
 </p:sld>
 </file>
 
-<file path=ppt/slides/slide23.xml><?xml version="1.0" encoding="utf-8"?>
+<file path=ppt/slides/slide24.xml><?xml version="1.0" encoding="utf-8"?>
 <p:sld xmlns:a="http://schemas.openxmlformats.org/drawingml/2006/main" xmlns:r="http://schemas.openxmlformats.org/officeDocument/2006/relationships" xmlns:p="http://schemas.openxmlformats.org/presentationml/2006/main">
   <p:cSld>
     <p:spTree>
@@ -13096,7 +13333,7 @@
 </p:sld>
 </file>
 
-<file path=ppt/slides/slide24.xml><?xml version="1.0" encoding="utf-8"?>
+<file path=ppt/slides/slide25.xml><?xml version="1.0" encoding="utf-8"?>
 <p:sld xmlns:a="http://schemas.openxmlformats.org/drawingml/2006/main" xmlns:r="http://schemas.openxmlformats.org/officeDocument/2006/relationships" xmlns:p="http://schemas.openxmlformats.org/presentationml/2006/main">
   <p:cSld>
     <p:spTree>
@@ -13208,8 +13445,8 @@
           </a:p>
         </p:txBody>
       </p:sp>
-      <mc:AlternateContent xmlns:mc="http://schemas.openxmlformats.org/markup-compatibility/2006">
-        <mc:Choice xmlns:a14="http://schemas.microsoft.com/office/drawing/2010/main" Requires="a14">
+      <mc:AlternateContent xmlns:mc="http://schemas.openxmlformats.org/markup-compatibility/2006" xmlns:a14="http://schemas.microsoft.com/office/drawing/2010/main">
+        <mc:Choice Requires="a14">
           <p:sp>
             <p:nvSpPr>
               <p:cNvPr id="5" name="TextBox 4">
@@ -13348,7 +13585,7 @@
             </p:txBody>
           </p:sp>
         </mc:Choice>
-        <mc:Fallback>
+        <mc:Fallback xmlns="">
           <p:sp>
             <p:nvSpPr>
               <p:cNvPr id="5" name="TextBox 4">
@@ -13393,8 +13630,8 @@
           </p:sp>
         </mc:Fallback>
       </mc:AlternateContent>
-      <mc:AlternateContent xmlns:mc="http://schemas.openxmlformats.org/markup-compatibility/2006">
-        <mc:Choice xmlns:a14="http://schemas.microsoft.com/office/drawing/2010/main" Requires="a14">
+      <mc:AlternateContent xmlns:mc="http://schemas.openxmlformats.org/markup-compatibility/2006" xmlns:a14="http://schemas.microsoft.com/office/drawing/2010/main">
+        <mc:Choice Requires="a14">
           <p:sp>
             <p:nvSpPr>
               <p:cNvPr id="6" name="TextBox 5">
@@ -13558,7 +13795,7 @@
             </p:txBody>
           </p:sp>
         </mc:Choice>
-        <mc:Fallback>
+        <mc:Fallback xmlns="">
           <p:sp>
             <p:nvSpPr>
               <p:cNvPr id="6" name="TextBox 5">
@@ -13686,7 +13923,7 @@
 </p:sld>
 </file>
 
-<file path=ppt/slides/slide25.xml><?xml version="1.0" encoding="utf-8"?>
+<file path=ppt/slides/slide26.xml><?xml version="1.0" encoding="utf-8"?>
 <p:sld xmlns:a="http://schemas.openxmlformats.org/drawingml/2006/main" xmlns:r="http://schemas.openxmlformats.org/officeDocument/2006/relationships" xmlns:p="http://schemas.openxmlformats.org/presentationml/2006/main">
   <p:cSld>
     <p:spTree>
@@ -13879,7 +14116,7 @@
 </p:sld>
 </file>
 
-<file path=ppt/slides/slide26.xml><?xml version="1.0" encoding="utf-8"?>
+<file path=ppt/slides/slide27.xml><?xml version="1.0" encoding="utf-8"?>
 <p:sld xmlns:a="http://schemas.openxmlformats.org/drawingml/2006/main" xmlns:r="http://schemas.openxmlformats.org/officeDocument/2006/relationships" xmlns:p="http://schemas.openxmlformats.org/presentationml/2006/main">
   <p:cSld>
     <p:spTree>
@@ -14044,7 +14281,7 @@
 </p:sld>
 </file>
 
-<file path=ppt/slides/slide27.xml><?xml version="1.0" encoding="utf-8"?>
+<file path=ppt/slides/slide28.xml><?xml version="1.0" encoding="utf-8"?>
 <p:sld xmlns:a="http://schemas.openxmlformats.org/drawingml/2006/main" xmlns:r="http://schemas.openxmlformats.org/officeDocument/2006/relationships" xmlns:p="http://schemas.openxmlformats.org/presentationml/2006/main">
   <p:cSld>
     <p:spTree>
@@ -14573,6 +14810,137 @@
   <p:cSld>
     <p:spTree>
       <p:nvGrpSpPr>
+        <p:cNvPr id="1" name=""/>
+        <p:cNvGrpSpPr/>
+        <p:nvPr/>
+      </p:nvGrpSpPr>
+      <p:grpSpPr>
+        <a:xfrm>
+          <a:off x="0" y="0"/>
+          <a:ext cx="0" cy="0"/>
+          <a:chOff x="0" y="0"/>
+          <a:chExt cx="0" cy="0"/>
+        </a:xfrm>
+      </p:grpSpPr>
+      <p:sp>
+        <p:nvSpPr>
+          <p:cNvPr id="2" name="Title 1">
+            <a:extLst>
+              <a:ext uri="{FF2B5EF4-FFF2-40B4-BE49-F238E27FC236}">
+                <a16:creationId xmlns:a16="http://schemas.microsoft.com/office/drawing/2014/main" id="{503AA871-6CBD-627E-43BD-B3CC1BF30944}"/>
+              </a:ext>
+            </a:extLst>
+          </p:cNvPr>
+          <p:cNvSpPr>
+            <a:spLocks noGrp="1"/>
+          </p:cNvSpPr>
+          <p:nvPr>
+            <p:ph type="title"/>
+          </p:nvPr>
+        </p:nvSpPr>
+        <p:spPr/>
+        <p:txBody>
+          <a:bodyPr/>
+          <a:lstStyle/>
+          <a:p>
+            <a:r>
+              <a:rPr lang="en-US" dirty="0"/>
+              <a:t>Variable types in statistical tests </a:t>
+            </a:r>
+          </a:p>
+        </p:txBody>
+      </p:sp>
+      <p:sp>
+        <p:nvSpPr>
+          <p:cNvPr id="3" name="Content Placeholder 2">
+            <a:extLst>
+              <a:ext uri="{FF2B5EF4-FFF2-40B4-BE49-F238E27FC236}">
+                <a16:creationId xmlns:a16="http://schemas.microsoft.com/office/drawing/2014/main" id="{85FA01F4-EC19-DF86-758F-5A2D790D3BD8}"/>
+              </a:ext>
+            </a:extLst>
+          </p:cNvPr>
+          <p:cNvSpPr>
+            <a:spLocks noGrp="1"/>
+          </p:cNvSpPr>
+          <p:nvPr>
+            <p:ph idx="1"/>
+          </p:nvPr>
+        </p:nvSpPr>
+        <p:spPr>
+          <a:xfrm>
+            <a:off x="1274562" y="1876623"/>
+            <a:ext cx="10058400" cy="4023360"/>
+          </a:xfrm>
+        </p:spPr>
+        <p:txBody>
+          <a:bodyPr/>
+          <a:lstStyle/>
+          <a:p>
+            <a:pPr marL="379800" indent="-342900"/>
+            <a:r>
+              <a:rPr lang="en-US" b="1" dirty="0"/>
+              <a:t>Independent variable</a:t>
+            </a:r>
+          </a:p>
+          <a:p>
+            <a:pPr marL="530485" lvl="1" indent="-342900"/>
+            <a:r>
+              <a:rPr lang="en-US" dirty="0"/>
+              <a:t>The variable being intentionally changed by the researcher for the purpose of the test</a:t>
+            </a:r>
+          </a:p>
+          <a:p>
+            <a:pPr marL="530485" lvl="1" indent="-342900"/>
+            <a:r>
+              <a:rPr lang="en-US" dirty="0"/>
+              <a:t>Not the “cause” of change in the dependent variable, but something that is related to it</a:t>
+            </a:r>
+          </a:p>
+          <a:p>
+            <a:pPr marL="530485" lvl="1" indent="-342900"/>
+            <a:endParaRPr lang="en-US" dirty="0"/>
+          </a:p>
+          <a:p>
+            <a:pPr marL="379800" indent="-342900"/>
+            <a:r>
+              <a:rPr lang="en-US" b="1" dirty="0"/>
+              <a:t>Dependent variable</a:t>
+            </a:r>
+          </a:p>
+          <a:p>
+            <a:pPr marL="530485" lvl="1" indent="-342900"/>
+            <a:r>
+              <a:rPr lang="en-US" dirty="0"/>
+              <a:t>The variable affected by change in the dependent variable</a:t>
+            </a:r>
+          </a:p>
+          <a:p>
+            <a:pPr marL="494100" indent="-457200">
+              <a:buFont typeface="+mj-lt"/>
+              <a:buAutoNum type="arabicPeriod"/>
+            </a:pPr>
+            <a:endParaRPr lang="en-US" dirty="0"/>
+          </a:p>
+        </p:txBody>
+      </p:sp>
+    </p:spTree>
+    <p:extLst>
+      <p:ext uri="{BB962C8B-B14F-4D97-AF65-F5344CB8AC3E}">
+        <p14:creationId xmlns:p14="http://schemas.microsoft.com/office/powerpoint/2010/main" val="4025398185"/>
+      </p:ext>
+    </p:extLst>
+  </p:cSld>
+  <p:clrMapOvr>
+    <a:masterClrMapping/>
+  </p:clrMapOvr>
+</p:sld>
+</file>
+
+<file path=ppt/slides/slide5.xml><?xml version="1.0" encoding="utf-8"?>
+<p:sld xmlns:a="http://schemas.openxmlformats.org/drawingml/2006/main" xmlns:r="http://schemas.openxmlformats.org/officeDocument/2006/relationships" xmlns:p="http://schemas.openxmlformats.org/presentationml/2006/main">
+  <p:cSld>
+    <p:spTree>
+      <p:nvGrpSpPr>
         <p:cNvPr id="1" name="Shape 100"/>
         <p:cNvGrpSpPr/>
         <p:nvPr/>
@@ -14654,7 +15022,7 @@
           <a:p>
             <a:r>
               <a:rPr lang="en-US" sz="2800" dirty="0"/>
-              <a:t>Give the null and alterative hypothesis for the following research questions.</a:t>
+              <a:t>Give the null and alterative hypothesis for the following research questions. Also state the independent/dependent variable</a:t>
             </a:r>
           </a:p>
           <a:p>
@@ -14715,7 +15083,7 @@
 </p:sld>
 </file>
 
-<file path=ppt/slides/slide5.xml><?xml version="1.0" encoding="utf-8"?>
+<file path=ppt/slides/slide6.xml><?xml version="1.0" encoding="utf-8"?>
 <p:sld xmlns:a="http://schemas.openxmlformats.org/drawingml/2006/main" xmlns:r="http://schemas.openxmlformats.org/officeDocument/2006/relationships" xmlns:p="http://schemas.openxmlformats.org/presentationml/2006/main">
   <p:cSld>
     <p:spTree>
@@ -14819,182 +15187,6 @@
     <p:extLst>
       <p:ext uri="{BB962C8B-B14F-4D97-AF65-F5344CB8AC3E}">
         <p14:creationId xmlns:p14="http://schemas.microsoft.com/office/powerpoint/2010/main" val="2494979888"/>
-      </p:ext>
-    </p:extLst>
-  </p:cSld>
-  <p:clrMapOvr>
-    <a:masterClrMapping/>
-  </p:clrMapOvr>
-</p:sld>
-</file>
-
-<file path=ppt/slides/slide6.xml><?xml version="1.0" encoding="utf-8"?>
-<p:sld xmlns:a="http://schemas.openxmlformats.org/drawingml/2006/main" xmlns:r="http://schemas.openxmlformats.org/officeDocument/2006/relationships" xmlns:p="http://schemas.openxmlformats.org/presentationml/2006/main">
-  <p:cSld>
-    <p:spTree>
-      <p:nvGrpSpPr>
-        <p:cNvPr id="1" name="Shape 130"/>
-        <p:cNvGrpSpPr/>
-        <p:nvPr/>
-      </p:nvGrpSpPr>
-      <p:grpSpPr>
-        <a:xfrm>
-          <a:off x="0" y="0"/>
-          <a:ext cx="0" cy="0"/>
-          <a:chOff x="0" y="0"/>
-          <a:chExt cx="0" cy="0"/>
-        </a:xfrm>
-      </p:grpSpPr>
-      <p:sp>
-        <p:nvSpPr>
-          <p:cNvPr id="132" name="Shape 132"/>
-          <p:cNvSpPr txBox="1"/>
-          <p:nvPr/>
-        </p:nvSpPr>
-        <p:spPr>
-          <a:xfrm>
-            <a:off x="1137472" y="792875"/>
-            <a:ext cx="9387271" cy="853046"/>
-          </a:xfrm>
-          <a:prstGeom prst="rect">
-            <a:avLst/>
-          </a:prstGeom>
-          <a:noFill/>
-          <a:ln>
-            <a:noFill/>
-          </a:ln>
-        </p:spPr>
-        <p:txBody>
-          <a:bodyPr lIns="91425" tIns="45700" rIns="91425" bIns="45700" anchor="t" anchorCtr="0">
-            <a:noAutofit/>
-          </a:bodyPr>
-          <a:lstStyle/>
-          <a:p>
-            <a:pPr>
-              <a:spcBef>
-                <a:spcPts val="560"/>
-              </a:spcBef>
-              <a:buClr>
-                <a:srgbClr val="FFFF66"/>
-              </a:buClr>
-              <a:buSzPct val="25000"/>
-            </a:pPr>
-            <a:r>
-              <a:rPr lang="en-US" sz="4000" b="1" dirty="0">
-                <a:ea typeface="Gill Sans MT"/>
-                <a:cs typeface="Gill Sans MT"/>
-                <a:sym typeface="Gill Sans MT"/>
-              </a:rPr>
-              <a:t>Tests of difference</a:t>
-            </a:r>
-            <a:endParaRPr lang="en-US" sz="4000" b="1" dirty="0">
-              <a:effectLst/>
-              <a:ea typeface="Gill Sans MT"/>
-              <a:cs typeface="Gill Sans MT"/>
-              <a:sym typeface="Gill Sans MT"/>
-            </a:endParaRPr>
-          </a:p>
-        </p:txBody>
-      </p:sp>
-      <p:sp>
-        <p:nvSpPr>
-          <p:cNvPr id="2" name="Rectangle 1">
-            <a:extLst>
-              <a:ext uri="{FF2B5EF4-FFF2-40B4-BE49-F238E27FC236}">
-                <a16:creationId xmlns:a16="http://schemas.microsoft.com/office/drawing/2014/main" id="{89E8621C-82F3-42A2-89F9-F4AEFEBF5767}"/>
-              </a:ext>
-            </a:extLst>
-          </p:cNvPr>
-          <p:cNvSpPr/>
-          <p:nvPr/>
-        </p:nvSpPr>
-        <p:spPr>
-          <a:xfrm>
-            <a:off x="1137473" y="1965258"/>
-            <a:ext cx="10164169" cy="3539430"/>
-          </a:xfrm>
-          <a:prstGeom prst="rect">
-            <a:avLst/>
-          </a:prstGeom>
-        </p:spPr>
-        <p:txBody>
-          <a:bodyPr wrap="square">
-            <a:spAutoFit/>
-          </a:bodyPr>
-          <a:lstStyle/>
-          <a:p>
-            <a:r>
-              <a:rPr lang="en-US" sz="2800" dirty="0"/>
-              <a:t>What is the specific purpose of this test? When would you use it rather than another one?</a:t>
-            </a:r>
-          </a:p>
-          <a:p>
-            <a:endParaRPr lang="en-US" sz="2800" dirty="0"/>
-          </a:p>
-          <a:p>
-            <a:pPr marL="457200" indent="-457200">
-              <a:buFont typeface="Arial" panose="020B0604020202020204" pitchFamily="34" charset="0"/>
-              <a:buChar char="•"/>
-            </a:pPr>
-            <a:r>
-              <a:rPr lang="en-US" sz="2800" dirty="0"/>
-              <a:t>One sample t-test</a:t>
-            </a:r>
-          </a:p>
-          <a:p>
-            <a:pPr marL="457200" indent="-457200">
-              <a:buFont typeface="Arial" panose="020B0604020202020204" pitchFamily="34" charset="0"/>
-              <a:buChar char="•"/>
-            </a:pPr>
-            <a:r>
-              <a:rPr lang="en-US" sz="2800" dirty="0"/>
-              <a:t>Two sample t-test </a:t>
-            </a:r>
-          </a:p>
-          <a:p>
-            <a:pPr marL="457200" indent="-457200">
-              <a:buFont typeface="Arial" panose="020B0604020202020204" pitchFamily="34" charset="0"/>
-              <a:buChar char="•"/>
-            </a:pPr>
-            <a:r>
-              <a:rPr lang="en-US" sz="2800" dirty="0"/>
-              <a:t>Two sample </a:t>
-            </a:r>
-            <a:r>
-              <a:rPr lang="en-US" sz="2800" u="sng" dirty="0"/>
-              <a:t>paired</a:t>
-            </a:r>
-            <a:r>
-              <a:rPr lang="en-US" sz="2800" dirty="0"/>
-              <a:t> t-test</a:t>
-            </a:r>
-          </a:p>
-          <a:p>
-            <a:pPr marL="457200" indent="-457200">
-              <a:buFont typeface="Arial" panose="020B0604020202020204" pitchFamily="34" charset="0"/>
-              <a:buChar char="•"/>
-            </a:pPr>
-            <a:r>
-              <a:rPr lang="en-US" sz="2800" dirty="0"/>
-              <a:t>Non-parametric (Wilcoxon) t-test</a:t>
-            </a:r>
-          </a:p>
-          <a:p>
-            <a:pPr marL="457200" indent="-457200">
-              <a:buFont typeface="Arial" panose="020B0604020202020204" pitchFamily="34" charset="0"/>
-              <a:buChar char="•"/>
-            </a:pPr>
-            <a:r>
-              <a:rPr lang="en-US" sz="2800" dirty="0"/>
-              <a:t>Difference test between two proportions</a:t>
-            </a:r>
-          </a:p>
-        </p:txBody>
-      </p:sp>
-    </p:spTree>
-    <p:extLst>
-      <p:ext uri="{BB962C8B-B14F-4D97-AF65-F5344CB8AC3E}">
-        <p14:creationId xmlns:p14="http://schemas.microsoft.com/office/powerpoint/2010/main" val="127034564"/>
       </p:ext>
     </p:extLst>
   </p:cSld>
@@ -15029,6 +15221,182 @@
         </p:nvSpPr>
         <p:spPr>
           <a:xfrm>
+            <a:off x="1137472" y="792875"/>
+            <a:ext cx="9387271" cy="853046"/>
+          </a:xfrm>
+          <a:prstGeom prst="rect">
+            <a:avLst/>
+          </a:prstGeom>
+          <a:noFill/>
+          <a:ln>
+            <a:noFill/>
+          </a:ln>
+        </p:spPr>
+        <p:txBody>
+          <a:bodyPr lIns="91425" tIns="45700" rIns="91425" bIns="45700" anchor="t" anchorCtr="0">
+            <a:noAutofit/>
+          </a:bodyPr>
+          <a:lstStyle/>
+          <a:p>
+            <a:pPr>
+              <a:spcBef>
+                <a:spcPts val="560"/>
+              </a:spcBef>
+              <a:buClr>
+                <a:srgbClr val="FFFF66"/>
+              </a:buClr>
+              <a:buSzPct val="25000"/>
+            </a:pPr>
+            <a:r>
+              <a:rPr lang="en-US" sz="4000" b="1" dirty="0">
+                <a:ea typeface="Gill Sans MT"/>
+                <a:cs typeface="Gill Sans MT"/>
+                <a:sym typeface="Gill Sans MT"/>
+              </a:rPr>
+              <a:t>Tests of difference</a:t>
+            </a:r>
+            <a:endParaRPr lang="en-US" sz="4000" b="1" dirty="0">
+              <a:effectLst/>
+              <a:ea typeface="Gill Sans MT"/>
+              <a:cs typeface="Gill Sans MT"/>
+              <a:sym typeface="Gill Sans MT"/>
+            </a:endParaRPr>
+          </a:p>
+        </p:txBody>
+      </p:sp>
+      <p:sp>
+        <p:nvSpPr>
+          <p:cNvPr id="2" name="Rectangle 1">
+            <a:extLst>
+              <a:ext uri="{FF2B5EF4-FFF2-40B4-BE49-F238E27FC236}">
+                <a16:creationId xmlns:a16="http://schemas.microsoft.com/office/drawing/2014/main" id="{89E8621C-82F3-42A2-89F9-F4AEFEBF5767}"/>
+              </a:ext>
+            </a:extLst>
+          </p:cNvPr>
+          <p:cNvSpPr/>
+          <p:nvPr/>
+        </p:nvSpPr>
+        <p:spPr>
+          <a:xfrm>
+            <a:off x="1137473" y="1965258"/>
+            <a:ext cx="10164169" cy="3539430"/>
+          </a:xfrm>
+          <a:prstGeom prst="rect">
+            <a:avLst/>
+          </a:prstGeom>
+        </p:spPr>
+        <p:txBody>
+          <a:bodyPr wrap="square">
+            <a:spAutoFit/>
+          </a:bodyPr>
+          <a:lstStyle/>
+          <a:p>
+            <a:r>
+              <a:rPr lang="en-US" sz="2800" dirty="0"/>
+              <a:t>What is the specific purpose of this test? When would you use it rather than another one?</a:t>
+            </a:r>
+          </a:p>
+          <a:p>
+            <a:endParaRPr lang="en-US" sz="2800" dirty="0"/>
+          </a:p>
+          <a:p>
+            <a:pPr marL="457200" indent="-457200">
+              <a:buFont typeface="Arial" panose="020B0604020202020204" pitchFamily="34" charset="0"/>
+              <a:buChar char="•"/>
+            </a:pPr>
+            <a:r>
+              <a:rPr lang="en-US" sz="2800" dirty="0"/>
+              <a:t>One sample t-test</a:t>
+            </a:r>
+          </a:p>
+          <a:p>
+            <a:pPr marL="457200" indent="-457200">
+              <a:buFont typeface="Arial" panose="020B0604020202020204" pitchFamily="34" charset="0"/>
+              <a:buChar char="•"/>
+            </a:pPr>
+            <a:r>
+              <a:rPr lang="en-US" sz="2800" dirty="0"/>
+              <a:t>Two sample t-test </a:t>
+            </a:r>
+          </a:p>
+          <a:p>
+            <a:pPr marL="457200" indent="-457200">
+              <a:buFont typeface="Arial" panose="020B0604020202020204" pitchFamily="34" charset="0"/>
+              <a:buChar char="•"/>
+            </a:pPr>
+            <a:r>
+              <a:rPr lang="en-US" sz="2800" dirty="0"/>
+              <a:t>Two sample </a:t>
+            </a:r>
+            <a:r>
+              <a:rPr lang="en-US" sz="2800" u="sng" dirty="0"/>
+              <a:t>paired</a:t>
+            </a:r>
+            <a:r>
+              <a:rPr lang="en-US" sz="2800" dirty="0"/>
+              <a:t> t-test</a:t>
+            </a:r>
+          </a:p>
+          <a:p>
+            <a:pPr marL="457200" indent="-457200">
+              <a:buFont typeface="Arial" panose="020B0604020202020204" pitchFamily="34" charset="0"/>
+              <a:buChar char="•"/>
+            </a:pPr>
+            <a:r>
+              <a:rPr lang="en-US" sz="2800" dirty="0"/>
+              <a:t>Non-parametric (Wilcoxon) t-test</a:t>
+            </a:r>
+          </a:p>
+          <a:p>
+            <a:pPr marL="457200" indent="-457200">
+              <a:buFont typeface="Arial" panose="020B0604020202020204" pitchFamily="34" charset="0"/>
+              <a:buChar char="•"/>
+            </a:pPr>
+            <a:r>
+              <a:rPr lang="en-US" sz="2800" dirty="0"/>
+              <a:t>Difference test between two proportions</a:t>
+            </a:r>
+          </a:p>
+        </p:txBody>
+      </p:sp>
+    </p:spTree>
+    <p:extLst>
+      <p:ext uri="{BB962C8B-B14F-4D97-AF65-F5344CB8AC3E}">
+        <p14:creationId xmlns:p14="http://schemas.microsoft.com/office/powerpoint/2010/main" val="127034564"/>
+      </p:ext>
+    </p:extLst>
+  </p:cSld>
+  <p:clrMapOvr>
+    <a:masterClrMapping/>
+  </p:clrMapOvr>
+</p:sld>
+</file>
+
+<file path=ppt/slides/slide8.xml><?xml version="1.0" encoding="utf-8"?>
+<p:sld xmlns:a="http://schemas.openxmlformats.org/drawingml/2006/main" xmlns:r="http://schemas.openxmlformats.org/officeDocument/2006/relationships" xmlns:p="http://schemas.openxmlformats.org/presentationml/2006/main">
+  <p:cSld>
+    <p:spTree>
+      <p:nvGrpSpPr>
+        <p:cNvPr id="1" name="Shape 130"/>
+        <p:cNvGrpSpPr/>
+        <p:nvPr/>
+      </p:nvGrpSpPr>
+      <p:grpSpPr>
+        <a:xfrm>
+          <a:off x="0" y="0"/>
+          <a:ext cx="0" cy="0"/>
+          <a:chOff x="0" y="0"/>
+          <a:chExt cx="0" cy="0"/>
+        </a:xfrm>
+      </p:grpSpPr>
+      <p:sp>
+        <p:nvSpPr>
+          <p:cNvPr id="132" name="Shape 132"/>
+          <p:cNvSpPr txBox="1"/>
+          <p:nvPr/>
+        </p:nvSpPr>
+        <p:spPr>
+          <a:xfrm>
             <a:off x="1298448" y="869114"/>
             <a:ext cx="5901571" cy="854295"/>
           </a:xfrm>
@@ -15097,7 +15465,7 @@
 </p:sld>
 </file>
 
-<file path=ppt/slides/slide8.xml><?xml version="1.0" encoding="utf-8"?>
+<file path=ppt/slides/slide9.xml><?xml version="1.0" encoding="utf-8"?>
 <p:sld xmlns:a="http://schemas.openxmlformats.org/drawingml/2006/main" xmlns:r="http://schemas.openxmlformats.org/officeDocument/2006/relationships" xmlns:p="http://schemas.openxmlformats.org/presentationml/2006/main">
   <p:cSld>
     <p:spTree>
@@ -15146,8 +15514,8 @@
           </a:p>
         </p:txBody>
       </p:sp>
-      <mc:AlternateContent xmlns:mc="http://schemas.openxmlformats.org/markup-compatibility/2006">
-        <mc:Choice xmlns:a14="http://schemas.microsoft.com/office/drawing/2010/main" Requires="a14">
+      <mc:AlternateContent xmlns:mc="http://schemas.openxmlformats.org/markup-compatibility/2006" xmlns:a14="http://schemas.microsoft.com/office/drawing/2010/main">
+        <mc:Choice Requires="a14">
           <p:sp>
             <p:nvSpPr>
               <p:cNvPr id="2" name="TextBox 1">
@@ -15358,7 +15726,7 @@
             </p:txBody>
           </p:sp>
         </mc:Choice>
-        <mc:Fallback>
+        <mc:Fallback xmlns="">
           <p:sp>
             <p:nvSpPr>
               <p:cNvPr id="2" name="TextBox 1">
@@ -15509,242 +15877,6 @@
     <p:extLst>
       <p:ext uri="{BB962C8B-B14F-4D97-AF65-F5344CB8AC3E}">
         <p14:creationId xmlns:p14="http://schemas.microsoft.com/office/powerpoint/2010/main" val="2890252997"/>
-      </p:ext>
-    </p:extLst>
-  </p:cSld>
-  <p:clrMapOvr>
-    <a:masterClrMapping/>
-  </p:clrMapOvr>
-</p:sld>
-</file>
-
-<file path=ppt/slides/slide9.xml><?xml version="1.0" encoding="utf-8"?>
-<p:sld xmlns:a="http://schemas.openxmlformats.org/drawingml/2006/main" xmlns:r="http://schemas.openxmlformats.org/officeDocument/2006/relationships" xmlns:p="http://schemas.openxmlformats.org/presentationml/2006/main">
-  <p:cSld>
-    <p:spTree>
-      <p:nvGrpSpPr>
-        <p:cNvPr id="1" name="Shape 130"/>
-        <p:cNvGrpSpPr/>
-        <p:nvPr/>
-      </p:nvGrpSpPr>
-      <p:grpSpPr>
-        <a:xfrm>
-          <a:off x="0" y="0"/>
-          <a:ext cx="0" cy="0"/>
-          <a:chOff x="0" y="0"/>
-          <a:chExt cx="0" cy="0"/>
-        </a:xfrm>
-      </p:grpSpPr>
-      <p:sp>
-        <p:nvSpPr>
-          <p:cNvPr id="132" name="Shape 132"/>
-          <p:cNvSpPr txBox="1"/>
-          <p:nvPr/>
-        </p:nvSpPr>
-        <p:spPr>
-          <a:xfrm>
-            <a:off x="1298448" y="976690"/>
-            <a:ext cx="9781928" cy="854295"/>
-          </a:xfrm>
-          <a:prstGeom prst="rect">
-            <a:avLst/>
-          </a:prstGeom>
-          <a:noFill/>
-          <a:ln>
-            <a:noFill/>
-          </a:ln>
-        </p:spPr>
-        <p:txBody>
-          <a:bodyPr lIns="91425" tIns="45700" rIns="91425" bIns="45700" anchor="t" anchorCtr="0">
-            <a:noAutofit/>
-          </a:bodyPr>
-          <a:lstStyle/>
-          <a:p>
-            <a:r>
-              <a:rPr lang="en-US" sz="3600" b="1" dirty="0"/>
-              <a:t>T-distributions are for small samples</a:t>
-            </a:r>
-          </a:p>
-        </p:txBody>
-      </p:sp>
-      <p:pic>
-        <p:nvPicPr>
-          <p:cNvPr id="2050" name="Picture 2" descr="T Distribution Detailed Table , Z TABLE - SGEIZ">
-            <a:extLst>
-              <a:ext uri="{FF2B5EF4-FFF2-40B4-BE49-F238E27FC236}">
-                <a16:creationId xmlns:a16="http://schemas.microsoft.com/office/drawing/2014/main" id="{F14B5492-9C30-D4D9-7B39-E94C638257CB}"/>
-              </a:ext>
-            </a:extLst>
-          </p:cNvPr>
-          <p:cNvPicPr>
-            <a:picLocks noChangeAspect="1" noChangeArrowheads="1"/>
-          </p:cNvPicPr>
-          <p:nvPr/>
-        </p:nvPicPr>
-        <p:blipFill>
-          <a:blip r:embed="rId3">
-            <a:extLst>
-              <a:ext uri="{28A0092B-C50C-407E-A947-70E740481C1C}">
-                <a14:useLocalDpi xmlns:a14="http://schemas.microsoft.com/office/drawing/2010/main" val="0"/>
-              </a:ext>
-            </a:extLst>
-          </a:blip>
-          <a:srcRect/>
-          <a:stretch>
-            <a:fillRect/>
-          </a:stretch>
-        </p:blipFill>
-        <p:spPr bwMode="auto">
-          <a:xfrm>
-            <a:off x="5336966" y="2034987"/>
-            <a:ext cx="5830536" cy="4060451"/>
-          </a:xfrm>
-          <a:prstGeom prst="rect">
-            <a:avLst/>
-          </a:prstGeom>
-          <a:noFill/>
-          <a:extLst>
-            <a:ext uri="{909E8E84-426E-40DD-AFC4-6F175D3DCCD1}">
-              <a14:hiddenFill xmlns:a14="http://schemas.microsoft.com/office/drawing/2010/main">
-                <a:solidFill>
-                  <a:srgbClr val="FFFFFF"/>
-                </a:solidFill>
-              </a14:hiddenFill>
-            </a:ext>
-          </a:extLst>
-        </p:spPr>
-      </p:pic>
-      <p:sp>
-        <p:nvSpPr>
-          <p:cNvPr id="4" name="TextBox 3">
-            <a:extLst>
-              <a:ext uri="{FF2B5EF4-FFF2-40B4-BE49-F238E27FC236}">
-                <a16:creationId xmlns:a16="http://schemas.microsoft.com/office/drawing/2014/main" id="{CBD69C08-FDB1-E6D5-E062-743D18946680}"/>
-              </a:ext>
-            </a:extLst>
-          </p:cNvPr>
-          <p:cNvSpPr txBox="1"/>
-          <p:nvPr/>
-        </p:nvSpPr>
-        <p:spPr>
-          <a:xfrm>
-            <a:off x="1212757" y="2106704"/>
-            <a:ext cx="3836894" cy="2308324"/>
-          </a:xfrm>
-          <a:prstGeom prst="rect">
-            <a:avLst/>
-          </a:prstGeom>
-          <a:noFill/>
-        </p:spPr>
-        <p:txBody>
-          <a:bodyPr wrap="square">
-            <a:spAutoFit/>
-          </a:bodyPr>
-          <a:lstStyle/>
-          <a:p>
-            <a:r>
-              <a:rPr lang="en-US" sz="2400" b="1" dirty="0"/>
-              <a:t>Degrees of freedom (</a:t>
-            </a:r>
-            <a:r>
-              <a:rPr lang="en-US" sz="2400" b="1" dirty="0" err="1"/>
-              <a:t>df</a:t>
-            </a:r>
-            <a:r>
-              <a:rPr lang="en-US" sz="2400" b="1" dirty="0"/>
-              <a:t>):</a:t>
-            </a:r>
-            <a:r>
-              <a:rPr lang="en-US" sz="2400" b="1" i="1" dirty="0"/>
-              <a:t> </a:t>
-            </a:r>
-          </a:p>
-          <a:p>
-            <a:pPr marL="342900" lvl="0" indent="-342900">
-              <a:buSzPct val="100000"/>
-              <a:buFont typeface="Arial" panose="020B0604020202020204" pitchFamily="34" charset="0"/>
-              <a:buChar char="•"/>
-            </a:pPr>
-            <a:r>
-              <a:rPr lang="en-US" sz="2400" dirty="0">
-                <a:ea typeface="Gill Sans MT"/>
-                <a:cs typeface="Gill Sans MT"/>
-                <a:sym typeface="Gill Sans MT"/>
-              </a:rPr>
-              <a:t>Sample size (n) – 1</a:t>
-            </a:r>
-            <a:endParaRPr lang="en-US" sz="2400" dirty="0">
-              <a:sym typeface="Gill Sans MT"/>
-            </a:endParaRPr>
-          </a:p>
-          <a:p>
-            <a:pPr marL="342900" lvl="0" indent="-342900">
-              <a:buSzPct val="100000"/>
-              <a:buFont typeface="Arial" panose="020B0604020202020204" pitchFamily="34" charset="0"/>
-              <a:buChar char="•"/>
-            </a:pPr>
-            <a:r>
-              <a:rPr lang="en-US" sz="2400" dirty="0">
-                <a:sym typeface="Gill Sans MT"/>
-              </a:rPr>
-              <a:t>Small sample sizes = “fatter” tails</a:t>
-            </a:r>
-          </a:p>
-          <a:p>
-            <a:pPr marL="342900" lvl="0" indent="-342900">
-              <a:buSzPct val="100000"/>
-              <a:buFont typeface="Arial" panose="020B0604020202020204" pitchFamily="34" charset="0"/>
-              <a:buChar char="•"/>
-            </a:pPr>
-            <a:r>
-              <a:rPr lang="en-US" sz="2400" dirty="0">
-                <a:sym typeface="Gill Sans MT"/>
-              </a:rPr>
-              <a:t>Main differences are for n&lt;30</a:t>
-            </a:r>
-            <a:endParaRPr lang="en-US" sz="2400" dirty="0"/>
-          </a:p>
-        </p:txBody>
-      </p:sp>
-      <p:sp>
-        <p:nvSpPr>
-          <p:cNvPr id="8" name="TextBox 7">
-            <a:extLst>
-              <a:ext uri="{FF2B5EF4-FFF2-40B4-BE49-F238E27FC236}">
-                <a16:creationId xmlns:a16="http://schemas.microsoft.com/office/drawing/2014/main" id="{8049A9BE-CEC2-90C6-2A68-318F48370583}"/>
-              </a:ext>
-            </a:extLst>
-          </p:cNvPr>
-          <p:cNvSpPr txBox="1"/>
-          <p:nvPr/>
-        </p:nvSpPr>
-        <p:spPr>
-          <a:xfrm>
-            <a:off x="6938682" y="5750505"/>
-            <a:ext cx="3989294" cy="261610"/>
-          </a:xfrm>
-          <a:prstGeom prst="rect">
-            <a:avLst/>
-          </a:prstGeom>
-          <a:noFill/>
-        </p:spPr>
-        <p:txBody>
-          <a:bodyPr wrap="square">
-            <a:spAutoFit/>
-          </a:bodyPr>
-          <a:lstStyle/>
-          <a:p>
-            <a:r>
-              <a:rPr lang="en-US" sz="1100" i="1" dirty="0"/>
-              <a:t>https://private.smaat.de/t-distribution-detailed-table-z-table/</a:t>
-            </a:r>
-          </a:p>
-        </p:txBody>
-      </p:sp>
-    </p:spTree>
-    <p:extLst>
-      <p:ext uri="{BB962C8B-B14F-4D97-AF65-F5344CB8AC3E}">
-        <p14:creationId xmlns:p14="http://schemas.microsoft.com/office/powerpoint/2010/main" val="921666443"/>
       </p:ext>
     </p:extLst>
   </p:cSld>
